--- a/presentazione/Presentazione progetto Calcolo Numerico 2026.pptx
+++ b/presentazione/Presentazione progetto Calcolo Numerico 2026.pptx
@@ -15,11 +15,11 @@
     <p:sldId id="285" r:id="rId6"/>
     <p:sldId id="282" r:id="rId7"/>
     <p:sldId id="271" r:id="rId8"/>
-    <p:sldId id="291" r:id="rId9"/>
-    <p:sldId id="293" r:id="rId10"/>
-    <p:sldId id="294" r:id="rId11"/>
-    <p:sldId id="295" r:id="rId12"/>
-    <p:sldId id="296" r:id="rId13"/>
+    <p:sldId id="296" r:id="rId9"/>
+    <p:sldId id="311" r:id="rId10"/>
+    <p:sldId id="312" r:id="rId11"/>
+    <p:sldId id="313" r:id="rId12"/>
+    <p:sldId id="314" r:id="rId13"/>
     <p:sldId id="297" r:id="rId14"/>
     <p:sldId id="298" r:id="rId15"/>
     <p:sldId id="299" r:id="rId16"/>
@@ -131,6 +131,67 @@
     </a:lvl9pPr>
   </p:defaultTextStyle>
   <p:extLst>
+    <p:ext uri="{521415D9-36F7-43E2-AB2F-B90AF26B5E84}">
+      <p14:sectionLst xmlns:p14="http://schemas.microsoft.com/office/powerpoint/2010/main">
+        <p14:section name="Copertina" id="{1F421A04-5BFC-4172-96EB-2540C69CE41B}">
+          <p14:sldIdLst>
+            <p14:sldId id="278"/>
+          </p14:sldIdLst>
+        </p14:section>
+        <p14:section name="Progetto scelto" id="{1E664024-1233-49A8-96AC-E0C1088F0E0F}">
+          <p14:sldIdLst>
+            <p14:sldId id="285"/>
+          </p14:sldIdLst>
+        </p14:section>
+        <p14:section name="Sommario" id="{513C1281-B834-48D1-9FB4-7FFFC8372859}">
+          <p14:sldIdLst>
+            <p14:sldId id="282"/>
+          </p14:sldIdLst>
+        </p14:section>
+        <p14:section name="Contesto teorico e scopo del progetto" id="{41EC7878-BA32-4688-B834-9CB5D797726F}">
+          <p14:sldIdLst>
+            <p14:sldId id="271"/>
+            <p14:sldId id="296"/>
+            <p14:sldId id="311"/>
+            <p14:sldId id="312"/>
+            <p14:sldId id="313"/>
+            <p14:sldId id="314"/>
+          </p14:sldIdLst>
+        </p14:section>
+        <p14:section name="Inizializzazione" id="{8FC0DA3E-F5E6-4939-96F4-DECE1E330336}">
+          <p14:sldIdLst>
+            <p14:sldId id="297"/>
+            <p14:sldId id="298"/>
+          </p14:sldIdLst>
+        </p14:section>
+        <p14:section name="Problema 1: dati diffusivi sovrabbondanti" id="{353F6827-CAD7-4DD5-AEB3-58474DEF889D}">
+          <p14:sldIdLst>
+            <p14:sldId id="299"/>
+            <p14:sldId id="306"/>
+            <p14:sldId id="301"/>
+          </p14:sldIdLst>
+        </p14:section>
+        <p14:section name="Problema 2: dati diffusivi lacunosi" id="{158E8926-6ABB-4C28-BA4B-A2216F14C482}">
+          <p14:sldIdLst>
+            <p14:sldId id="302"/>
+            <p14:sldId id="303"/>
+            <p14:sldId id="304"/>
+            <p14:sldId id="307"/>
+          </p14:sldIdLst>
+        </p14:section>
+        <p14:section name="Considerazioni finali" id="{32AF40E9-28AF-417C-A464-DBC17094C5AD}">
+          <p14:sldIdLst>
+            <p14:sldId id="308"/>
+            <p14:sldId id="309"/>
+          </p14:sldIdLst>
+        </p14:section>
+        <p14:section name="Chiusura" id="{F794CA2D-5077-45C9-944E-3A8D15D46A56}">
+          <p14:sldIdLst>
+            <p14:sldId id="305"/>
+          </p14:sldIdLst>
+        </p14:section>
+      </p14:sectionLst>
+    </p:ext>
     <p:ext uri="{EFAFB233-063F-42B5-8137-9DF3F51BA10A}">
       <p15:sldGuideLst xmlns:p15="http://schemas.microsoft.com/office/powerpoint/2012/main">
         <p15:guide id="2" pos="3840">
@@ -156,7 +217,7 @@
 <p1510:revInfo xmlns:a="http://schemas.openxmlformats.org/drawingml/2006/main" xmlns:r="http://schemas.openxmlformats.org/officeDocument/2006/relationships" xmlns:p1510="http://schemas.microsoft.com/office/powerpoint/2015/10/main">
   <p1510:revLst>
     <p1510:client id="{1901B351-73C2-4F05-AFC5-248BEDEA7CC9}" v="1" dt="2026-02-03T11:25:26.591"/>
-    <p1510:client id="{2F53E20B-FF46-4D9D-9D22-B6AA0F54DD5C}" v="718" dt="2026-02-02T15:42:40.065"/>
+    <p1510:client id="{9B9A0C03-7DB8-443D-8E21-FB0C3447CA84}" v="522" dt="2026-02-04T11:23:52.316"/>
   </p1510:revLst>
 </p1510:revInfo>
 </file>
@@ -223,68 +284,11 @@
           </ac:picMkLst>
         </pc:picChg>
       </pc:sldChg>
-      <pc:sldChg chg="del">
-        <pc:chgData name="Ivan Valente UniPD" userId="a3a233bfc287bebe" providerId="LiveId" clId="{EED242D9-B7F2-406C-AB1E-E95D76329280}" dt="2026-02-02T10:35:30.254" v="255" actId="47"/>
-        <pc:sldMkLst>
-          <pc:docMk/>
-          <pc:sldMk cId="1388592114" sldId="283"/>
-        </pc:sldMkLst>
-      </pc:sldChg>
-      <pc:sldChg chg="del">
-        <pc:chgData name="Ivan Valente UniPD" userId="a3a233bfc287bebe" providerId="LiveId" clId="{EED242D9-B7F2-406C-AB1E-E95D76329280}" dt="2026-02-02T10:31:39.695" v="177" actId="47"/>
-        <pc:sldMkLst>
-          <pc:docMk/>
-          <pc:sldMk cId="652841706" sldId="284"/>
-        </pc:sldMkLst>
-      </pc:sldChg>
       <pc:sldChg chg="delSp modSp mod">
         <pc:chgData name="Ivan Valente UniPD" userId="a3a233bfc287bebe" providerId="LiveId" clId="{EED242D9-B7F2-406C-AB1E-E95D76329280}" dt="2026-02-02T10:37:16.665" v="259" actId="478"/>
         <pc:sldMkLst>
           <pc:docMk/>
           <pc:sldMk cId="2855514139" sldId="285"/>
-        </pc:sldMkLst>
-        <pc:spChg chg="del mod">
-          <ac:chgData name="Ivan Valente UniPD" userId="a3a233bfc287bebe" providerId="LiveId" clId="{EED242D9-B7F2-406C-AB1E-E95D76329280}" dt="2026-02-02T10:37:16.665" v="259" actId="478"/>
-          <ac:spMkLst>
-            <pc:docMk/>
-            <pc:sldMk cId="2855514139" sldId="285"/>
-            <ac:spMk id="2" creationId="{098D2A1E-61D7-D5E3-3F03-BFC8F784E257}"/>
-          </ac:spMkLst>
-        </pc:spChg>
-      </pc:sldChg>
-      <pc:sldChg chg="del">
-        <pc:chgData name="Ivan Valente UniPD" userId="a3a233bfc287bebe" providerId="LiveId" clId="{EED242D9-B7F2-406C-AB1E-E95D76329280}" dt="2026-02-02T10:31:38.815" v="176" actId="47"/>
-        <pc:sldMkLst>
-          <pc:docMk/>
-          <pc:sldMk cId="233018862" sldId="286"/>
-        </pc:sldMkLst>
-      </pc:sldChg>
-      <pc:sldChg chg="del">
-        <pc:chgData name="Ivan Valente UniPD" userId="a3a233bfc287bebe" providerId="LiveId" clId="{EED242D9-B7F2-406C-AB1E-E95D76329280}" dt="2026-02-02T10:31:10.538" v="174" actId="47"/>
-        <pc:sldMkLst>
-          <pc:docMk/>
-          <pc:sldMk cId="3353460760" sldId="287"/>
-        </pc:sldMkLst>
-      </pc:sldChg>
-      <pc:sldChg chg="del">
-        <pc:chgData name="Ivan Valente UniPD" userId="a3a233bfc287bebe" providerId="LiveId" clId="{EED242D9-B7F2-406C-AB1E-E95D76329280}" dt="2026-02-02T10:30:28.778" v="173" actId="47"/>
-        <pc:sldMkLst>
-          <pc:docMk/>
-          <pc:sldMk cId="414523832" sldId="288"/>
-        </pc:sldMkLst>
-      </pc:sldChg>
-      <pc:sldChg chg="del">
-        <pc:chgData name="Ivan Valente UniPD" userId="a3a233bfc287bebe" providerId="LiveId" clId="{EED242D9-B7F2-406C-AB1E-E95D76329280}" dt="2026-02-02T10:30:25.245" v="172" actId="47"/>
-        <pc:sldMkLst>
-          <pc:docMk/>
-          <pc:sldMk cId="314440392" sldId="289"/>
-        </pc:sldMkLst>
-      </pc:sldChg>
-      <pc:sldChg chg="del">
-        <pc:chgData name="Ivan Valente UniPD" userId="a3a233bfc287bebe" providerId="LiveId" clId="{EED242D9-B7F2-406C-AB1E-E95D76329280}" dt="2026-02-02T10:31:37.913" v="175" actId="47"/>
-        <pc:sldMkLst>
-          <pc:docMk/>
-          <pc:sldMk cId="118667928" sldId="290"/>
         </pc:sldMkLst>
       </pc:sldChg>
       <pc:sldChg chg="addSp delSp modSp mod">
@@ -309,14 +313,6 @@
             <ac:spMk id="4" creationId="{04304DE3-2D64-1E41-524C-88DBC9130F7B}"/>
           </ac:spMkLst>
         </pc:spChg>
-        <pc:spChg chg="add">
-          <ac:chgData name="Ivan Valente UniPD" userId="a3a233bfc287bebe" providerId="LiveId" clId="{EED242D9-B7F2-406C-AB1E-E95D76329280}" dt="2026-02-02T10:42:14.639" v="306"/>
-          <ac:spMkLst>
-            <pc:docMk/>
-            <pc:sldMk cId="849465297" sldId="291"/>
-            <ac:spMk id="12" creationId="{39FCFDC3-C7E7-B685-1B50-94251FC0B708}"/>
-          </ac:spMkLst>
-        </pc:spChg>
         <pc:spChg chg="add mod">
           <ac:chgData name="Ivan Valente UniPD" userId="a3a233bfc287bebe" providerId="LiveId" clId="{EED242D9-B7F2-406C-AB1E-E95D76329280}" dt="2026-02-02T11:09:43.202" v="890" actId="1076"/>
           <ac:spMkLst>
@@ -325,38 +321,6 @@
             <ac:spMk id="14" creationId="{DF14A0A3-5DD1-117F-66FD-C4A6E63B1429}"/>
           </ac:spMkLst>
         </pc:spChg>
-        <pc:spChg chg="add mod">
-          <ac:chgData name="Ivan Valente UniPD" userId="a3a233bfc287bebe" providerId="LiveId" clId="{EED242D9-B7F2-406C-AB1E-E95D76329280}" dt="2026-02-02T11:09:47.914" v="891" actId="1076"/>
-          <ac:spMkLst>
-            <pc:docMk/>
-            <pc:sldMk cId="849465297" sldId="291"/>
-            <ac:spMk id="15" creationId="{A429EE53-7D72-584D-9278-C715D21F846A}"/>
-          </ac:spMkLst>
-        </pc:spChg>
-        <pc:graphicFrameChg chg="del">
-          <ac:chgData name="Ivan Valente UniPD" userId="a3a233bfc287bebe" providerId="LiveId" clId="{EED242D9-B7F2-406C-AB1E-E95D76329280}" dt="2026-02-02T10:31:42.391" v="178" actId="478"/>
-          <ac:graphicFrameMkLst>
-            <pc:docMk/>
-            <pc:sldMk cId="849465297" sldId="291"/>
-            <ac:graphicFrameMk id="13" creationId="{24F0E16C-0C56-89A4-2FE9-7D5EBE3963CC}"/>
-          </ac:graphicFrameMkLst>
-        </pc:graphicFrameChg>
-        <pc:picChg chg="add mod">
-          <ac:chgData name="Ivan Valente UniPD" userId="a3a233bfc287bebe" providerId="LiveId" clId="{EED242D9-B7F2-406C-AB1E-E95D76329280}" dt="2026-02-02T10:32:52.139" v="183"/>
-          <ac:picMkLst>
-            <pc:docMk/>
-            <pc:sldMk cId="849465297" sldId="291"/>
-            <ac:picMk id="6" creationId="{CF261AF0-C36E-664C-5241-4A9F593F3E6F}"/>
-          </ac:picMkLst>
-        </pc:picChg>
-        <pc:picChg chg="add mod">
-          <ac:chgData name="Ivan Valente UniPD" userId="a3a233bfc287bebe" providerId="LiveId" clId="{EED242D9-B7F2-406C-AB1E-E95D76329280}" dt="2026-02-02T10:32:56.875" v="188"/>
-          <ac:picMkLst>
-            <pc:docMk/>
-            <pc:sldMk cId="849465297" sldId="291"/>
-            <ac:picMk id="8" creationId="{AF09FBDF-9B3E-CC33-EA1F-A4ACC73D7360}"/>
-          </ac:picMkLst>
-        </pc:picChg>
         <pc:picChg chg="add mod modCrop">
           <ac:chgData name="Ivan Valente UniPD" userId="a3a233bfc287bebe" providerId="LiveId" clId="{EED242D9-B7F2-406C-AB1E-E95D76329280}" dt="2026-02-02T10:33:29.921" v="236" actId="732"/>
           <ac:picMkLst>
@@ -365,20 +329,6 @@
             <ac:picMk id="10" creationId="{37897BD6-1596-87E5-7571-53666B6A3733}"/>
           </ac:picMkLst>
         </pc:picChg>
-      </pc:sldChg>
-      <pc:sldChg chg="del">
-        <pc:chgData name="Ivan Valente UniPD" userId="a3a233bfc287bebe" providerId="LiveId" clId="{EED242D9-B7F2-406C-AB1E-E95D76329280}" dt="2026-02-02T13:58:40.685" v="2733" actId="47"/>
-        <pc:sldMkLst>
-          <pc:docMk/>
-          <pc:sldMk cId="2547630249" sldId="292"/>
-        </pc:sldMkLst>
-      </pc:sldChg>
-      <pc:sldChg chg="new del">
-        <pc:chgData name="Ivan Valente UniPD" userId="a3a233bfc287bebe" providerId="LiveId" clId="{EED242D9-B7F2-406C-AB1E-E95D76329280}" dt="2026-02-02T10:35:55.837" v="257" actId="47"/>
-        <pc:sldMkLst>
-          <pc:docMk/>
-          <pc:sldMk cId="486960204" sldId="293"/>
-        </pc:sldMkLst>
       </pc:sldChg>
       <pc:sldChg chg="addSp delSp modSp add mod">
         <pc:chgData name="Ivan Valente UniPD" userId="a3a233bfc287bebe" providerId="LiveId" clId="{EED242D9-B7F2-406C-AB1E-E95D76329280}" dt="2026-02-02T11:08:40.266" v="888" actId="1076"/>
@@ -394,36 +344,12 @@
             <ac:spMk id="2" creationId="{23F120DC-47C4-751E-5AB8-9718009D6E57}"/>
           </ac:spMkLst>
         </pc:spChg>
-        <pc:spChg chg="add del mod">
-          <ac:chgData name="Ivan Valente UniPD" userId="a3a233bfc287bebe" providerId="LiveId" clId="{EED242D9-B7F2-406C-AB1E-E95D76329280}" dt="2026-02-02T11:01:20.475" v="750" actId="478"/>
-          <ac:spMkLst>
-            <pc:docMk/>
-            <pc:sldMk cId="3729409598" sldId="293"/>
-            <ac:spMk id="3" creationId="{E04F5120-99FD-F9C2-8CFB-E39FAE59E2F8}"/>
-          </ac:spMkLst>
-        </pc:spChg>
         <pc:spChg chg="mod">
           <ac:chgData name="Ivan Valente UniPD" userId="a3a233bfc287bebe" providerId="LiveId" clId="{EED242D9-B7F2-406C-AB1E-E95D76329280}" dt="2026-02-02T11:08:34.111" v="886" actId="27636"/>
           <ac:spMkLst>
             <pc:docMk/>
             <pc:sldMk cId="3729409598" sldId="293"/>
             <ac:spMk id="4" creationId="{DE49AFF4-A59E-0629-DD15-8539A59358CC}"/>
-          </ac:spMkLst>
-        </pc:spChg>
-        <pc:spChg chg="add del mod">
-          <ac:chgData name="Ivan Valente UniPD" userId="a3a233bfc287bebe" providerId="LiveId" clId="{EED242D9-B7F2-406C-AB1E-E95D76329280}" dt="2026-02-02T11:03:07.580" v="782" actId="478"/>
-          <ac:spMkLst>
-            <pc:docMk/>
-            <pc:sldMk cId="3729409598" sldId="293"/>
-            <ac:spMk id="5" creationId="{9102E3F9-49D3-6152-79FB-8615B5ECD8D2}"/>
-          </ac:spMkLst>
-        </pc:spChg>
-        <pc:spChg chg="add del mod">
-          <ac:chgData name="Ivan Valente UniPD" userId="a3a233bfc287bebe" providerId="LiveId" clId="{EED242D9-B7F2-406C-AB1E-E95D76329280}" dt="2026-02-02T11:05:42.318" v="826" actId="767"/>
-          <ac:spMkLst>
-            <pc:docMk/>
-            <pc:sldMk cId="3729409598" sldId="293"/>
-            <ac:spMk id="8" creationId="{38DAE92E-CB31-C206-E2E9-D350E993ED2C}"/>
           </ac:spMkLst>
         </pc:spChg>
         <pc:picChg chg="add del mod">
@@ -465,14 +391,6 @@
             <ac:picMk id="5" creationId="{BAAC55A1-2C5A-55C5-95F2-4895D7A01FB8}"/>
           </ac:picMkLst>
         </pc:picChg>
-        <pc:picChg chg="del">
-          <ac:chgData name="Ivan Valente UniPD" userId="a3a233bfc287bebe" providerId="LiveId" clId="{EED242D9-B7F2-406C-AB1E-E95D76329280}" dt="2026-02-02T11:10:27.283" v="894" actId="478"/>
-          <ac:picMkLst>
-            <pc:docMk/>
-            <pc:sldMk cId="2620810767" sldId="294"/>
-            <ac:picMk id="7" creationId="{20FCAD6C-2239-E39A-3FE4-8EFFE10A2C52}"/>
-          </ac:picMkLst>
-        </pc:picChg>
       </pc:sldChg>
       <pc:sldChg chg="addSp delSp modSp add mod">
         <pc:chgData name="Ivan Valente UniPD" userId="a3a233bfc287bebe" providerId="LiveId" clId="{EED242D9-B7F2-406C-AB1E-E95D76329280}" dt="2026-02-02T11:52:19.973" v="1444" actId="20577"/>
@@ -488,14 +406,6 @@
             <ac:spMk id="4" creationId="{5D4B3BE8-7C1F-626F-50C0-E767D8C589E9}"/>
           </ac:spMkLst>
         </pc:spChg>
-        <pc:spChg chg="add">
-          <ac:chgData name="Ivan Valente UniPD" userId="a3a233bfc287bebe" providerId="LiveId" clId="{EED242D9-B7F2-406C-AB1E-E95D76329280}" dt="2026-02-02T11:48:17.188" v="1310"/>
-          <ac:spMkLst>
-            <pc:docMk/>
-            <pc:sldMk cId="1814893304" sldId="295"/>
-            <ac:spMk id="7" creationId="{383AD639-66CA-E325-5E3C-B22943A5454F}"/>
-          </ac:spMkLst>
-        </pc:spChg>
         <pc:spChg chg="add mod">
           <ac:chgData name="Ivan Valente UniPD" userId="a3a233bfc287bebe" providerId="LiveId" clId="{EED242D9-B7F2-406C-AB1E-E95D76329280}" dt="2026-02-02T11:52:06.952" v="1430" actId="404"/>
           <ac:spMkLst>
@@ -504,30 +414,6 @@
             <ac:spMk id="8" creationId="{37B89364-F8D6-E4C0-A2A5-F940F6DFE011}"/>
           </ac:spMkLst>
         </pc:spChg>
-        <pc:spChg chg="add">
-          <ac:chgData name="Ivan Valente UniPD" userId="a3a233bfc287bebe" providerId="LiveId" clId="{EED242D9-B7F2-406C-AB1E-E95D76329280}" dt="2026-02-02T11:48:21.628" v="1313"/>
-          <ac:spMkLst>
-            <pc:docMk/>
-            <pc:sldMk cId="1814893304" sldId="295"/>
-            <ac:spMk id="9" creationId="{7C886C54-B3EB-B26A-F29F-34BCF9162FF0}"/>
-          </ac:spMkLst>
-        </pc:spChg>
-        <pc:spChg chg="add">
-          <ac:chgData name="Ivan Valente UniPD" userId="a3a233bfc287bebe" providerId="LiveId" clId="{EED242D9-B7F2-406C-AB1E-E95D76329280}" dt="2026-02-02T11:49:50.132" v="1336"/>
-          <ac:spMkLst>
-            <pc:docMk/>
-            <pc:sldMk cId="1814893304" sldId="295"/>
-            <ac:spMk id="12" creationId="{633D3ED0-17FD-47A7-5B03-B2BE3E4D060F}"/>
-          </ac:spMkLst>
-        </pc:spChg>
-        <pc:picChg chg="del">
-          <ac:chgData name="Ivan Valente UniPD" userId="a3a233bfc287bebe" providerId="LiveId" clId="{EED242D9-B7F2-406C-AB1E-E95D76329280}" dt="2026-02-02T11:32:18.644" v="1234" actId="478"/>
-          <ac:picMkLst>
-            <pc:docMk/>
-            <pc:sldMk cId="1814893304" sldId="295"/>
-            <ac:picMk id="5" creationId="{612DA5DD-689C-BCBD-3945-FA53F4151AE1}"/>
-          </ac:picMkLst>
-        </pc:picChg>
         <pc:picChg chg="add mod">
           <ac:chgData name="Ivan Valente UniPD" userId="a3a233bfc287bebe" providerId="LiveId" clId="{EED242D9-B7F2-406C-AB1E-E95D76329280}" dt="2026-02-02T11:41:55.380" v="1308" actId="1076"/>
           <ac:picMkLst>
@@ -559,30 +445,6 @@
             <ac:spMk id="4" creationId="{B6A6A8E9-C260-0669-9B9C-87D9E2C4CF81}"/>
           </ac:spMkLst>
         </pc:spChg>
-        <pc:spChg chg="del">
-          <ac:chgData name="Ivan Valente UniPD" userId="a3a233bfc287bebe" providerId="LiveId" clId="{EED242D9-B7F2-406C-AB1E-E95D76329280}" dt="2026-02-02T11:53:32.180" v="1512" actId="478"/>
-          <ac:spMkLst>
-            <pc:docMk/>
-            <pc:sldMk cId="4073578586" sldId="296"/>
-            <ac:spMk id="8" creationId="{325BEA5D-62AC-9BDB-4261-A296E1A6C591}"/>
-          </ac:spMkLst>
-        </pc:spChg>
-        <pc:picChg chg="add mod">
-          <ac:chgData name="Ivan Valente UniPD" userId="a3a233bfc287bebe" providerId="LiveId" clId="{EED242D9-B7F2-406C-AB1E-E95D76329280}" dt="2026-02-02T11:58:17.780" v="1690" actId="14100"/>
-          <ac:picMkLst>
-            <pc:docMk/>
-            <pc:sldMk cId="4073578586" sldId="296"/>
-            <ac:picMk id="5" creationId="{6CBD258D-3801-D92C-806C-BF204AA9A926}"/>
-          </ac:picMkLst>
-        </pc:picChg>
-        <pc:picChg chg="del">
-          <ac:chgData name="Ivan Valente UniPD" userId="a3a233bfc287bebe" providerId="LiveId" clId="{EED242D9-B7F2-406C-AB1E-E95D76329280}" dt="2026-02-02T11:50:41.253" v="1402" actId="478"/>
-          <ac:picMkLst>
-            <pc:docMk/>
-            <pc:sldMk cId="4073578586" sldId="296"/>
-            <ac:picMk id="6" creationId="{212AC9AE-BA08-9A2E-0885-70F5C089732C}"/>
-          </ac:picMkLst>
-        </pc:picChg>
       </pc:sldChg>
       <pc:sldChg chg="modSp add mod ord">
         <pc:chgData name="Ivan Valente UniPD" userId="a3a233bfc287bebe" providerId="LiveId" clId="{EED242D9-B7F2-406C-AB1E-E95D76329280}" dt="2026-02-02T12:30:28.003" v="1708"/>
@@ -637,22 +499,6 @@
             <ac:spMk id="5" creationId="{7E521715-D92C-8B56-3AD6-95E8FAA0D6A7}"/>
           </ac:spMkLst>
         </pc:spChg>
-        <pc:spChg chg="del">
-          <ac:chgData name="Ivan Valente UniPD" userId="a3a233bfc287bebe" providerId="LiveId" clId="{EED242D9-B7F2-406C-AB1E-E95D76329280}" dt="2026-02-02T13:01:36.304" v="1742" actId="478"/>
-          <ac:spMkLst>
-            <pc:docMk/>
-            <pc:sldMk cId="134985273" sldId="298"/>
-            <ac:spMk id="14" creationId="{654EE4D2-E782-6EE7-ACB6-FD66CE1743DB}"/>
-          </ac:spMkLst>
-        </pc:spChg>
-        <pc:spChg chg="del">
-          <ac:chgData name="Ivan Valente UniPD" userId="a3a233bfc287bebe" providerId="LiveId" clId="{EED242D9-B7F2-406C-AB1E-E95D76329280}" dt="2026-02-02T13:01:37.112" v="1743" actId="478"/>
-          <ac:spMkLst>
-            <pc:docMk/>
-            <pc:sldMk cId="134985273" sldId="298"/>
-            <ac:spMk id="15" creationId="{107B28D7-2402-D696-7A79-2F482A4C9EB4}"/>
-          </ac:spMkLst>
-        </pc:spChg>
       </pc:sldChg>
       <pc:sldChg chg="modSp add mod ord">
         <pc:chgData name="Ivan Valente UniPD" userId="a3a233bfc287bebe" providerId="LiveId" clId="{EED242D9-B7F2-406C-AB1E-E95D76329280}" dt="2026-02-02T13:05:40.516" v="1932"/>
@@ -666,37 +512,6 @@
             <pc:docMk/>
             <pc:sldMk cId="2346856864" sldId="299"/>
             <ac:spMk id="3" creationId="{AADDB979-2559-F5AC-8C97-B8DCA531A702}"/>
-          </ac:spMkLst>
-        </pc:spChg>
-      </pc:sldChg>
-      <pc:sldChg chg="addSp modSp add del mod ord">
-        <pc:chgData name="Ivan Valente UniPD" userId="a3a233bfc287bebe" providerId="LiveId" clId="{EED242D9-B7F2-406C-AB1E-E95D76329280}" dt="2026-02-02T14:04:34.239" v="2978" actId="47"/>
-        <pc:sldMkLst>
-          <pc:docMk/>
-          <pc:sldMk cId="2054613535" sldId="300"/>
-        </pc:sldMkLst>
-        <pc:spChg chg="mod">
-          <ac:chgData name="Ivan Valente UniPD" userId="a3a233bfc287bebe" providerId="LiveId" clId="{EED242D9-B7F2-406C-AB1E-E95D76329280}" dt="2026-02-02T13:07:10.145" v="2071" actId="20577"/>
-          <ac:spMkLst>
-            <pc:docMk/>
-            <pc:sldMk cId="2054613535" sldId="300"/>
-            <ac:spMk id="2" creationId="{2EDB5616-1825-4F45-9201-DF0813CE7D36}"/>
-          </ac:spMkLst>
-        </pc:spChg>
-        <pc:spChg chg="add mod">
-          <ac:chgData name="Ivan Valente UniPD" userId="a3a233bfc287bebe" providerId="LiveId" clId="{EED242D9-B7F2-406C-AB1E-E95D76329280}" dt="2026-02-02T13:34:34.994" v="2316" actId="20577"/>
-          <ac:spMkLst>
-            <pc:docMk/>
-            <pc:sldMk cId="2054613535" sldId="300"/>
-            <ac:spMk id="3" creationId="{D8C5A73B-0DCA-69A9-8F21-4FA64809B890}"/>
-          </ac:spMkLst>
-        </pc:spChg>
-        <pc:spChg chg="mod">
-          <ac:chgData name="Ivan Valente UniPD" userId="a3a233bfc287bebe" providerId="LiveId" clId="{EED242D9-B7F2-406C-AB1E-E95D76329280}" dt="2026-02-02T13:53:20.483" v="2628" actId="20577"/>
-          <ac:spMkLst>
-            <pc:docMk/>
-            <pc:sldMk cId="2054613535" sldId="300"/>
-            <ac:spMk id="4" creationId="{48ACD377-E378-A765-1DA5-6F7AEF830CA7}"/>
           </ac:spMkLst>
         </pc:spChg>
       </pc:sldChg>
@@ -750,14 +565,6 @@
             <pc:docMk/>
             <pc:sldMk cId="2872422517" sldId="303"/>
             <ac:spMk id="4" creationId="{72721DE3-7109-5941-C1DD-B490301F6B58}"/>
-          </ac:spMkLst>
-        </pc:spChg>
-        <pc:spChg chg="add">
-          <ac:chgData name="Ivan Valente UniPD" userId="a3a233bfc287bebe" providerId="LiveId" clId="{EED242D9-B7F2-406C-AB1E-E95D76329280}" dt="2026-02-02T14:04:07.321" v="2969"/>
-          <ac:spMkLst>
-            <pc:docMk/>
-            <pc:sldMk cId="2872422517" sldId="303"/>
-            <ac:spMk id="5" creationId="{74CE6C47-C043-AAF8-4D99-DD58428CBE59}"/>
           </ac:spMkLst>
         </pc:spChg>
       </pc:sldChg>
@@ -876,13 +683,6 @@
           </ac:spMkLst>
         </pc:spChg>
       </pc:sldChg>
-      <pc:sldChg chg="add del ord">
-        <pc:chgData name="Ivan Valente UniPD" userId="a3a233bfc287bebe" providerId="LiveId" clId="{EED242D9-B7F2-406C-AB1E-E95D76329280}" dt="2026-02-02T14:46:08.967" v="4629" actId="47"/>
-        <pc:sldMkLst>
-          <pc:docMk/>
-          <pc:sldMk cId="1571553632" sldId="309"/>
-        </pc:sldMkLst>
-      </pc:sldChg>
       <pc:sldChg chg="modSp add mod ord">
         <pc:chgData name="Ivan Valente UniPD" userId="a3a233bfc287bebe" providerId="LiveId" clId="{EED242D9-B7F2-406C-AB1E-E95D76329280}" dt="2026-02-02T14:50:03.276" v="5340" actId="20577"/>
         <pc:sldMkLst>
@@ -919,15 +719,6 @@
             <pc:sldMasterMk cId="2521255718" sldId="2147483684"/>
             <pc:sldLayoutMk cId="3858332531" sldId="2147483691"/>
           </pc:sldLayoutMkLst>
-          <pc:spChg chg="del">
-            <ac:chgData name="Ivan Valente UniPD" userId="a3a233bfc287bebe" providerId="LiveId" clId="{EED242D9-B7F2-406C-AB1E-E95D76329280}" dt="2026-02-02T10:34:08.817" v="237" actId="478"/>
-            <ac:spMkLst>
-              <pc:docMk/>
-              <pc:sldMasterMk cId="2521255718" sldId="2147483684"/>
-              <pc:sldLayoutMk cId="3858332531" sldId="2147483691"/>
-              <ac:spMk id="11" creationId="{E597A3BE-0D13-9033-E3FD-78202DB799C8}"/>
-            </ac:spMkLst>
-          </pc:spChg>
           <pc:spChg chg="ord">
             <ac:chgData name="Ivan Valente UniPD" userId="a3a233bfc287bebe" providerId="LiveId" clId="{EED242D9-B7F2-406C-AB1E-E95D76329280}" dt="2026-02-02T10:34:18.168" v="241" actId="167"/>
             <ac:spMkLst>
@@ -937,42 +728,6 @@
               <ac:spMk id="22" creationId="{4DB7AC4F-2818-7F0D-AC6A-736D5F2C7392}"/>
             </ac:spMkLst>
           </pc:spChg>
-          <pc:grpChg chg="del">
-            <ac:chgData name="Ivan Valente UniPD" userId="a3a233bfc287bebe" providerId="LiveId" clId="{EED242D9-B7F2-406C-AB1E-E95D76329280}" dt="2026-02-02T10:34:12.826" v="238" actId="478"/>
-            <ac:grpSpMkLst>
-              <pc:docMk/>
-              <pc:sldMasterMk cId="2521255718" sldId="2147483684"/>
-              <pc:sldLayoutMk cId="3858332531" sldId="2147483691"/>
-              <ac:grpSpMk id="5" creationId="{6C61DF04-D7CB-2B19-8BB9-3E90A661973E}"/>
-            </ac:grpSpMkLst>
-          </pc:grpChg>
-          <pc:grpChg chg="del">
-            <ac:chgData name="Ivan Valente UniPD" userId="a3a233bfc287bebe" providerId="LiveId" clId="{EED242D9-B7F2-406C-AB1E-E95D76329280}" dt="2026-02-02T10:34:15.937" v="240" actId="478"/>
-            <ac:grpSpMkLst>
-              <pc:docMk/>
-              <pc:sldMasterMk cId="2521255718" sldId="2147483684"/>
-              <pc:sldLayoutMk cId="3858332531" sldId="2147483691"/>
-              <ac:grpSpMk id="12" creationId="{D8867D9A-3F3B-94C3-244B-0006226AEF73}"/>
-            </ac:grpSpMkLst>
-          </pc:grpChg>
-          <pc:grpChg chg="del">
-            <ac:chgData name="Ivan Valente UniPD" userId="a3a233bfc287bebe" providerId="LiveId" clId="{EED242D9-B7F2-406C-AB1E-E95D76329280}" dt="2026-02-02T10:34:15.369" v="239" actId="478"/>
-            <ac:grpSpMkLst>
-              <pc:docMk/>
-              <pc:sldMasterMk cId="2521255718" sldId="2147483684"/>
-              <pc:sldLayoutMk cId="3858332531" sldId="2147483691"/>
-              <ac:grpSpMk id="17" creationId="{02491172-466F-19CC-B639-A1C3CAB1D43A}"/>
-            </ac:grpSpMkLst>
-          </pc:grpChg>
-          <pc:grpChg chg="del">
-            <ac:chgData name="Ivan Valente UniPD" userId="a3a233bfc287bebe" providerId="LiveId" clId="{EED242D9-B7F2-406C-AB1E-E95D76329280}" dt="2026-02-02T10:34:20.482" v="242" actId="478"/>
-            <ac:grpSpMkLst>
-              <pc:docMk/>
-              <pc:sldMasterMk cId="2521255718" sldId="2147483684"/>
-              <pc:sldLayoutMk cId="3858332531" sldId="2147483691"/>
-              <ac:grpSpMk id="23" creationId="{43C4A872-A473-BFD2-150E-387250C2B4DA}"/>
-            </ac:grpSpMkLst>
-          </pc:grpChg>
         </pc:sldLayoutChg>
         <pc:sldLayoutChg chg="delSp mod">
           <pc:chgData name="Ivan Valente UniPD" userId="a3a233bfc287bebe" providerId="LiveId" clId="{EED242D9-B7F2-406C-AB1E-E95D76329280}" dt="2026-02-02T10:37:33.114" v="260" actId="478"/>
@@ -981,50 +736,132 @@
             <pc:sldMasterMk cId="2521255718" sldId="2147483684"/>
             <pc:sldLayoutMk cId="372899782" sldId="2147483696"/>
           </pc:sldLayoutMkLst>
-          <pc:spChg chg="del">
-            <ac:chgData name="Ivan Valente UniPD" userId="a3a233bfc287bebe" providerId="LiveId" clId="{EED242D9-B7F2-406C-AB1E-E95D76329280}" dt="2026-02-02T10:37:33.114" v="260" actId="478"/>
-            <ac:spMkLst>
-              <pc:docMk/>
-              <pc:sldMasterMk cId="2521255718" sldId="2147483684"/>
-              <pc:sldLayoutMk cId="372899782" sldId="2147483696"/>
-              <ac:spMk id="7" creationId="{57BF9F63-86BE-5515-AD3C-59481B3FF4B4}"/>
-            </ac:spMkLst>
-          </pc:spChg>
-        </pc:sldLayoutChg>
-        <pc:sldLayoutChg chg="del">
-          <pc:chgData name="Ivan Valente UniPD" userId="a3a233bfc287bebe" providerId="LiveId" clId="{EED242D9-B7F2-406C-AB1E-E95D76329280}" dt="2026-02-02T10:35:30.254" v="255" actId="47"/>
-          <pc:sldLayoutMkLst>
-            <pc:docMk/>
-            <pc:sldMasterMk cId="2521255718" sldId="2147483684"/>
-            <pc:sldLayoutMk cId="3650073892" sldId="2147483697"/>
-          </pc:sldLayoutMkLst>
-        </pc:sldLayoutChg>
-        <pc:sldLayoutChg chg="del">
-          <pc:chgData name="Ivan Valente UniPD" userId="a3a233bfc287bebe" providerId="LiveId" clId="{EED242D9-B7F2-406C-AB1E-E95D76329280}" dt="2026-02-02T10:30:28.778" v="173" actId="47"/>
-          <pc:sldLayoutMkLst>
-            <pc:docMk/>
-            <pc:sldMasterMk cId="2521255718" sldId="2147483684"/>
-            <pc:sldLayoutMk cId="2435617698" sldId="2147483699"/>
-          </pc:sldLayoutMkLst>
-        </pc:sldLayoutChg>
-        <pc:sldLayoutChg chg="del">
-          <pc:chgData name="Ivan Valente UniPD" userId="a3a233bfc287bebe" providerId="LiveId" clId="{EED242D9-B7F2-406C-AB1E-E95D76329280}" dt="2026-02-02T10:30:25.245" v="172" actId="47"/>
-          <pc:sldLayoutMkLst>
-            <pc:docMk/>
-            <pc:sldMasterMk cId="2521255718" sldId="2147483684"/>
-            <pc:sldLayoutMk cId="2019083638" sldId="2147483700"/>
-          </pc:sldLayoutMkLst>
         </pc:sldLayoutChg>
       </pc:sldMasterChg>
     </pc:docChg>
   </pc:docChgLst>
   <pc:docChgLst>
     <pc:chgData name="Ivan Valente UniPD" userId="a3a233bfc287bebe" providerId="LiveId" clId="{A23547FF-3074-4DC3-8B02-958CCEB5BCB2}"/>
-    <pc:docChg chg="undo custSel modSld">
-      <pc:chgData name="Ivan Valente UniPD" userId="a3a233bfc287bebe" providerId="LiveId" clId="{A23547FF-3074-4DC3-8B02-958CCEB5BCB2}" dt="2026-02-03T11:25:28.639" v="3" actId="5793"/>
+    <pc:docChg chg="undo custSel addSld delSld modSld sldOrd addSection delSection modSection">
+      <pc:chgData name="Ivan Valente UniPD" userId="a3a233bfc287bebe" providerId="LiveId" clId="{A23547FF-3074-4DC3-8B02-958CCEB5BCB2}" dt="2026-02-04T11:23:32.825" v="1189" actId="18676"/>
       <pc:docMkLst>
         <pc:docMk/>
       </pc:docMkLst>
+      <pc:sldChg chg="delSp modSp del mod">
+        <pc:chgData name="Ivan Valente UniPD" userId="a3a233bfc287bebe" providerId="LiveId" clId="{A23547FF-3074-4DC3-8B02-958CCEB5BCB2}" dt="2026-02-04T11:23:32.825" v="1189" actId="18676"/>
+        <pc:sldMkLst>
+          <pc:docMk/>
+          <pc:sldMk cId="849465297" sldId="291"/>
+        </pc:sldMkLst>
+        <pc:spChg chg="mod">
+          <ac:chgData name="Ivan Valente UniPD" userId="a3a233bfc287bebe" providerId="LiveId" clId="{A23547FF-3074-4DC3-8B02-958CCEB5BCB2}" dt="2026-02-04T10:18:33.070" v="256" actId="20577"/>
+          <ac:spMkLst>
+            <pc:docMk/>
+            <pc:sldMk cId="849465297" sldId="291"/>
+            <ac:spMk id="4" creationId="{04304DE3-2D64-1E41-524C-88DBC9130F7B}"/>
+          </ac:spMkLst>
+        </pc:spChg>
+        <pc:spChg chg="mod">
+          <ac:chgData name="Ivan Valente UniPD" userId="a3a233bfc287bebe" providerId="LiveId" clId="{A23547FF-3074-4DC3-8B02-958CCEB5BCB2}" dt="2026-02-04T10:18:40.368" v="263" actId="1036"/>
+          <ac:spMkLst>
+            <pc:docMk/>
+            <pc:sldMk cId="849465297" sldId="291"/>
+            <ac:spMk id="14" creationId="{DF14A0A3-5DD1-117F-66FD-C4A6E63B1429}"/>
+          </ac:spMkLst>
+        </pc:spChg>
+        <pc:spChg chg="del">
+          <ac:chgData name="Ivan Valente UniPD" userId="a3a233bfc287bebe" providerId="LiveId" clId="{A23547FF-3074-4DC3-8B02-958CCEB5BCB2}" dt="2026-02-04T09:20:05.942" v="4" actId="478"/>
+          <ac:spMkLst>
+            <pc:docMk/>
+            <pc:sldMk cId="849465297" sldId="291"/>
+            <ac:spMk id="15" creationId="{A429EE53-7D72-584D-9278-C715D21F846A}"/>
+          </ac:spMkLst>
+        </pc:spChg>
+      </pc:sldChg>
+      <pc:sldChg chg="del">
+        <pc:chgData name="Ivan Valente UniPD" userId="a3a233bfc287bebe" providerId="LiveId" clId="{A23547FF-3074-4DC3-8B02-958CCEB5BCB2}" dt="2026-02-04T11:23:32.825" v="1189" actId="18676"/>
+        <pc:sldMkLst>
+          <pc:docMk/>
+          <pc:sldMk cId="3729409598" sldId="293"/>
+        </pc:sldMkLst>
+      </pc:sldChg>
+      <pc:sldChg chg="modSp del mod">
+        <pc:chgData name="Ivan Valente UniPD" userId="a3a233bfc287bebe" providerId="LiveId" clId="{A23547FF-3074-4DC3-8B02-958CCEB5BCB2}" dt="2026-02-04T11:23:32.825" v="1189" actId="18676"/>
+        <pc:sldMkLst>
+          <pc:docMk/>
+          <pc:sldMk cId="2620810767" sldId="294"/>
+        </pc:sldMkLst>
+        <pc:spChg chg="mod">
+          <ac:chgData name="Ivan Valente UniPD" userId="a3a233bfc287bebe" providerId="LiveId" clId="{A23547FF-3074-4DC3-8B02-958CCEB5BCB2}" dt="2026-02-04T10:14:54.983" v="120" actId="21"/>
+          <ac:spMkLst>
+            <pc:docMk/>
+            <pc:sldMk cId="2620810767" sldId="294"/>
+            <ac:spMk id="4" creationId="{6E2A9576-AFC4-7EDB-2597-1A9B04469440}"/>
+          </ac:spMkLst>
+        </pc:spChg>
+      </pc:sldChg>
+      <pc:sldChg chg="modSp del mod">
+        <pc:chgData name="Ivan Valente UniPD" userId="a3a233bfc287bebe" providerId="LiveId" clId="{A23547FF-3074-4DC3-8B02-958CCEB5BCB2}" dt="2026-02-04T11:23:32.825" v="1189" actId="18676"/>
+        <pc:sldMkLst>
+          <pc:docMk/>
+          <pc:sldMk cId="1814893304" sldId="295"/>
+        </pc:sldMkLst>
+        <pc:spChg chg="mod">
+          <ac:chgData name="Ivan Valente UniPD" userId="a3a233bfc287bebe" providerId="LiveId" clId="{A23547FF-3074-4DC3-8B02-958CCEB5BCB2}" dt="2026-02-04T09:58:55.384" v="113" actId="20577"/>
+          <ac:spMkLst>
+            <pc:docMk/>
+            <pc:sldMk cId="1814893304" sldId="295"/>
+            <ac:spMk id="4" creationId="{5D4B3BE8-7C1F-626F-50C0-E767D8C589E9}"/>
+          </ac:spMkLst>
+        </pc:spChg>
+        <pc:spChg chg="mod">
+          <ac:chgData name="Ivan Valente UniPD" userId="a3a233bfc287bebe" providerId="LiveId" clId="{A23547FF-3074-4DC3-8B02-958CCEB5BCB2}" dt="2026-02-04T09:58:50.304" v="111"/>
+          <ac:spMkLst>
+            <pc:docMk/>
+            <pc:sldMk cId="1814893304" sldId="295"/>
+            <ac:spMk id="8" creationId="{37B89364-F8D6-E4C0-A2A5-F940F6DFE011}"/>
+          </ac:spMkLst>
+        </pc:spChg>
+      </pc:sldChg>
+      <pc:sldChg chg="addSp delSp modSp mod ord">
+        <pc:chgData name="Ivan Valente UniPD" userId="a3a233bfc287bebe" providerId="LiveId" clId="{A23547FF-3074-4DC3-8B02-958CCEB5BCB2}" dt="2026-02-04T11:22:19.781" v="1186" actId="20577"/>
+        <pc:sldMkLst>
+          <pc:docMk/>
+          <pc:sldMk cId="4073578586" sldId="296"/>
+        </pc:sldMkLst>
+        <pc:spChg chg="mod">
+          <ac:chgData name="Ivan Valente UniPD" userId="a3a233bfc287bebe" providerId="LiveId" clId="{A23547FF-3074-4DC3-8B02-958CCEB5BCB2}" dt="2026-02-04T10:27:19.028" v="293" actId="20577"/>
+          <ac:spMkLst>
+            <pc:docMk/>
+            <pc:sldMk cId="4073578586" sldId="296"/>
+            <ac:spMk id="2" creationId="{6CF8B1E2-052B-648B-1E0B-E05491B5E62D}"/>
+          </ac:spMkLst>
+        </pc:spChg>
+        <pc:spChg chg="add mod">
+          <ac:chgData name="Ivan Valente UniPD" userId="a3a233bfc287bebe" providerId="LiveId" clId="{A23547FF-3074-4DC3-8B02-958CCEB5BCB2}" dt="2026-02-04T10:41:08.505" v="441" actId="21"/>
+          <ac:spMkLst>
+            <pc:docMk/>
+            <pc:sldMk cId="4073578586" sldId="296"/>
+            <ac:spMk id="3" creationId="{A2867F8F-E92B-FB10-5159-AA57C44487C4}"/>
+          </ac:spMkLst>
+        </pc:spChg>
+        <pc:spChg chg="mod">
+          <ac:chgData name="Ivan Valente UniPD" userId="a3a233bfc287bebe" providerId="LiveId" clId="{A23547FF-3074-4DC3-8B02-958CCEB5BCB2}" dt="2026-02-04T11:22:19.781" v="1186" actId="20577"/>
+          <ac:spMkLst>
+            <pc:docMk/>
+            <pc:sldMk cId="4073578586" sldId="296"/>
+            <ac:spMk id="4" creationId="{B6A6A8E9-C260-0669-9B9C-87D9E2C4CF81}"/>
+          </ac:spMkLst>
+        </pc:spChg>
+        <pc:picChg chg="del">
+          <ac:chgData name="Ivan Valente UniPD" userId="a3a233bfc287bebe" providerId="LiveId" clId="{A23547FF-3074-4DC3-8B02-958CCEB5BCB2}" dt="2026-02-04T09:56:05.169" v="107" actId="478"/>
+          <ac:picMkLst>
+            <pc:docMk/>
+            <pc:sldMk cId="4073578586" sldId="296"/>
+            <ac:picMk id="5" creationId="{6CBD258D-3801-D92C-806C-BF204AA9A926}"/>
+          </ac:picMkLst>
+        </pc:picChg>
+      </pc:sldChg>
       <pc:sldChg chg="modSp mod">
         <pc:chgData name="Ivan Valente UniPD" userId="a3a233bfc287bebe" providerId="LiveId" clId="{A23547FF-3074-4DC3-8B02-958CCEB5BCB2}" dt="2026-02-03T11:25:28.639" v="3" actId="5793"/>
         <pc:sldMkLst>
@@ -1037,6 +874,121 @@
             <pc:docMk/>
             <pc:sldMk cId="134985273" sldId="298"/>
             <ac:spMk id="2" creationId="{15312992-8EC6-920C-D166-D946B2777F09}"/>
+          </ac:spMkLst>
+        </pc:spChg>
+      </pc:sldChg>
+      <pc:sldChg chg="add del">
+        <pc:chgData name="Ivan Valente UniPD" userId="a3a233bfc287bebe" providerId="LiveId" clId="{A23547FF-3074-4DC3-8B02-958CCEB5BCB2}" dt="2026-02-04T11:23:32.825" v="1189" actId="18676"/>
+        <pc:sldMkLst>
+          <pc:docMk/>
+          <pc:sldMk cId="3422573760" sldId="310"/>
+        </pc:sldMkLst>
+      </pc:sldChg>
+      <pc:sldChg chg="addSp modSp add mod">
+        <pc:chgData name="Ivan Valente UniPD" userId="a3a233bfc287bebe" providerId="LiveId" clId="{A23547FF-3074-4DC3-8B02-958CCEB5BCB2}" dt="2026-02-04T11:21:32.684" v="1179" actId="1038"/>
+        <pc:sldMkLst>
+          <pc:docMk/>
+          <pc:sldMk cId="2725422219" sldId="311"/>
+        </pc:sldMkLst>
+        <pc:spChg chg="mod">
+          <ac:chgData name="Ivan Valente UniPD" userId="a3a233bfc287bebe" providerId="LiveId" clId="{A23547FF-3074-4DC3-8B02-958CCEB5BCB2}" dt="2026-02-04T10:44:33.478" v="567" actId="20577"/>
+          <ac:spMkLst>
+            <pc:docMk/>
+            <pc:sldMk cId="2725422219" sldId="311"/>
+            <ac:spMk id="2" creationId="{DA768747-D45D-298C-42CC-99C958B9F7AF}"/>
+          </ac:spMkLst>
+        </pc:spChg>
+        <pc:spChg chg="mod">
+          <ac:chgData name="Ivan Valente UniPD" userId="a3a233bfc287bebe" providerId="LiveId" clId="{A23547FF-3074-4DC3-8B02-958CCEB5BCB2}" dt="2026-02-04T10:55:57.044" v="795" actId="404"/>
+          <ac:spMkLst>
+            <pc:docMk/>
+            <pc:sldMk cId="2725422219" sldId="311"/>
+            <ac:spMk id="4" creationId="{DFE960C0-51F2-F435-DC7F-8B6132D3E1FB}"/>
+          </ac:spMkLst>
+        </pc:spChg>
+        <pc:spChg chg="add mod">
+          <ac:chgData name="Ivan Valente UniPD" userId="a3a233bfc287bebe" providerId="LiveId" clId="{A23547FF-3074-4DC3-8B02-958CCEB5BCB2}" dt="2026-02-04T11:21:32.684" v="1179" actId="1038"/>
+          <ac:spMkLst>
+            <pc:docMk/>
+            <pc:sldMk cId="2725422219" sldId="311"/>
+            <ac:spMk id="7" creationId="{69E34ACC-C912-E965-F78E-2095AE0308AD}"/>
+          </ac:spMkLst>
+        </pc:spChg>
+        <pc:cxnChg chg="add mod">
+          <ac:chgData name="Ivan Valente UniPD" userId="a3a233bfc287bebe" providerId="LiveId" clId="{A23547FF-3074-4DC3-8B02-958CCEB5BCB2}" dt="2026-02-04T11:21:32.684" v="1179" actId="1038"/>
+          <ac:cxnSpMkLst>
+            <pc:docMk/>
+            <pc:sldMk cId="2725422219" sldId="311"/>
+            <ac:cxnSpMk id="6" creationId="{89FDFF76-FB3D-1BC8-3D20-2D7E7D2E5051}"/>
+          </ac:cxnSpMkLst>
+        </pc:cxnChg>
+      </pc:sldChg>
+      <pc:sldChg chg="modSp add mod ord">
+        <pc:chgData name="Ivan Valente UniPD" userId="a3a233bfc287bebe" providerId="LiveId" clId="{A23547FF-3074-4DC3-8B02-958CCEB5BCB2}" dt="2026-02-04T11:08:38.043" v="929" actId="20577"/>
+        <pc:sldMkLst>
+          <pc:docMk/>
+          <pc:sldMk cId="4161560511" sldId="312"/>
+        </pc:sldMkLst>
+        <pc:spChg chg="mod">
+          <ac:chgData name="Ivan Valente UniPD" userId="a3a233bfc287bebe" providerId="LiveId" clId="{A23547FF-3074-4DC3-8B02-958CCEB5BCB2}" dt="2026-02-04T10:56:52.388" v="818"/>
+          <ac:spMkLst>
+            <pc:docMk/>
+            <pc:sldMk cId="4161560511" sldId="312"/>
+            <ac:spMk id="2" creationId="{601CE776-474F-6F20-4E82-210E65416321}"/>
+          </ac:spMkLst>
+        </pc:spChg>
+        <pc:spChg chg="mod">
+          <ac:chgData name="Ivan Valente UniPD" userId="a3a233bfc287bebe" providerId="LiveId" clId="{A23547FF-3074-4DC3-8B02-958CCEB5BCB2}" dt="2026-02-04T11:08:38.043" v="929" actId="20577"/>
+          <ac:spMkLst>
+            <pc:docMk/>
+            <pc:sldMk cId="4161560511" sldId="312"/>
+            <ac:spMk id="4" creationId="{6FCEADEE-3C8D-024B-524F-96747380BAEF}"/>
+          </ac:spMkLst>
+        </pc:spChg>
+      </pc:sldChg>
+      <pc:sldChg chg="modSp add mod">
+        <pc:chgData name="Ivan Valente UniPD" userId="a3a233bfc287bebe" providerId="LiveId" clId="{A23547FF-3074-4DC3-8B02-958CCEB5BCB2}" dt="2026-02-04T11:22:48.356" v="1188"/>
+        <pc:sldMkLst>
+          <pc:docMk/>
+          <pc:sldMk cId="1076546552" sldId="313"/>
+        </pc:sldMkLst>
+        <pc:spChg chg="mod">
+          <ac:chgData name="Ivan Valente UniPD" userId="a3a233bfc287bebe" providerId="LiveId" clId="{A23547FF-3074-4DC3-8B02-958CCEB5BCB2}" dt="2026-02-04T11:09:25.147" v="931"/>
+          <ac:spMkLst>
+            <pc:docMk/>
+            <pc:sldMk cId="1076546552" sldId="313"/>
+            <ac:spMk id="2" creationId="{ACB4984E-D363-862F-0DC1-550F52E943D1}"/>
+          </ac:spMkLst>
+        </pc:spChg>
+        <pc:spChg chg="mod">
+          <ac:chgData name="Ivan Valente UniPD" userId="a3a233bfc287bebe" providerId="LiveId" clId="{A23547FF-3074-4DC3-8B02-958CCEB5BCB2}" dt="2026-02-04T11:22:48.356" v="1188"/>
+          <ac:spMkLst>
+            <pc:docMk/>
+            <pc:sldMk cId="1076546552" sldId="313"/>
+            <ac:spMk id="4" creationId="{E9FDD409-160E-088A-CF19-C8234E3C25C3}"/>
+          </ac:spMkLst>
+        </pc:spChg>
+      </pc:sldChg>
+      <pc:sldChg chg="modSp add mod">
+        <pc:chgData name="Ivan Valente UniPD" userId="a3a233bfc287bebe" providerId="LiveId" clId="{A23547FF-3074-4DC3-8B02-958CCEB5BCB2}" dt="2026-02-04T11:20:30.469" v="1178" actId="403"/>
+        <pc:sldMkLst>
+          <pc:docMk/>
+          <pc:sldMk cId="3338806814" sldId="314"/>
+        </pc:sldMkLst>
+        <pc:spChg chg="mod">
+          <ac:chgData name="Ivan Valente UniPD" userId="a3a233bfc287bebe" providerId="LiveId" clId="{A23547FF-3074-4DC3-8B02-958CCEB5BCB2}" dt="2026-02-04T11:16:15.221" v="1057"/>
+          <ac:spMkLst>
+            <pc:docMk/>
+            <pc:sldMk cId="3338806814" sldId="314"/>
+            <ac:spMk id="2" creationId="{25EF62D5-CA24-5E0B-3945-CEDE88CBA381}"/>
+          </ac:spMkLst>
+        </pc:spChg>
+        <pc:spChg chg="mod">
+          <ac:chgData name="Ivan Valente UniPD" userId="a3a233bfc287bebe" providerId="LiveId" clId="{A23547FF-3074-4DC3-8B02-958CCEB5BCB2}" dt="2026-02-04T11:20:30.469" v="1178" actId="403"/>
+          <ac:spMkLst>
+            <pc:docMk/>
+            <pc:sldMk cId="3338806814" sldId="314"/>
+            <ac:spMk id="4" creationId="{E2B51104-1DE7-FA83-5179-FB6BCEFE384D}"/>
           </ac:spMkLst>
         </pc:spChg>
       </pc:sldChg>
@@ -1141,7 +1093,7 @@
             <a:pPr rtl="0"/>
             <a:fld id="{0B206E24-0B54-435C-A90E-A69DF26F92AC}" type="datetime1">
               <a:rPr lang="it-IT" smtClean="0"/>
-              <a:t>03/02/2026</a:t>
+              <a:t>04/02/2026</a:t>
             </a:fld>
             <a:endParaRPr lang="it-IT" dirty="0"/>
           </a:p>
@@ -1323,7 +1275,7 @@
             <a:fld id="{03109391-5E8C-4D75-9E70-006CE89C5811}" type="datetime1">
               <a:rPr lang="it-IT" smtClean="0"/>
               <a:pPr/>
-              <a:t>03/02/2026</a:t>
+              <a:t>04/02/2026</a:t>
             </a:fld>
             <a:endParaRPr lang="it-IT" dirty="0"/>
           </a:p>
@@ -1634,7 +1586,7 @@
           <a:bodyPr/>
           <a:lstStyle/>
           <a:p>
-            <a:endParaRPr lang="it-IT"/>
+            <a:endParaRPr lang="it-IT" dirty="0"/>
           </a:p>
         </p:txBody>
       </p:sp>
@@ -1747,7 +1699,7 @@
           <a:bodyPr/>
           <a:lstStyle/>
           <a:p>
-            <a:endParaRPr lang="it-IT"/>
+            <a:endParaRPr lang="it-IT" dirty="0"/>
           </a:p>
         </p:txBody>
       </p:sp>
@@ -1872,7 +1824,7 @@
           <a:bodyPr/>
           <a:lstStyle/>
           <a:p>
-            <a:endParaRPr lang="it-IT"/>
+            <a:endParaRPr lang="it-IT" dirty="0"/>
           </a:p>
         </p:txBody>
       </p:sp>
@@ -1997,7 +1949,7 @@
           <a:bodyPr/>
           <a:lstStyle/>
           <a:p>
-            <a:endParaRPr lang="it-IT"/>
+            <a:endParaRPr lang="it-IT" dirty="0"/>
           </a:p>
         </p:txBody>
       </p:sp>
@@ -2122,7 +2074,7 @@
           <a:bodyPr/>
           <a:lstStyle/>
           <a:p>
-            <a:endParaRPr lang="it-IT"/>
+            <a:endParaRPr lang="it-IT" dirty="0"/>
           </a:p>
         </p:txBody>
       </p:sp>
@@ -2247,7 +2199,7 @@
           <a:bodyPr/>
           <a:lstStyle/>
           <a:p>
-            <a:endParaRPr lang="it-IT"/>
+            <a:endParaRPr lang="it-IT" dirty="0"/>
           </a:p>
         </p:txBody>
       </p:sp>
@@ -2372,7 +2324,7 @@
           <a:bodyPr/>
           <a:lstStyle/>
           <a:p>
-            <a:endParaRPr lang="it-IT"/>
+            <a:endParaRPr lang="it-IT" dirty="0"/>
           </a:p>
         </p:txBody>
       </p:sp>
@@ -2497,7 +2449,7 @@
           <a:bodyPr/>
           <a:lstStyle/>
           <a:p>
-            <a:endParaRPr lang="it-IT"/>
+            <a:endParaRPr lang="it-IT" dirty="0"/>
           </a:p>
         </p:txBody>
       </p:sp>
@@ -2622,7 +2574,7 @@
           <a:bodyPr/>
           <a:lstStyle/>
           <a:p>
-            <a:endParaRPr lang="it-IT"/>
+            <a:endParaRPr lang="it-IT" dirty="0"/>
           </a:p>
         </p:txBody>
       </p:sp>
@@ -2747,7 +2699,7 @@
           <a:bodyPr/>
           <a:lstStyle/>
           <a:p>
-            <a:endParaRPr lang="it-IT"/>
+            <a:endParaRPr lang="it-IT" dirty="0"/>
           </a:p>
         </p:txBody>
       </p:sp>
@@ -2872,7 +2824,7 @@
           <a:bodyPr/>
           <a:lstStyle/>
           <a:p>
-            <a:endParaRPr lang="it-IT"/>
+            <a:endParaRPr lang="it-IT" dirty="0"/>
           </a:p>
         </p:txBody>
       </p:sp>
@@ -2985,7 +2937,7 @@
           <a:bodyPr/>
           <a:lstStyle/>
           <a:p>
-            <a:endParaRPr lang="it-IT"/>
+            <a:endParaRPr lang="it-IT" dirty="0"/>
           </a:p>
         </p:txBody>
       </p:sp>
@@ -3098,7 +3050,7 @@
           <a:bodyPr/>
           <a:lstStyle/>
           <a:p>
-            <a:endParaRPr lang="it-IT"/>
+            <a:endParaRPr lang="it-IT" dirty="0"/>
           </a:p>
         </p:txBody>
       </p:sp>
@@ -3223,7 +3175,7 @@
           <a:bodyPr/>
           <a:lstStyle/>
           <a:p>
-            <a:endParaRPr lang="it-IT"/>
+            <a:endParaRPr lang="it-IT" dirty="0"/>
           </a:p>
         </p:txBody>
       </p:sp>
@@ -3336,7 +3288,7 @@
           <a:bodyPr/>
           <a:lstStyle/>
           <a:p>
-            <a:endParaRPr lang="it-IT"/>
+            <a:endParaRPr lang="it-IT" dirty="0"/>
           </a:p>
         </p:txBody>
       </p:sp>
@@ -3437,7 +3389,7 @@
           <a:bodyPr/>
           <a:lstStyle/>
           <a:p>
-            <a:endParaRPr lang="it-IT"/>
+            <a:endParaRPr lang="it-IT" dirty="0"/>
           </a:p>
         </p:txBody>
       </p:sp>
@@ -3507,482 +3459,6 @@
 </file>
 
 <file path=ppt/notesSlides/notesSlide5.xml><?xml version="1.0" encoding="utf-8"?>
-<p:notes xmlns:a="http://schemas.openxmlformats.org/drawingml/2006/main" xmlns:r="http://schemas.openxmlformats.org/officeDocument/2006/relationships" xmlns:p="http://schemas.openxmlformats.org/presentationml/2006/main">
-  <p:cSld>
-    <p:spTree>
-      <p:nvGrpSpPr>
-        <p:cNvPr id="1" name=""/>
-        <p:cNvGrpSpPr/>
-        <p:nvPr/>
-      </p:nvGrpSpPr>
-      <p:grpSpPr>
-        <a:xfrm>
-          <a:off x="0" y="0"/>
-          <a:ext cx="0" cy="0"/>
-          <a:chOff x="0" y="0"/>
-          <a:chExt cx="0" cy="0"/>
-        </a:xfrm>
-      </p:grpSpPr>
-      <p:sp>
-        <p:nvSpPr>
-          <p:cNvPr id="2" name="Segnaposto immagine diapositiva 1"/>
-          <p:cNvSpPr>
-            <a:spLocks noGrp="1" noRot="1" noChangeAspect="1"/>
-          </p:cNvSpPr>
-          <p:nvPr>
-            <p:ph type="sldImg"/>
-          </p:nvPr>
-        </p:nvSpPr>
-        <p:spPr/>
-        <p:txBody>
-          <a:bodyPr/>
-          <a:lstStyle/>
-          <a:p>
-            <a:endParaRPr lang="it-IT"/>
-          </a:p>
-        </p:txBody>
-      </p:sp>
-      <p:sp>
-        <p:nvSpPr>
-          <p:cNvPr id="3" name="Segnaposto note 2"/>
-          <p:cNvSpPr>
-            <a:spLocks noGrp="1"/>
-          </p:cNvSpPr>
-          <p:nvPr>
-            <p:ph type="body" idx="1"/>
-          </p:nvPr>
-        </p:nvSpPr>
-        <p:spPr/>
-        <p:txBody>
-          <a:bodyPr rtlCol="0"/>
-          <a:lstStyle>
-            <a:defPPr>
-              <a:defRPr lang="it-IT"/>
-            </a:defPPr>
-          </a:lstStyle>
-          <a:p>
-            <a:pPr rtl="0"/>
-            <a:endParaRPr lang="it-IT" dirty="0"/>
-          </a:p>
-        </p:txBody>
-      </p:sp>
-      <p:sp>
-        <p:nvSpPr>
-          <p:cNvPr id="4" name="Segnaposto numero diapositiva 3"/>
-          <p:cNvSpPr>
-            <a:spLocks noGrp="1"/>
-          </p:cNvSpPr>
-          <p:nvPr>
-            <p:ph type="sldNum" sz="quarter" idx="5"/>
-          </p:nvPr>
-        </p:nvSpPr>
-        <p:spPr/>
-        <p:txBody>
-          <a:bodyPr rtlCol="0"/>
-          <a:lstStyle>
-            <a:defPPr>
-              <a:defRPr lang="it-IT"/>
-            </a:defPPr>
-          </a:lstStyle>
-          <a:p>
-            <a:pPr rtl="0"/>
-            <a:fld id="{E7AF00E9-A49D-4007-B3B9-A3783809E505}" type="slidenum">
-              <a:rPr lang="it-IT" smtClean="0"/>
-              <a:t>5</a:t>
-            </a:fld>
-            <a:endParaRPr lang="it-IT" dirty="0"/>
-          </a:p>
-        </p:txBody>
-      </p:sp>
-    </p:spTree>
-    <p:extLst>
-      <p:ext uri="{BB962C8B-B14F-4D97-AF65-F5344CB8AC3E}">
-        <p14:creationId xmlns:p14="http://schemas.microsoft.com/office/powerpoint/2010/main" val="3564270576"/>
-      </p:ext>
-    </p:extLst>
-  </p:cSld>
-  <p:clrMapOvr>
-    <a:masterClrMapping/>
-  </p:clrMapOvr>
-</p:notes>
-</file>
-
-<file path=ppt/notesSlides/notesSlide6.xml><?xml version="1.0" encoding="utf-8"?>
-<p:notes xmlns:a="http://schemas.openxmlformats.org/drawingml/2006/main" xmlns:r="http://schemas.openxmlformats.org/officeDocument/2006/relationships" xmlns:p="http://schemas.openxmlformats.org/presentationml/2006/main">
-  <p:cSld>
-    <p:spTree>
-      <p:nvGrpSpPr>
-        <p:cNvPr id="1" name="">
-          <a:extLst>
-            <a:ext uri="{FF2B5EF4-FFF2-40B4-BE49-F238E27FC236}">
-              <a16:creationId xmlns:a16="http://schemas.microsoft.com/office/drawing/2014/main" id="{34FA8531-AB06-3918-2F81-89F54CAD8554}"/>
-            </a:ext>
-          </a:extLst>
-        </p:cNvPr>
-        <p:cNvGrpSpPr/>
-        <p:nvPr/>
-      </p:nvGrpSpPr>
-      <p:grpSpPr>
-        <a:xfrm>
-          <a:off x="0" y="0"/>
-          <a:ext cx="0" cy="0"/>
-          <a:chOff x="0" y="0"/>
-          <a:chExt cx="0" cy="0"/>
-        </a:xfrm>
-      </p:grpSpPr>
-      <p:sp>
-        <p:nvSpPr>
-          <p:cNvPr id="2" name="Segnaposto immagine diapositiva 1">
-            <a:extLst>
-              <a:ext uri="{FF2B5EF4-FFF2-40B4-BE49-F238E27FC236}">
-                <a16:creationId xmlns:a16="http://schemas.microsoft.com/office/drawing/2014/main" id="{E6466516-C02F-9AFC-1ABF-6600669E6D8B}"/>
-              </a:ext>
-            </a:extLst>
-          </p:cNvPr>
-          <p:cNvSpPr>
-            <a:spLocks noGrp="1" noRot="1" noChangeAspect="1"/>
-          </p:cNvSpPr>
-          <p:nvPr>
-            <p:ph type="sldImg"/>
-          </p:nvPr>
-        </p:nvSpPr>
-        <p:spPr/>
-        <p:txBody>
-          <a:bodyPr/>
-          <a:lstStyle/>
-          <a:p>
-            <a:endParaRPr lang="it-IT"/>
-          </a:p>
-        </p:txBody>
-      </p:sp>
-      <p:sp>
-        <p:nvSpPr>
-          <p:cNvPr id="3" name="Segnaposto note 2">
-            <a:extLst>
-              <a:ext uri="{FF2B5EF4-FFF2-40B4-BE49-F238E27FC236}">
-                <a16:creationId xmlns:a16="http://schemas.microsoft.com/office/drawing/2014/main" id="{972C4F28-E94D-7DC1-20DB-20C6A7B04A7B}"/>
-              </a:ext>
-            </a:extLst>
-          </p:cNvPr>
-          <p:cNvSpPr>
-            <a:spLocks noGrp="1"/>
-          </p:cNvSpPr>
-          <p:nvPr>
-            <p:ph type="body" idx="1"/>
-          </p:nvPr>
-        </p:nvSpPr>
-        <p:spPr/>
-        <p:txBody>
-          <a:bodyPr rtlCol="0"/>
-          <a:lstStyle>
-            <a:defPPr>
-              <a:defRPr lang="it-IT"/>
-            </a:defPPr>
-          </a:lstStyle>
-          <a:p>
-            <a:pPr rtl="0"/>
-            <a:endParaRPr lang="it-IT" dirty="0"/>
-          </a:p>
-        </p:txBody>
-      </p:sp>
-      <p:sp>
-        <p:nvSpPr>
-          <p:cNvPr id="4" name="Segnaposto numero diapositiva 3">
-            <a:extLst>
-              <a:ext uri="{FF2B5EF4-FFF2-40B4-BE49-F238E27FC236}">
-                <a16:creationId xmlns:a16="http://schemas.microsoft.com/office/drawing/2014/main" id="{D04063E0-6659-9104-F4A1-38209143CE9A}"/>
-              </a:ext>
-            </a:extLst>
-          </p:cNvPr>
-          <p:cNvSpPr>
-            <a:spLocks noGrp="1"/>
-          </p:cNvSpPr>
-          <p:nvPr>
-            <p:ph type="sldNum" sz="quarter" idx="5"/>
-          </p:nvPr>
-        </p:nvSpPr>
-        <p:spPr/>
-        <p:txBody>
-          <a:bodyPr rtlCol="0"/>
-          <a:lstStyle>
-            <a:defPPr>
-              <a:defRPr lang="it-IT"/>
-            </a:defPPr>
-          </a:lstStyle>
-          <a:p>
-            <a:pPr rtl="0"/>
-            <a:fld id="{E7AF00E9-A49D-4007-B3B9-A3783809E505}" type="slidenum">
-              <a:rPr lang="it-IT" smtClean="0"/>
-              <a:t>6</a:t>
-            </a:fld>
-            <a:endParaRPr lang="it-IT" dirty="0"/>
-          </a:p>
-        </p:txBody>
-      </p:sp>
-    </p:spTree>
-    <p:extLst>
-      <p:ext uri="{BB962C8B-B14F-4D97-AF65-F5344CB8AC3E}">
-        <p14:creationId xmlns:p14="http://schemas.microsoft.com/office/powerpoint/2010/main" val="4248660253"/>
-      </p:ext>
-    </p:extLst>
-  </p:cSld>
-  <p:clrMapOvr>
-    <a:masterClrMapping/>
-  </p:clrMapOvr>
-</p:notes>
-</file>
-
-<file path=ppt/notesSlides/notesSlide7.xml><?xml version="1.0" encoding="utf-8"?>
-<p:notes xmlns:a="http://schemas.openxmlformats.org/drawingml/2006/main" xmlns:r="http://schemas.openxmlformats.org/officeDocument/2006/relationships" xmlns:p="http://schemas.openxmlformats.org/presentationml/2006/main">
-  <p:cSld>
-    <p:spTree>
-      <p:nvGrpSpPr>
-        <p:cNvPr id="1" name="">
-          <a:extLst>
-            <a:ext uri="{FF2B5EF4-FFF2-40B4-BE49-F238E27FC236}">
-              <a16:creationId xmlns:a16="http://schemas.microsoft.com/office/drawing/2014/main" id="{581CBF48-149B-328D-DB33-333091857439}"/>
-            </a:ext>
-          </a:extLst>
-        </p:cNvPr>
-        <p:cNvGrpSpPr/>
-        <p:nvPr/>
-      </p:nvGrpSpPr>
-      <p:grpSpPr>
-        <a:xfrm>
-          <a:off x="0" y="0"/>
-          <a:ext cx="0" cy="0"/>
-          <a:chOff x="0" y="0"/>
-          <a:chExt cx="0" cy="0"/>
-        </a:xfrm>
-      </p:grpSpPr>
-      <p:sp>
-        <p:nvSpPr>
-          <p:cNvPr id="2" name="Segnaposto immagine diapositiva 1">
-            <a:extLst>
-              <a:ext uri="{FF2B5EF4-FFF2-40B4-BE49-F238E27FC236}">
-                <a16:creationId xmlns:a16="http://schemas.microsoft.com/office/drawing/2014/main" id="{7A9F981F-F755-298C-A198-06BAE424FBD8}"/>
-              </a:ext>
-            </a:extLst>
-          </p:cNvPr>
-          <p:cNvSpPr>
-            <a:spLocks noGrp="1" noRot="1" noChangeAspect="1"/>
-          </p:cNvSpPr>
-          <p:nvPr>
-            <p:ph type="sldImg"/>
-          </p:nvPr>
-        </p:nvSpPr>
-        <p:spPr/>
-        <p:txBody>
-          <a:bodyPr/>
-          <a:lstStyle/>
-          <a:p>
-            <a:endParaRPr lang="it-IT"/>
-          </a:p>
-        </p:txBody>
-      </p:sp>
-      <p:sp>
-        <p:nvSpPr>
-          <p:cNvPr id="3" name="Segnaposto note 2">
-            <a:extLst>
-              <a:ext uri="{FF2B5EF4-FFF2-40B4-BE49-F238E27FC236}">
-                <a16:creationId xmlns:a16="http://schemas.microsoft.com/office/drawing/2014/main" id="{1893825A-1E64-7D0C-225E-46F49CF16BDC}"/>
-              </a:ext>
-            </a:extLst>
-          </p:cNvPr>
-          <p:cNvSpPr>
-            <a:spLocks noGrp="1"/>
-          </p:cNvSpPr>
-          <p:nvPr>
-            <p:ph type="body" idx="1"/>
-          </p:nvPr>
-        </p:nvSpPr>
-        <p:spPr/>
-        <p:txBody>
-          <a:bodyPr rtlCol="0"/>
-          <a:lstStyle>
-            <a:defPPr>
-              <a:defRPr lang="it-IT"/>
-            </a:defPPr>
-          </a:lstStyle>
-          <a:p>
-            <a:pPr rtl="0"/>
-            <a:endParaRPr lang="it-IT" dirty="0"/>
-          </a:p>
-        </p:txBody>
-      </p:sp>
-      <p:sp>
-        <p:nvSpPr>
-          <p:cNvPr id="4" name="Segnaposto numero diapositiva 3">
-            <a:extLst>
-              <a:ext uri="{FF2B5EF4-FFF2-40B4-BE49-F238E27FC236}">
-                <a16:creationId xmlns:a16="http://schemas.microsoft.com/office/drawing/2014/main" id="{73D14734-27ED-F128-04EA-222C8CD3A151}"/>
-              </a:ext>
-            </a:extLst>
-          </p:cNvPr>
-          <p:cNvSpPr>
-            <a:spLocks noGrp="1"/>
-          </p:cNvSpPr>
-          <p:nvPr>
-            <p:ph type="sldNum" sz="quarter" idx="5"/>
-          </p:nvPr>
-        </p:nvSpPr>
-        <p:spPr/>
-        <p:txBody>
-          <a:bodyPr rtlCol="0"/>
-          <a:lstStyle>
-            <a:defPPr>
-              <a:defRPr lang="it-IT"/>
-            </a:defPPr>
-          </a:lstStyle>
-          <a:p>
-            <a:pPr rtl="0"/>
-            <a:fld id="{E7AF00E9-A49D-4007-B3B9-A3783809E505}" type="slidenum">
-              <a:rPr lang="it-IT" smtClean="0"/>
-              <a:t>7</a:t>
-            </a:fld>
-            <a:endParaRPr lang="it-IT" dirty="0"/>
-          </a:p>
-        </p:txBody>
-      </p:sp>
-    </p:spTree>
-    <p:extLst>
-      <p:ext uri="{BB962C8B-B14F-4D97-AF65-F5344CB8AC3E}">
-        <p14:creationId xmlns:p14="http://schemas.microsoft.com/office/powerpoint/2010/main" val="3189460654"/>
-      </p:ext>
-    </p:extLst>
-  </p:cSld>
-  <p:clrMapOvr>
-    <a:masterClrMapping/>
-  </p:clrMapOvr>
-</p:notes>
-</file>
-
-<file path=ppt/notesSlides/notesSlide8.xml><?xml version="1.0" encoding="utf-8"?>
-<p:notes xmlns:a="http://schemas.openxmlformats.org/drawingml/2006/main" xmlns:r="http://schemas.openxmlformats.org/officeDocument/2006/relationships" xmlns:p="http://schemas.openxmlformats.org/presentationml/2006/main">
-  <p:cSld>
-    <p:spTree>
-      <p:nvGrpSpPr>
-        <p:cNvPr id="1" name="">
-          <a:extLst>
-            <a:ext uri="{FF2B5EF4-FFF2-40B4-BE49-F238E27FC236}">
-              <a16:creationId xmlns:a16="http://schemas.microsoft.com/office/drawing/2014/main" id="{6D7501D7-9BCB-33EB-928B-EEEB572D9948}"/>
-            </a:ext>
-          </a:extLst>
-        </p:cNvPr>
-        <p:cNvGrpSpPr/>
-        <p:nvPr/>
-      </p:nvGrpSpPr>
-      <p:grpSpPr>
-        <a:xfrm>
-          <a:off x="0" y="0"/>
-          <a:ext cx="0" cy="0"/>
-          <a:chOff x="0" y="0"/>
-          <a:chExt cx="0" cy="0"/>
-        </a:xfrm>
-      </p:grpSpPr>
-      <p:sp>
-        <p:nvSpPr>
-          <p:cNvPr id="2" name="Segnaposto immagine diapositiva 1">
-            <a:extLst>
-              <a:ext uri="{FF2B5EF4-FFF2-40B4-BE49-F238E27FC236}">
-                <a16:creationId xmlns:a16="http://schemas.microsoft.com/office/drawing/2014/main" id="{D9EC916C-DAE4-0B06-059D-3F80931675A2}"/>
-              </a:ext>
-            </a:extLst>
-          </p:cNvPr>
-          <p:cNvSpPr>
-            <a:spLocks noGrp="1" noRot="1" noChangeAspect="1"/>
-          </p:cNvSpPr>
-          <p:nvPr>
-            <p:ph type="sldImg"/>
-          </p:nvPr>
-        </p:nvSpPr>
-        <p:spPr/>
-        <p:txBody>
-          <a:bodyPr/>
-          <a:lstStyle/>
-          <a:p>
-            <a:endParaRPr lang="it-IT"/>
-          </a:p>
-        </p:txBody>
-      </p:sp>
-      <p:sp>
-        <p:nvSpPr>
-          <p:cNvPr id="3" name="Segnaposto note 2">
-            <a:extLst>
-              <a:ext uri="{FF2B5EF4-FFF2-40B4-BE49-F238E27FC236}">
-                <a16:creationId xmlns:a16="http://schemas.microsoft.com/office/drawing/2014/main" id="{53D3D4C5-F87B-8B17-E7B2-4015972D94B5}"/>
-              </a:ext>
-            </a:extLst>
-          </p:cNvPr>
-          <p:cNvSpPr>
-            <a:spLocks noGrp="1"/>
-          </p:cNvSpPr>
-          <p:nvPr>
-            <p:ph type="body" idx="1"/>
-          </p:nvPr>
-        </p:nvSpPr>
-        <p:spPr/>
-        <p:txBody>
-          <a:bodyPr rtlCol="0"/>
-          <a:lstStyle>
-            <a:defPPr>
-              <a:defRPr lang="it-IT"/>
-            </a:defPPr>
-          </a:lstStyle>
-          <a:p>
-            <a:pPr rtl="0"/>
-            <a:endParaRPr lang="it-IT" dirty="0"/>
-          </a:p>
-        </p:txBody>
-      </p:sp>
-      <p:sp>
-        <p:nvSpPr>
-          <p:cNvPr id="4" name="Segnaposto numero diapositiva 3">
-            <a:extLst>
-              <a:ext uri="{FF2B5EF4-FFF2-40B4-BE49-F238E27FC236}">
-                <a16:creationId xmlns:a16="http://schemas.microsoft.com/office/drawing/2014/main" id="{A20E80BA-1876-A527-7248-D9930FC8B90E}"/>
-              </a:ext>
-            </a:extLst>
-          </p:cNvPr>
-          <p:cNvSpPr>
-            <a:spLocks noGrp="1"/>
-          </p:cNvSpPr>
-          <p:nvPr>
-            <p:ph type="sldNum" sz="quarter" idx="5"/>
-          </p:nvPr>
-        </p:nvSpPr>
-        <p:spPr/>
-        <p:txBody>
-          <a:bodyPr rtlCol="0"/>
-          <a:lstStyle>
-            <a:defPPr>
-              <a:defRPr lang="it-IT"/>
-            </a:defPPr>
-          </a:lstStyle>
-          <a:p>
-            <a:pPr rtl="0"/>
-            <a:fld id="{E7AF00E9-A49D-4007-B3B9-A3783809E505}" type="slidenum">
-              <a:rPr lang="it-IT" smtClean="0"/>
-              <a:t>8</a:t>
-            </a:fld>
-            <a:endParaRPr lang="it-IT" dirty="0"/>
-          </a:p>
-        </p:txBody>
-      </p:sp>
-    </p:spTree>
-    <p:extLst>
-      <p:ext uri="{BB962C8B-B14F-4D97-AF65-F5344CB8AC3E}">
-        <p14:creationId xmlns:p14="http://schemas.microsoft.com/office/powerpoint/2010/main" val="1459320715"/>
-      </p:ext>
-    </p:extLst>
-  </p:cSld>
-  <p:clrMapOvr>
-    <a:masterClrMapping/>
-  </p:clrMapOvr>
-</p:notes>
-</file>
-
-<file path=ppt/notesSlides/notesSlide9.xml><?xml version="1.0" encoding="utf-8"?>
 <p:notes xmlns:a="http://schemas.openxmlformats.org/drawingml/2006/main" xmlns:r="http://schemas.openxmlformats.org/officeDocument/2006/relationships" xmlns:p="http://schemas.openxmlformats.org/presentationml/2006/main">
   <p:cSld>
     <p:spTree>
@@ -4026,7 +3502,7 @@
           <a:bodyPr/>
           <a:lstStyle/>
           <a:p>
-            <a:endParaRPr lang="it-IT"/>
+            <a:endParaRPr lang="it-IT" dirty="0"/>
           </a:p>
         </p:txBody>
       </p:sp>
@@ -4088,7 +3564,7 @@
             <a:pPr rtl="0"/>
             <a:fld id="{E7AF00E9-A49D-4007-B3B9-A3783809E505}" type="slidenum">
               <a:rPr lang="it-IT" smtClean="0"/>
-              <a:t>9</a:t>
+              <a:t>5</a:t>
             </a:fld>
             <a:endParaRPr lang="it-IT" dirty="0"/>
           </a:p>
@@ -4098,6 +3574,506 @@
     <p:extLst>
       <p:ext uri="{BB962C8B-B14F-4D97-AF65-F5344CB8AC3E}">
         <p14:creationId xmlns:p14="http://schemas.microsoft.com/office/powerpoint/2010/main" val="3496056776"/>
+      </p:ext>
+    </p:extLst>
+  </p:cSld>
+  <p:clrMapOvr>
+    <a:masterClrMapping/>
+  </p:clrMapOvr>
+</p:notes>
+</file>
+
+<file path=ppt/notesSlides/notesSlide6.xml><?xml version="1.0" encoding="utf-8"?>
+<p:notes xmlns:a="http://schemas.openxmlformats.org/drawingml/2006/main" xmlns:r="http://schemas.openxmlformats.org/officeDocument/2006/relationships" xmlns:p="http://schemas.openxmlformats.org/presentationml/2006/main">
+  <p:cSld>
+    <p:spTree>
+      <p:nvGrpSpPr>
+        <p:cNvPr id="1" name="">
+          <a:extLst>
+            <a:ext uri="{FF2B5EF4-FFF2-40B4-BE49-F238E27FC236}">
+              <a16:creationId xmlns:a16="http://schemas.microsoft.com/office/drawing/2014/main" id="{600467CB-511C-D44D-693A-8F8B8078E3CA}"/>
+            </a:ext>
+          </a:extLst>
+        </p:cNvPr>
+        <p:cNvGrpSpPr/>
+        <p:nvPr/>
+      </p:nvGrpSpPr>
+      <p:grpSpPr>
+        <a:xfrm>
+          <a:off x="0" y="0"/>
+          <a:ext cx="0" cy="0"/>
+          <a:chOff x="0" y="0"/>
+          <a:chExt cx="0" cy="0"/>
+        </a:xfrm>
+      </p:grpSpPr>
+      <p:sp>
+        <p:nvSpPr>
+          <p:cNvPr id="2" name="Segnaposto immagine diapositiva 1">
+            <a:extLst>
+              <a:ext uri="{FF2B5EF4-FFF2-40B4-BE49-F238E27FC236}">
+                <a16:creationId xmlns:a16="http://schemas.microsoft.com/office/drawing/2014/main" id="{F30461C6-B5F0-3D9A-BB14-1AF58B0B6CF0}"/>
+              </a:ext>
+            </a:extLst>
+          </p:cNvPr>
+          <p:cNvSpPr>
+            <a:spLocks noGrp="1" noRot="1" noChangeAspect="1"/>
+          </p:cNvSpPr>
+          <p:nvPr>
+            <p:ph type="sldImg"/>
+          </p:nvPr>
+        </p:nvSpPr>
+        <p:spPr/>
+        <p:txBody>
+          <a:bodyPr/>
+          <a:lstStyle/>
+          <a:p>
+            <a:endParaRPr lang="it-IT" dirty="0"/>
+          </a:p>
+        </p:txBody>
+      </p:sp>
+      <p:sp>
+        <p:nvSpPr>
+          <p:cNvPr id="3" name="Segnaposto note 2">
+            <a:extLst>
+              <a:ext uri="{FF2B5EF4-FFF2-40B4-BE49-F238E27FC236}">
+                <a16:creationId xmlns:a16="http://schemas.microsoft.com/office/drawing/2014/main" id="{9EB80CA8-1BC8-391A-C9E2-D1005BCD694A}"/>
+              </a:ext>
+            </a:extLst>
+          </p:cNvPr>
+          <p:cNvSpPr>
+            <a:spLocks noGrp="1"/>
+          </p:cNvSpPr>
+          <p:nvPr>
+            <p:ph type="body" idx="1"/>
+          </p:nvPr>
+        </p:nvSpPr>
+        <p:spPr/>
+        <p:txBody>
+          <a:bodyPr rtlCol="0"/>
+          <a:lstStyle>
+            <a:defPPr>
+              <a:defRPr lang="it-IT"/>
+            </a:defPPr>
+          </a:lstStyle>
+          <a:p>
+            <a:pPr rtl="0"/>
+            <a:endParaRPr lang="it-IT" dirty="0"/>
+          </a:p>
+        </p:txBody>
+      </p:sp>
+      <p:sp>
+        <p:nvSpPr>
+          <p:cNvPr id="4" name="Segnaposto numero diapositiva 3">
+            <a:extLst>
+              <a:ext uri="{FF2B5EF4-FFF2-40B4-BE49-F238E27FC236}">
+                <a16:creationId xmlns:a16="http://schemas.microsoft.com/office/drawing/2014/main" id="{11F7E65C-9E2A-2E3F-3293-EA4A31BC0C98}"/>
+              </a:ext>
+            </a:extLst>
+          </p:cNvPr>
+          <p:cNvSpPr>
+            <a:spLocks noGrp="1"/>
+          </p:cNvSpPr>
+          <p:nvPr>
+            <p:ph type="sldNum" sz="quarter" idx="5"/>
+          </p:nvPr>
+        </p:nvSpPr>
+        <p:spPr/>
+        <p:txBody>
+          <a:bodyPr rtlCol="0"/>
+          <a:lstStyle>
+            <a:defPPr>
+              <a:defRPr lang="it-IT"/>
+            </a:defPPr>
+          </a:lstStyle>
+          <a:p>
+            <a:pPr rtl="0"/>
+            <a:fld id="{E7AF00E9-A49D-4007-B3B9-A3783809E505}" type="slidenum">
+              <a:rPr lang="it-IT" smtClean="0"/>
+              <a:t>6</a:t>
+            </a:fld>
+            <a:endParaRPr lang="it-IT" dirty="0"/>
+          </a:p>
+        </p:txBody>
+      </p:sp>
+    </p:spTree>
+    <p:extLst>
+      <p:ext uri="{BB962C8B-B14F-4D97-AF65-F5344CB8AC3E}">
+        <p14:creationId xmlns:p14="http://schemas.microsoft.com/office/powerpoint/2010/main" val="3837506106"/>
+      </p:ext>
+    </p:extLst>
+  </p:cSld>
+  <p:clrMapOvr>
+    <a:masterClrMapping/>
+  </p:clrMapOvr>
+</p:notes>
+</file>
+
+<file path=ppt/notesSlides/notesSlide7.xml><?xml version="1.0" encoding="utf-8"?>
+<p:notes xmlns:a="http://schemas.openxmlformats.org/drawingml/2006/main" xmlns:r="http://schemas.openxmlformats.org/officeDocument/2006/relationships" xmlns:p="http://schemas.openxmlformats.org/presentationml/2006/main">
+  <p:cSld>
+    <p:spTree>
+      <p:nvGrpSpPr>
+        <p:cNvPr id="1" name="">
+          <a:extLst>
+            <a:ext uri="{FF2B5EF4-FFF2-40B4-BE49-F238E27FC236}">
+              <a16:creationId xmlns:a16="http://schemas.microsoft.com/office/drawing/2014/main" id="{CCC88EE4-95C7-A716-BD52-CFF435432EA5}"/>
+            </a:ext>
+          </a:extLst>
+        </p:cNvPr>
+        <p:cNvGrpSpPr/>
+        <p:nvPr/>
+      </p:nvGrpSpPr>
+      <p:grpSpPr>
+        <a:xfrm>
+          <a:off x="0" y="0"/>
+          <a:ext cx="0" cy="0"/>
+          <a:chOff x="0" y="0"/>
+          <a:chExt cx="0" cy="0"/>
+        </a:xfrm>
+      </p:grpSpPr>
+      <p:sp>
+        <p:nvSpPr>
+          <p:cNvPr id="2" name="Segnaposto immagine diapositiva 1">
+            <a:extLst>
+              <a:ext uri="{FF2B5EF4-FFF2-40B4-BE49-F238E27FC236}">
+                <a16:creationId xmlns:a16="http://schemas.microsoft.com/office/drawing/2014/main" id="{C72DA81D-32B7-6D1E-AA36-3E92B02E3986}"/>
+              </a:ext>
+            </a:extLst>
+          </p:cNvPr>
+          <p:cNvSpPr>
+            <a:spLocks noGrp="1" noRot="1" noChangeAspect="1"/>
+          </p:cNvSpPr>
+          <p:nvPr>
+            <p:ph type="sldImg"/>
+          </p:nvPr>
+        </p:nvSpPr>
+        <p:spPr/>
+        <p:txBody>
+          <a:bodyPr/>
+          <a:lstStyle/>
+          <a:p>
+            <a:endParaRPr lang="it-IT" dirty="0"/>
+          </a:p>
+        </p:txBody>
+      </p:sp>
+      <p:sp>
+        <p:nvSpPr>
+          <p:cNvPr id="3" name="Segnaposto note 2">
+            <a:extLst>
+              <a:ext uri="{FF2B5EF4-FFF2-40B4-BE49-F238E27FC236}">
+                <a16:creationId xmlns:a16="http://schemas.microsoft.com/office/drawing/2014/main" id="{4735F793-5123-D665-2364-ACB06D89398D}"/>
+              </a:ext>
+            </a:extLst>
+          </p:cNvPr>
+          <p:cNvSpPr>
+            <a:spLocks noGrp="1"/>
+          </p:cNvSpPr>
+          <p:nvPr>
+            <p:ph type="body" idx="1"/>
+          </p:nvPr>
+        </p:nvSpPr>
+        <p:spPr/>
+        <p:txBody>
+          <a:bodyPr rtlCol="0"/>
+          <a:lstStyle>
+            <a:defPPr>
+              <a:defRPr lang="it-IT"/>
+            </a:defPPr>
+          </a:lstStyle>
+          <a:p>
+            <a:pPr rtl="0"/>
+            <a:endParaRPr lang="it-IT" dirty="0"/>
+          </a:p>
+        </p:txBody>
+      </p:sp>
+      <p:sp>
+        <p:nvSpPr>
+          <p:cNvPr id="4" name="Segnaposto numero diapositiva 3">
+            <a:extLst>
+              <a:ext uri="{FF2B5EF4-FFF2-40B4-BE49-F238E27FC236}">
+                <a16:creationId xmlns:a16="http://schemas.microsoft.com/office/drawing/2014/main" id="{8429E496-BEAD-30A9-D962-7C2139B26AC3}"/>
+              </a:ext>
+            </a:extLst>
+          </p:cNvPr>
+          <p:cNvSpPr>
+            <a:spLocks noGrp="1"/>
+          </p:cNvSpPr>
+          <p:nvPr>
+            <p:ph type="sldNum" sz="quarter" idx="5"/>
+          </p:nvPr>
+        </p:nvSpPr>
+        <p:spPr/>
+        <p:txBody>
+          <a:bodyPr rtlCol="0"/>
+          <a:lstStyle>
+            <a:defPPr>
+              <a:defRPr lang="it-IT"/>
+            </a:defPPr>
+          </a:lstStyle>
+          <a:p>
+            <a:pPr rtl="0"/>
+            <a:fld id="{E7AF00E9-A49D-4007-B3B9-A3783809E505}" type="slidenum">
+              <a:rPr lang="it-IT" smtClean="0"/>
+              <a:t>7</a:t>
+            </a:fld>
+            <a:endParaRPr lang="it-IT" dirty="0"/>
+          </a:p>
+        </p:txBody>
+      </p:sp>
+    </p:spTree>
+    <p:extLst>
+      <p:ext uri="{BB962C8B-B14F-4D97-AF65-F5344CB8AC3E}">
+        <p14:creationId xmlns:p14="http://schemas.microsoft.com/office/powerpoint/2010/main" val="220242115"/>
+      </p:ext>
+    </p:extLst>
+  </p:cSld>
+  <p:clrMapOvr>
+    <a:masterClrMapping/>
+  </p:clrMapOvr>
+</p:notes>
+</file>
+
+<file path=ppt/notesSlides/notesSlide8.xml><?xml version="1.0" encoding="utf-8"?>
+<p:notes xmlns:a="http://schemas.openxmlformats.org/drawingml/2006/main" xmlns:r="http://schemas.openxmlformats.org/officeDocument/2006/relationships" xmlns:p="http://schemas.openxmlformats.org/presentationml/2006/main">
+  <p:cSld>
+    <p:spTree>
+      <p:nvGrpSpPr>
+        <p:cNvPr id="1" name="">
+          <a:extLst>
+            <a:ext uri="{FF2B5EF4-FFF2-40B4-BE49-F238E27FC236}">
+              <a16:creationId xmlns:a16="http://schemas.microsoft.com/office/drawing/2014/main" id="{9678CC39-300A-DC86-F7B8-D127006D92E3}"/>
+            </a:ext>
+          </a:extLst>
+        </p:cNvPr>
+        <p:cNvGrpSpPr/>
+        <p:nvPr/>
+      </p:nvGrpSpPr>
+      <p:grpSpPr>
+        <a:xfrm>
+          <a:off x="0" y="0"/>
+          <a:ext cx="0" cy="0"/>
+          <a:chOff x="0" y="0"/>
+          <a:chExt cx="0" cy="0"/>
+        </a:xfrm>
+      </p:grpSpPr>
+      <p:sp>
+        <p:nvSpPr>
+          <p:cNvPr id="2" name="Segnaposto immagine diapositiva 1">
+            <a:extLst>
+              <a:ext uri="{FF2B5EF4-FFF2-40B4-BE49-F238E27FC236}">
+                <a16:creationId xmlns:a16="http://schemas.microsoft.com/office/drawing/2014/main" id="{C0371197-76C4-5BE9-06BC-F5AE32D35EA7}"/>
+              </a:ext>
+            </a:extLst>
+          </p:cNvPr>
+          <p:cNvSpPr>
+            <a:spLocks noGrp="1" noRot="1" noChangeAspect="1"/>
+          </p:cNvSpPr>
+          <p:nvPr>
+            <p:ph type="sldImg"/>
+          </p:nvPr>
+        </p:nvSpPr>
+        <p:spPr/>
+        <p:txBody>
+          <a:bodyPr/>
+          <a:lstStyle/>
+          <a:p>
+            <a:endParaRPr lang="it-IT" dirty="0"/>
+          </a:p>
+        </p:txBody>
+      </p:sp>
+      <p:sp>
+        <p:nvSpPr>
+          <p:cNvPr id="3" name="Segnaposto note 2">
+            <a:extLst>
+              <a:ext uri="{FF2B5EF4-FFF2-40B4-BE49-F238E27FC236}">
+                <a16:creationId xmlns:a16="http://schemas.microsoft.com/office/drawing/2014/main" id="{973353AC-9D45-C1BA-163F-F8DD99E42A52}"/>
+              </a:ext>
+            </a:extLst>
+          </p:cNvPr>
+          <p:cNvSpPr>
+            <a:spLocks noGrp="1"/>
+          </p:cNvSpPr>
+          <p:nvPr>
+            <p:ph type="body" idx="1"/>
+          </p:nvPr>
+        </p:nvSpPr>
+        <p:spPr/>
+        <p:txBody>
+          <a:bodyPr rtlCol="0"/>
+          <a:lstStyle>
+            <a:defPPr>
+              <a:defRPr lang="it-IT"/>
+            </a:defPPr>
+          </a:lstStyle>
+          <a:p>
+            <a:pPr rtl="0"/>
+            <a:endParaRPr lang="it-IT" dirty="0"/>
+          </a:p>
+        </p:txBody>
+      </p:sp>
+      <p:sp>
+        <p:nvSpPr>
+          <p:cNvPr id="4" name="Segnaposto numero diapositiva 3">
+            <a:extLst>
+              <a:ext uri="{FF2B5EF4-FFF2-40B4-BE49-F238E27FC236}">
+                <a16:creationId xmlns:a16="http://schemas.microsoft.com/office/drawing/2014/main" id="{9417771D-5B21-6EC3-F0F5-AB7C21E0BDBB}"/>
+              </a:ext>
+            </a:extLst>
+          </p:cNvPr>
+          <p:cNvSpPr>
+            <a:spLocks noGrp="1"/>
+          </p:cNvSpPr>
+          <p:nvPr>
+            <p:ph type="sldNum" sz="quarter" idx="5"/>
+          </p:nvPr>
+        </p:nvSpPr>
+        <p:spPr/>
+        <p:txBody>
+          <a:bodyPr rtlCol="0"/>
+          <a:lstStyle>
+            <a:defPPr>
+              <a:defRPr lang="it-IT"/>
+            </a:defPPr>
+          </a:lstStyle>
+          <a:p>
+            <a:pPr rtl="0"/>
+            <a:fld id="{E7AF00E9-A49D-4007-B3B9-A3783809E505}" type="slidenum">
+              <a:rPr lang="it-IT" smtClean="0"/>
+              <a:t>8</a:t>
+            </a:fld>
+            <a:endParaRPr lang="it-IT" dirty="0"/>
+          </a:p>
+        </p:txBody>
+      </p:sp>
+    </p:spTree>
+    <p:extLst>
+      <p:ext uri="{BB962C8B-B14F-4D97-AF65-F5344CB8AC3E}">
+        <p14:creationId xmlns:p14="http://schemas.microsoft.com/office/powerpoint/2010/main" val="30331380"/>
+      </p:ext>
+    </p:extLst>
+  </p:cSld>
+  <p:clrMapOvr>
+    <a:masterClrMapping/>
+  </p:clrMapOvr>
+</p:notes>
+</file>
+
+<file path=ppt/notesSlides/notesSlide9.xml><?xml version="1.0" encoding="utf-8"?>
+<p:notes xmlns:a="http://schemas.openxmlformats.org/drawingml/2006/main" xmlns:r="http://schemas.openxmlformats.org/officeDocument/2006/relationships" xmlns:p="http://schemas.openxmlformats.org/presentationml/2006/main">
+  <p:cSld>
+    <p:spTree>
+      <p:nvGrpSpPr>
+        <p:cNvPr id="1" name="">
+          <a:extLst>
+            <a:ext uri="{FF2B5EF4-FFF2-40B4-BE49-F238E27FC236}">
+              <a16:creationId xmlns:a16="http://schemas.microsoft.com/office/drawing/2014/main" id="{EFC39A20-DF8F-7621-2B50-850A5147DAD6}"/>
+            </a:ext>
+          </a:extLst>
+        </p:cNvPr>
+        <p:cNvGrpSpPr/>
+        <p:nvPr/>
+      </p:nvGrpSpPr>
+      <p:grpSpPr>
+        <a:xfrm>
+          <a:off x="0" y="0"/>
+          <a:ext cx="0" cy="0"/>
+          <a:chOff x="0" y="0"/>
+          <a:chExt cx="0" cy="0"/>
+        </a:xfrm>
+      </p:grpSpPr>
+      <p:sp>
+        <p:nvSpPr>
+          <p:cNvPr id="2" name="Segnaposto immagine diapositiva 1">
+            <a:extLst>
+              <a:ext uri="{FF2B5EF4-FFF2-40B4-BE49-F238E27FC236}">
+                <a16:creationId xmlns:a16="http://schemas.microsoft.com/office/drawing/2014/main" id="{80B00FC6-C1AC-A881-0F10-A5CDED8D0C48}"/>
+              </a:ext>
+            </a:extLst>
+          </p:cNvPr>
+          <p:cNvSpPr>
+            <a:spLocks noGrp="1" noRot="1" noChangeAspect="1"/>
+          </p:cNvSpPr>
+          <p:nvPr>
+            <p:ph type="sldImg"/>
+          </p:nvPr>
+        </p:nvSpPr>
+        <p:spPr/>
+        <p:txBody>
+          <a:bodyPr/>
+          <a:lstStyle/>
+          <a:p>
+            <a:endParaRPr lang="it-IT" dirty="0"/>
+          </a:p>
+        </p:txBody>
+      </p:sp>
+      <p:sp>
+        <p:nvSpPr>
+          <p:cNvPr id="3" name="Segnaposto note 2">
+            <a:extLst>
+              <a:ext uri="{FF2B5EF4-FFF2-40B4-BE49-F238E27FC236}">
+                <a16:creationId xmlns:a16="http://schemas.microsoft.com/office/drawing/2014/main" id="{F6C4C291-8C73-6491-13B6-7A7F7215271B}"/>
+              </a:ext>
+            </a:extLst>
+          </p:cNvPr>
+          <p:cNvSpPr>
+            <a:spLocks noGrp="1"/>
+          </p:cNvSpPr>
+          <p:nvPr>
+            <p:ph type="body" idx="1"/>
+          </p:nvPr>
+        </p:nvSpPr>
+        <p:spPr/>
+        <p:txBody>
+          <a:bodyPr rtlCol="0"/>
+          <a:lstStyle>
+            <a:defPPr>
+              <a:defRPr lang="it-IT"/>
+            </a:defPPr>
+          </a:lstStyle>
+          <a:p>
+            <a:pPr rtl="0"/>
+            <a:endParaRPr lang="it-IT" dirty="0"/>
+          </a:p>
+        </p:txBody>
+      </p:sp>
+      <p:sp>
+        <p:nvSpPr>
+          <p:cNvPr id="4" name="Segnaposto numero diapositiva 3">
+            <a:extLst>
+              <a:ext uri="{FF2B5EF4-FFF2-40B4-BE49-F238E27FC236}">
+                <a16:creationId xmlns:a16="http://schemas.microsoft.com/office/drawing/2014/main" id="{F73ECDF1-8B57-A570-87B2-B07B67D88578}"/>
+              </a:ext>
+            </a:extLst>
+          </p:cNvPr>
+          <p:cNvSpPr>
+            <a:spLocks noGrp="1"/>
+          </p:cNvSpPr>
+          <p:nvPr>
+            <p:ph type="sldNum" sz="quarter" idx="5"/>
+          </p:nvPr>
+        </p:nvSpPr>
+        <p:spPr/>
+        <p:txBody>
+          <a:bodyPr rtlCol="0"/>
+          <a:lstStyle>
+            <a:defPPr>
+              <a:defRPr lang="it-IT"/>
+            </a:defPPr>
+          </a:lstStyle>
+          <a:p>
+            <a:pPr rtl="0"/>
+            <a:fld id="{E7AF00E9-A49D-4007-B3B9-A3783809E505}" type="slidenum">
+              <a:rPr lang="it-IT" smtClean="0"/>
+              <a:t>9</a:t>
+            </a:fld>
+            <a:endParaRPr lang="it-IT" dirty="0"/>
+          </a:p>
+        </p:txBody>
+      </p:sp>
+    </p:spTree>
+    <p:extLst>
+      <p:ext uri="{BB962C8B-B14F-4D97-AF65-F5344CB8AC3E}">
+        <p14:creationId xmlns:p14="http://schemas.microsoft.com/office/powerpoint/2010/main" val="3149231616"/>
       </p:ext>
     </p:extLst>
   </p:cSld>
@@ -4203,7 +4179,7 @@
           <a:p>
             <a:pPr rtl="0"/>
             <a:r>
-              <a:rPr lang="it-IT"/>
+              <a:rPr lang="it-IT" dirty="0"/>
               <a:t>Fare clic sull'icona per inserire un'immagine</a:t>
             </a:r>
           </a:p>
@@ -4389,10 +4365,9 @@
           <a:p>
             <a:pPr rtl="0"/>
             <a:r>
-              <a:rPr lang="it-IT"/>
+              <a:rPr lang="it-IT" dirty="0"/>
               <a:t>20XX</a:t>
             </a:r>
-            <a:endParaRPr lang="it-IT" dirty="0"/>
           </a:p>
         </p:txBody>
       </p:sp>
@@ -5520,10 +5495,9 @@
           <a:p>
             <a:pPr rtl="0"/>
             <a:r>
-              <a:rPr lang="it-IT"/>
+              <a:rPr lang="it-IT" dirty="0"/>
               <a:t>20XX</a:t>
             </a:r>
-            <a:endParaRPr lang="it-IT" dirty="0"/>
           </a:p>
         </p:txBody>
       </p:sp>
@@ -5696,7 +5670,7 @@
           <a:p>
             <a:pPr rtl="0"/>
             <a:r>
-              <a:rPr lang="it-IT"/>
+              <a:rPr lang="it-IT" dirty="0"/>
               <a:t>Fare clic sull'icona per inserire un'immagine</a:t>
             </a:r>
           </a:p>
@@ -5729,10 +5703,9 @@
           <a:p>
             <a:pPr rtl="0"/>
             <a:r>
-              <a:rPr lang="it-IT"/>
+              <a:rPr lang="it-IT" dirty="0"/>
               <a:t>20XX</a:t>
             </a:r>
-            <a:endParaRPr lang="it-IT" dirty="0"/>
           </a:p>
         </p:txBody>
       </p:sp>
@@ -7229,10 +7202,9 @@
           <a:p>
             <a:pPr rtl="0"/>
             <a:r>
-              <a:rPr lang="it-IT"/>
+              <a:rPr lang="it-IT" dirty="0"/>
               <a:t>20XX</a:t>
             </a:r>
-            <a:endParaRPr lang="it-IT" dirty="0"/>
           </a:p>
         </p:txBody>
       </p:sp>
@@ -7363,7 +7335,7 @@
           <a:p>
             <a:pPr rtl="0"/>
             <a:r>
-              <a:rPr lang="it-IT"/>
+              <a:rPr lang="it-IT" dirty="0"/>
               <a:t>Fare clic sull'icona per inserire un'immagine</a:t>
             </a:r>
           </a:p>
@@ -7513,10 +7485,9 @@
           <a:p>
             <a:pPr rtl="0"/>
             <a:r>
-              <a:rPr lang="it-IT"/>
+              <a:rPr lang="it-IT" dirty="0"/>
               <a:t>20XX</a:t>
             </a:r>
-            <a:endParaRPr lang="it-IT" dirty="0"/>
           </a:p>
         </p:txBody>
       </p:sp>
@@ -8340,10 +8311,9 @@
           <a:p>
             <a:pPr rtl="0"/>
             <a:r>
-              <a:rPr lang="it-IT"/>
+              <a:rPr lang="it-IT" dirty="0"/>
               <a:t>20XX</a:t>
             </a:r>
-            <a:endParaRPr lang="it-IT" dirty="0"/>
           </a:p>
         </p:txBody>
       </p:sp>
@@ -9638,10 +9608,9 @@
           <a:p>
             <a:pPr rtl="0"/>
             <a:r>
-              <a:rPr lang="it-IT"/>
+              <a:rPr lang="it-IT" dirty="0"/>
               <a:t>20XX</a:t>
             </a:r>
-            <a:endParaRPr lang="it-IT" dirty="0"/>
           </a:p>
         </p:txBody>
       </p:sp>
@@ -9806,10 +9775,9 @@
           <a:p>
             <a:pPr rtl="0"/>
             <a:r>
-              <a:rPr lang="it-IT"/>
+              <a:rPr lang="it-IT" dirty="0"/>
               <a:t>20XX</a:t>
             </a:r>
-            <a:endParaRPr lang="it-IT" dirty="0"/>
           </a:p>
         </p:txBody>
       </p:sp>
@@ -10303,7 +10271,7 @@
           <a:p>
             <a:pPr rtl="0"/>
             <a:r>
-              <a:rPr lang="it-IT"/>
+              <a:rPr lang="it-IT" dirty="0"/>
               <a:t>Fare clic sull'icona per inserire un'immagine</a:t>
             </a:r>
           </a:p>
@@ -11119,10 +11087,9 @@
           <a:p>
             <a:pPr rtl="0"/>
             <a:r>
-              <a:rPr lang="it-IT"/>
+              <a:rPr lang="it-IT" dirty="0"/>
               <a:t>20XX</a:t>
             </a:r>
-            <a:endParaRPr lang="it-IT" dirty="0"/>
           </a:p>
         </p:txBody>
       </p:sp>
@@ -11387,10 +11354,9 @@
           <a:p>
             <a:pPr rtl="0"/>
             <a:r>
-              <a:rPr lang="it-IT"/>
+              <a:rPr lang="it-IT" dirty="0"/>
               <a:t>20XX</a:t>
             </a:r>
-            <a:endParaRPr lang="it-IT" dirty="0"/>
           </a:p>
         </p:txBody>
       </p:sp>
@@ -12375,10 +12341,9 @@
           </a:lstStyle>
           <a:p>
             <a:r>
-              <a:rPr lang="it-IT" dirty="0" err="1"/>
+              <a:rPr lang="it-IT" dirty="0"/>
               <a:t>buildsyntheticdata.m</a:t>
             </a:r>
-            <a:endParaRPr lang="it-IT" dirty="0"/>
           </a:p>
         </p:txBody>
       </p:sp>
@@ -12682,7 +12647,7 @@
           <a:lstStyle/>
           <a:p>
             <a:pPr algn="ctr"/>
-            <a:endParaRPr lang="it-IT"/>
+            <a:endParaRPr lang="it-IT" dirty="0"/>
           </a:p>
         </p:txBody>
       </p:sp>
@@ -14187,15 +14152,7 @@
             </a:pPr>
             <a:r>
               <a:rPr lang="it-IT" dirty="0"/>
-              <a:t>Calcolo delle traiettorie tramite calcolo del vettore «c» (con «</a:t>
-            </a:r>
-            <a:r>
-              <a:rPr lang="it-IT" dirty="0" err="1"/>
-              <a:t>pinv</a:t>
-            </a:r>
-            <a:r>
-              <a:rPr lang="it-IT" dirty="0"/>
-              <a:t>» per SVD) e delle derivate (velocità di diffusione)</a:t>
+              <a:t>Calcolo delle traiettorie tramite calcolo del vettore «c» (con «pinv» per SVD) e delle derivate (velocità di diffusione)</a:t>
             </a:r>
           </a:p>
           <a:p>
@@ -14205,15 +14162,7 @@
             </a:pPr>
             <a:r>
               <a:rPr lang="it-IT" dirty="0"/>
-              <a:t>Costruzione della matrice di adiacenza (e di conseguenza del grafo) grazie a clustering (con «</a:t>
-            </a:r>
-            <a:r>
-              <a:rPr lang="it-IT" dirty="0" err="1"/>
-              <a:t>kmeans</a:t>
-            </a:r>
-            <a:r>
-              <a:rPr lang="it-IT" dirty="0"/>
-              <a:t>» in MATLAB)</a:t>
+              <a:t>Costruzione della matrice di adiacenza (e di conseguenza del grafo) grazie a clustering (con «kmeans» in MATLAB)</a:t>
             </a:r>
           </a:p>
           <a:p>
@@ -14233,15 +14182,7 @@
             </a:pPr>
             <a:r>
               <a:rPr lang="it-IT" dirty="0"/>
-              <a:t>Analizziamo quanto è stato efficiente il processo tramite «</a:t>
-            </a:r>
-            <a:r>
-              <a:rPr lang="it-IT" dirty="0" err="1"/>
-              <a:t>statistiche.m</a:t>
-            </a:r>
-            <a:r>
-              <a:rPr lang="it-IT" dirty="0"/>
-              <a:t>»…</a:t>
+              <a:t>Analizziamo quanto è stato efficiente il processo tramite «statistiche.m»…</a:t>
             </a:r>
           </a:p>
           <a:p>
@@ -14251,15 +14192,7 @@
             </a:pPr>
             <a:r>
               <a:rPr lang="it-IT" dirty="0"/>
-              <a:t>Visualizziamo graficamente i fenomeni grazie a «</a:t>
-            </a:r>
-            <a:r>
-              <a:rPr lang="it-IT" dirty="0" err="1"/>
-              <a:t>visualizza_dati.m</a:t>
-            </a:r>
-            <a:r>
-              <a:rPr lang="it-IT" dirty="0"/>
-              <a:t>»…</a:t>
+              <a:t>Visualizziamo graficamente i fenomeni grazie a «visualizza_dati.m»…</a:t>
             </a:r>
           </a:p>
           <a:p>
@@ -15836,15 +15769,7 @@
             </a:pPr>
             <a:r>
               <a:rPr lang="it-IT" dirty="0"/>
-              <a:t>Calcolo delle traiettorie tramite calcolo del vettore «c» (con «</a:t>
-            </a:r>
-            <a:r>
-              <a:rPr lang="it-IT" dirty="0" err="1"/>
-              <a:t>pinv</a:t>
-            </a:r>
-            <a:r>
-              <a:rPr lang="it-IT" dirty="0"/>
-              <a:t>» per SVD) e delle derivate (velocità di diffusione)</a:t>
+              <a:t>Calcolo delle traiettorie tramite calcolo del vettore «c» (con «pinv» per SVD) e delle derivate (velocità di diffusione)</a:t>
             </a:r>
           </a:p>
           <a:p>
@@ -15874,15 +15799,7 @@
             </a:pPr>
             <a:r>
               <a:rPr lang="it-IT" dirty="0"/>
-              <a:t>Costruzione della matrice di adiacenza (e di conseguenza del grafo) grazie a clustering (con «</a:t>
-            </a:r>
-            <a:r>
-              <a:rPr lang="it-IT" dirty="0" err="1"/>
-              <a:t>kmeans</a:t>
-            </a:r>
-            <a:r>
-              <a:rPr lang="it-IT" dirty="0"/>
-              <a:t>» in MATLAB)</a:t>
+              <a:t>Costruzione della matrice di adiacenza (e di conseguenza del grafo) grazie a clustering (con «kmeans» in MATLAB)</a:t>
             </a:r>
           </a:p>
           <a:p>
@@ -15902,15 +15819,7 @@
             </a:pPr>
             <a:r>
               <a:rPr lang="it-IT" dirty="0"/>
-              <a:t>Analizziamo quanto è stato efficiente il processo tramite «</a:t>
-            </a:r>
-            <a:r>
-              <a:rPr lang="it-IT" dirty="0" err="1"/>
-              <a:t>statistiche.m</a:t>
-            </a:r>
-            <a:r>
-              <a:rPr lang="it-IT" dirty="0"/>
-              <a:t>»…</a:t>
+              <a:t>Analizziamo quanto è stato efficiente il processo tramite «statistiche.m»…</a:t>
             </a:r>
           </a:p>
           <a:p>
@@ -15920,15 +15829,7 @@
             </a:pPr>
             <a:r>
               <a:rPr lang="it-IT" dirty="0"/>
-              <a:t>Visualizziamo graficamente i fenomeni grazie a «</a:t>
-            </a:r>
-            <a:r>
-              <a:rPr lang="it-IT" dirty="0" err="1"/>
-              <a:t>visualizza_dati.m</a:t>
-            </a:r>
-            <a:r>
-              <a:rPr lang="it-IT" dirty="0"/>
-              <a:t>»…</a:t>
+              <a:t>Visualizziamo graficamente i fenomeni grazie a «visualizza_dati.m»…</a:t>
             </a:r>
           </a:p>
           <a:p>
@@ -16237,19 +16138,7 @@
                   <a:rPr lang="it-IT" dirty="0">
                     <a:sym typeface="Wingdings" panose="05000000000000000000" pitchFamily="2" charset="2"/>
                   </a:rPr>
-                  <a:t>Costruzione della </a:t>
-                </a:r>
-                <a:r>
-                  <a:rPr lang="it-IT" dirty="0" err="1">
-                    <a:sym typeface="Wingdings" panose="05000000000000000000" pitchFamily="2" charset="2"/>
-                  </a:rPr>
-                  <a:t>cell</a:t>
-                </a:r>
-                <a:r>
-                  <a:rPr lang="it-IT" dirty="0">
-                    <a:sym typeface="Wingdings" panose="05000000000000000000" pitchFamily="2" charset="2"/>
-                  </a:rPr>
-                  <a:t> «</a:t>
+                  <a:t>Costruzione della cell «</a:t>
                 </a:r>
                 <a14:m>
                   <m:oMath xmlns:m="http://schemas.openxmlformats.org/officeDocument/2006/math">
@@ -16388,15 +16277,7 @@
                 </a:pPr>
                 <a:r>
                   <a:rPr lang="it-IT" dirty="0"/>
-                  <a:t>Analizziamo quanto è stato efficiente il processo tramite «</a:t>
-                </a:r>
-                <a:r>
-                  <a:rPr lang="it-IT" dirty="0" err="1"/>
-                  <a:t>statistiche.m</a:t>
-                </a:r>
-                <a:r>
-                  <a:rPr lang="it-IT" dirty="0"/>
-                  <a:t>»…</a:t>
+                  <a:t>Analizziamo quanto è stato efficiente il processo tramite «statistiche.m»…</a:t>
                 </a:r>
               </a:p>
               <a:p>
@@ -16409,15 +16290,7 @@
                 </a:pPr>
                 <a:r>
                   <a:rPr lang="it-IT" dirty="0"/>
-                  <a:t>Visualizziamo graficamente i fenomeni grazie a «</a:t>
-                </a:r>
-                <a:r>
-                  <a:rPr lang="it-IT" dirty="0" err="1"/>
-                  <a:t>visualizza_dati.m</a:t>
-                </a:r>
-                <a:r>
-                  <a:rPr lang="it-IT" dirty="0"/>
-                  <a:t>»…</a:t>
+                  <a:t>Visualizziamo graficamente i fenomeni grazie a «visualizza_dati.m»…</a:t>
                 </a:r>
               </a:p>
               <a:p>
@@ -17537,7 +17410,13 @@
   <p:cSld>
     <p:spTree>
       <p:nvGrpSpPr>
-        <p:cNvPr id="1" name=""/>
+        <p:cNvPr id="1" name="">
+          <a:extLst>
+            <a:ext uri="{FF2B5EF4-FFF2-40B4-BE49-F238E27FC236}">
+              <a16:creationId xmlns:a16="http://schemas.microsoft.com/office/drawing/2014/main" id="{350CA2DF-FFBC-A3C8-AF2C-90549E63038B}"/>
+            </a:ext>
+          </a:extLst>
+        </p:cNvPr>
         <p:cNvGrpSpPr/>
         <p:nvPr/>
       </p:nvGrpSpPr>
@@ -17554,7 +17433,7 @@
           <p:cNvPr id="2" name="Titolo 1">
             <a:extLst>
               <a:ext uri="{FF2B5EF4-FFF2-40B4-BE49-F238E27FC236}">
-                <a16:creationId xmlns:a16="http://schemas.microsoft.com/office/drawing/2014/main" id="{D1FC59F6-9B22-C211-4B4C-A2FD4B914C46}"/>
+                <a16:creationId xmlns:a16="http://schemas.microsoft.com/office/drawing/2014/main" id="{6CF8B1E2-052B-648B-1E0B-E05491B5E62D}"/>
               </a:ext>
             </a:extLst>
           </p:cNvPr>
@@ -17583,74 +17462,795 @@
             <a:pPr rtl="0"/>
             <a:r>
               <a:rPr lang="it-IT" dirty="0"/>
-              <a:t>Contesto: Laplaciano</a:t>
+              <a:t>Scopo del progetto e Laplaciano</a:t>
             </a:r>
           </a:p>
         </p:txBody>
       </p:sp>
-      <p:sp>
-        <p:nvSpPr>
-          <p:cNvPr id="4" name="Segnaposto contenuto 3">
-            <a:extLst>
-              <a:ext uri="{FF2B5EF4-FFF2-40B4-BE49-F238E27FC236}">
-                <a16:creationId xmlns:a16="http://schemas.microsoft.com/office/drawing/2014/main" id="{04304DE3-2D64-1E41-524C-88DBC9130F7B}"/>
-              </a:ext>
-            </a:extLst>
-          </p:cNvPr>
-          <p:cNvSpPr>
-            <a:spLocks noGrp="1"/>
-          </p:cNvSpPr>
-          <p:nvPr>
-            <p:ph sz="half" idx="1"/>
-          </p:nvPr>
-        </p:nvSpPr>
-        <p:spPr>
-          <a:xfrm>
-            <a:off x="550861" y="1917064"/>
-            <a:ext cx="8970211" cy="4297679"/>
-          </a:xfrm>
-        </p:spPr>
-        <p:txBody>
-          <a:bodyPr/>
-          <a:lstStyle/>
-          <a:p>
-            <a:pPr marL="285750" indent="-285750">
-              <a:buFont typeface="Arial" panose="020B0604020202020204" pitchFamily="34" charset="0"/>
-              <a:buChar char="•"/>
-            </a:pPr>
-            <a:r>
-              <a:rPr lang="it-IT" dirty="0"/>
-              <a:t>Operatore di Laplace</a:t>
-            </a:r>
-          </a:p>
-          <a:p>
-            <a:pPr marL="285750" indent="-285750">
-              <a:buFont typeface="Arial" panose="020B0604020202020204" pitchFamily="34" charset="0"/>
-              <a:buChar char="•"/>
-            </a:pPr>
-            <a:r>
-              <a:rPr lang="it-IT" dirty="0"/>
-              <a:t>Misura quanto il valore di una funzione in un punto differisce dalla media locale</a:t>
-            </a:r>
-          </a:p>
-          <a:p>
-            <a:pPr marL="285750" indent="-285750">
-              <a:buFont typeface="Arial" panose="020B0604020202020204" pitchFamily="34" charset="0"/>
-              <a:buChar char="•"/>
-            </a:pPr>
-            <a:r>
-              <a:rPr lang="it-IT" dirty="0"/>
-              <a:t>Ottima applicazione pratica: modellazione dei processi diffusivi</a:t>
-            </a:r>
-          </a:p>
-        </p:txBody>
-      </p:sp>
+      <mc:AlternateContent xmlns:mc="http://schemas.openxmlformats.org/markup-compatibility/2006">
+        <mc:Choice xmlns:a14="http://schemas.microsoft.com/office/drawing/2010/main" Requires="a14">
+          <p:sp>
+            <p:nvSpPr>
+              <p:cNvPr id="4" name="Segnaposto contenuto 3">
+                <a:extLst>
+                  <a:ext uri="{FF2B5EF4-FFF2-40B4-BE49-F238E27FC236}">
+                    <a16:creationId xmlns:a16="http://schemas.microsoft.com/office/drawing/2014/main" id="{B6A6A8E9-C260-0669-9B9C-87D9E2C4CF81}"/>
+                  </a:ext>
+                </a:extLst>
+              </p:cNvPr>
+              <p:cNvSpPr>
+                <a:spLocks noGrp="1"/>
+              </p:cNvSpPr>
+              <p:nvPr>
+                <p:ph sz="half" idx="1"/>
+              </p:nvPr>
+            </p:nvSpPr>
+            <p:spPr>
+              <a:xfrm>
+                <a:off x="550862" y="1563105"/>
+                <a:ext cx="9271564" cy="4744036"/>
+              </a:xfrm>
+            </p:spPr>
+            <p:txBody>
+              <a:bodyPr>
+                <a:normAutofit lnSpcReduction="10000"/>
+              </a:bodyPr>
+              <a:lstStyle/>
+              <a:p>
+                <a:pPr marL="285750" indent="-285750">
+                  <a:buFont typeface="Arial" panose="020B0604020202020204" pitchFamily="34" charset="0"/>
+                  <a:buChar char="•"/>
+                </a:pPr>
+                <a:r>
+                  <a:rPr lang="it-IT" dirty="0"/>
+                  <a:t>Grafo topologico: insieme finito di «nodi» e di una relazione anti riflessiva simmetrica non transitiva su di essi</a:t>
+                </a:r>
+              </a:p>
+              <a:p>
+                <a:pPr marL="285750" indent="-285750">
+                  <a:buFont typeface="Arial" panose="020B0604020202020204" pitchFamily="34" charset="0"/>
+                  <a:buChar char="•"/>
+                </a:pPr>
+                <a:r>
+                  <a:rPr lang="it-IT" dirty="0"/>
+                  <a:t>Dato un grafo di cui non si conosce la topologia, la si può dedurre attraverso le proprietà che ne descrivono il cambiamento nel tempo </a:t>
+                </a:r>
+                <a:r>
+                  <a:rPr lang="it-IT" dirty="0">
+                    <a:sym typeface="Wingdings" panose="05000000000000000000" pitchFamily="2" charset="2"/>
+                  </a:rPr>
+                  <a:t> o</a:t>
+                </a:r>
+                <a:r>
+                  <a:rPr lang="it-IT" dirty="0"/>
+                  <a:t>biettivo: risoluzione di un problema inverso</a:t>
+                </a:r>
+              </a:p>
+              <a:p>
+                <a:pPr marL="285750" indent="-285750">
+                  <a:buFont typeface="Arial" panose="020B0604020202020204" pitchFamily="34" charset="0"/>
+                  <a:buChar char="•"/>
+                </a:pPr>
+                <a:r>
+                  <a:rPr lang="it-IT" dirty="0"/>
+                  <a:t>Risoluzione tramite applicazione dell’operatore Laplaciano «L» che generalizza la derivata seconda sui grafi</a:t>
+                </a:r>
+              </a:p>
+              <a:p>
+                <a:pPr marL="285750" indent="-285750">
+                  <a:buFont typeface="Arial" panose="020B0604020202020204" pitchFamily="34" charset="0"/>
+                  <a:buChar char="•"/>
+                </a:pPr>
+                <a:r>
+                  <a:rPr lang="it-IT" dirty="0"/>
+                  <a:t>Dato </a:t>
+                </a:r>
+                <a14:m>
+                  <m:oMath xmlns:m="http://schemas.openxmlformats.org/officeDocument/2006/math">
+                    <m:r>
+                      <a:rPr lang="it-IT" i="1" dirty="0" smtClean="0">
+                        <a:latin typeface="Cambria Math" panose="02040503050406030204" pitchFamily="18" charset="0"/>
+                      </a:rPr>
+                      <m:t>𝐺</m:t>
+                    </m:r>
+                    <m:r>
+                      <a:rPr lang="it-IT" i="1" dirty="0">
+                        <a:latin typeface="Cambria Math" panose="02040503050406030204" pitchFamily="18" charset="0"/>
+                      </a:rPr>
+                      <m:t>=(</m:t>
+                    </m:r>
+                    <m:r>
+                      <a:rPr lang="it-IT" i="1" dirty="0">
+                        <a:latin typeface="Cambria Math" panose="02040503050406030204" pitchFamily="18" charset="0"/>
+                      </a:rPr>
+                      <m:t>𝑉</m:t>
+                    </m:r>
+                    <m:r>
+                      <a:rPr lang="it-IT" i="1" dirty="0">
+                        <a:latin typeface="Cambria Math" panose="02040503050406030204" pitchFamily="18" charset="0"/>
+                      </a:rPr>
+                      <m:t>, </m:t>
+                    </m:r>
+                    <m:r>
+                      <a:rPr lang="it-IT" i="1" dirty="0">
+                        <a:latin typeface="Cambria Math" panose="02040503050406030204" pitchFamily="18" charset="0"/>
+                      </a:rPr>
+                      <m:t>𝐸</m:t>
+                    </m:r>
+                    <m:r>
+                      <a:rPr lang="it-IT" i="1" dirty="0">
+                        <a:latin typeface="Cambria Math" panose="02040503050406030204" pitchFamily="18" charset="0"/>
+                      </a:rPr>
+                      <m:t>)</m:t>
+                    </m:r>
+                  </m:oMath>
+                </a14:m>
+                <a:r>
+                  <a:rPr lang="it-IT" dirty="0"/>
+                  <a:t> con </a:t>
+                </a:r>
+                <a14:m>
+                  <m:oMath xmlns:m="http://schemas.openxmlformats.org/officeDocument/2006/math">
+                    <m:r>
+                      <a:rPr lang="it-IT" i="1" dirty="0" smtClean="0">
+                        <a:latin typeface="Cambria Math" panose="02040503050406030204" pitchFamily="18" charset="0"/>
+                      </a:rPr>
+                      <m:t>𝑚</m:t>
+                    </m:r>
+                  </m:oMath>
+                </a14:m>
+                <a:r>
+                  <a:rPr lang="it-IT" dirty="0"/>
+                  <a:t> nodi, </a:t>
+                </a:r>
+                <a14:m>
+                  <m:oMath xmlns:m="http://schemas.openxmlformats.org/officeDocument/2006/math">
+                    <m:r>
+                      <a:rPr lang="it-IT" i="1" dirty="0" smtClean="0">
+                        <a:latin typeface="Cambria Math" panose="02040503050406030204" pitchFamily="18" charset="0"/>
+                      </a:rPr>
+                      <m:t>𝐿</m:t>
+                    </m:r>
+                    <m:r>
+                      <a:rPr lang="it-IT" i="1" dirty="0" smtClean="0">
+                        <a:latin typeface="Cambria Math" panose="02040503050406030204" pitchFamily="18" charset="0"/>
+                      </a:rPr>
+                      <m:t> = </m:t>
+                    </m:r>
+                    <m:r>
+                      <a:rPr lang="it-IT" i="1" dirty="0" smtClean="0">
+                        <a:latin typeface="Cambria Math" panose="02040503050406030204" pitchFamily="18" charset="0"/>
+                      </a:rPr>
+                      <m:t>𝐷</m:t>
+                    </m:r>
+                    <m:r>
+                      <a:rPr lang="it-IT" i="1" dirty="0" smtClean="0">
+                        <a:latin typeface="Cambria Math" panose="02040503050406030204" pitchFamily="18" charset="0"/>
+                      </a:rPr>
+                      <m:t> − </m:t>
+                    </m:r>
+                    <m:r>
+                      <a:rPr lang="it-IT" i="1" dirty="0" smtClean="0">
+                        <a:latin typeface="Cambria Math" panose="02040503050406030204" pitchFamily="18" charset="0"/>
+                      </a:rPr>
+                      <m:t>𝐴</m:t>
+                    </m:r>
+                    <m:r>
+                      <a:rPr lang="it-IT" b="0" i="1" dirty="0" smtClean="0">
+                        <a:latin typeface="Cambria Math" panose="02040503050406030204" pitchFamily="18" charset="0"/>
+                      </a:rPr>
+                      <m:t>,</m:t>
+                    </m:r>
+                  </m:oMath>
+                </a14:m>
+                <a:r>
+                  <a:rPr lang="it-IT" dirty="0"/>
+                  <a:t> dove «A» è la matrice delle adiacenze e «D» la matrice dei gradi</a:t>
+                </a:r>
+              </a:p>
+              <a:p>
+                <a:pPr marL="285750" indent="-285750">
+                  <a:buFont typeface="Arial" panose="020B0604020202020204" pitchFamily="34" charset="0"/>
+                  <a:buChar char="•"/>
+                </a:pPr>
+                <a:r>
+                  <a:rPr lang="it-IT" dirty="0"/>
+                  <a:t>Per una funzione </a:t>
+                </a:r>
+                <a14:m>
+                  <m:oMath xmlns:m="http://schemas.openxmlformats.org/officeDocument/2006/math">
+                    <m:r>
+                      <a:rPr lang="it-IT" i="1" dirty="0" smtClean="0">
+                        <a:latin typeface="Cambria Math" panose="02040503050406030204" pitchFamily="18" charset="0"/>
+                      </a:rPr>
+                      <m:t>𝑢</m:t>
+                    </m:r>
+                    <m:r>
+                      <a:rPr lang="it-IT" i="1" dirty="0" smtClean="0">
+                        <a:latin typeface="Cambria Math" panose="02040503050406030204" pitchFamily="18" charset="0"/>
+                      </a:rPr>
+                      <m:t>:</m:t>
+                    </m:r>
+                    <m:r>
+                      <a:rPr lang="it-IT" i="1" dirty="0" smtClean="0">
+                        <a:latin typeface="Cambria Math" panose="02040503050406030204" pitchFamily="18" charset="0"/>
+                      </a:rPr>
+                      <m:t>𝑉</m:t>
+                    </m:r>
+                    <m:r>
+                      <a:rPr lang="it-IT" i="1" dirty="0" smtClean="0">
+                        <a:latin typeface="Cambria Math" panose="02040503050406030204" pitchFamily="18" charset="0"/>
+                      </a:rPr>
+                      <m:t>→</m:t>
+                    </m:r>
+                    <m:r>
+                      <a:rPr lang="it-IT" i="1" dirty="0" smtClean="0">
+                        <a:latin typeface="Cambria Math" panose="02040503050406030204" pitchFamily="18" charset="0"/>
+                      </a:rPr>
+                      <m:t>𝑅</m:t>
+                    </m:r>
+                  </m:oMath>
+                </a14:m>
+                <a:r>
+                  <a:rPr lang="it-IT" dirty="0"/>
+                  <a:t> sui nodi, l’operatore Laplaciano </a:t>
+                </a:r>
+                <a14:m>
+                  <m:oMath xmlns:m="http://schemas.openxmlformats.org/officeDocument/2006/math">
+                    <m:sSub>
+                      <m:sSubPr>
+                        <m:ctrlPr>
+                          <a:rPr lang="it-IT" i="1">
+                            <a:latin typeface="Cambria Math" panose="02040503050406030204" pitchFamily="18" charset="0"/>
+                            <a:ea typeface="Cambria" panose="02040503050406030204" pitchFamily="18" charset="0"/>
+                          </a:rPr>
+                        </m:ctrlPr>
+                      </m:sSubPr>
+                      <m:e>
+                        <m:r>
+                          <a:rPr lang="it-IT" i="1">
+                            <a:latin typeface="Cambria Math" panose="02040503050406030204" pitchFamily="18" charset="0"/>
+                            <a:ea typeface="Cambria" panose="02040503050406030204" pitchFamily="18" charset="0"/>
+                          </a:rPr>
+                          <m:t>(</m:t>
+                        </m:r>
+                        <m:r>
+                          <a:rPr lang="it-IT" i="1">
+                            <a:latin typeface="Cambria Math" panose="02040503050406030204" pitchFamily="18" charset="0"/>
+                            <a:ea typeface="Cambria" panose="02040503050406030204" pitchFamily="18" charset="0"/>
+                          </a:rPr>
+                          <m:t>𝐿𝑢</m:t>
+                        </m:r>
+                        <m:r>
+                          <a:rPr lang="it-IT" i="1">
+                            <a:latin typeface="Cambria Math" panose="02040503050406030204" pitchFamily="18" charset="0"/>
+                            <a:ea typeface="Cambria" panose="02040503050406030204" pitchFamily="18" charset="0"/>
+                          </a:rPr>
+                          <m:t>)</m:t>
+                        </m:r>
+                      </m:e>
+                      <m:sub>
+                        <m:r>
+                          <a:rPr lang="it-IT" i="1">
+                            <a:latin typeface="Cambria Math" panose="02040503050406030204" pitchFamily="18" charset="0"/>
+                            <a:ea typeface="Cambria" panose="02040503050406030204" pitchFamily="18" charset="0"/>
+                          </a:rPr>
+                          <m:t>𝑖</m:t>
+                        </m:r>
+                      </m:sub>
+                    </m:sSub>
+                    <m:r>
+                      <a:rPr lang="it-IT" i="1">
+                        <a:latin typeface="Cambria Math" panose="02040503050406030204" pitchFamily="18" charset="0"/>
+                        <a:ea typeface="Cambria" panose="02040503050406030204" pitchFamily="18" charset="0"/>
+                      </a:rPr>
+                      <m:t>=</m:t>
+                    </m:r>
+                    <m:sSub>
+                      <m:sSubPr>
+                        <m:ctrlPr>
+                          <a:rPr lang="it-IT" i="1">
+                            <a:latin typeface="Cambria Math" panose="02040503050406030204" pitchFamily="18" charset="0"/>
+                            <a:ea typeface="Cambria" panose="02040503050406030204" pitchFamily="18" charset="0"/>
+                          </a:rPr>
+                        </m:ctrlPr>
+                      </m:sSubPr>
+                      <m:e>
+                        <m:r>
+                          <a:rPr lang="it-IT" i="1">
+                            <a:latin typeface="Cambria Math" panose="02040503050406030204" pitchFamily="18" charset="0"/>
+                            <a:ea typeface="Cambria" panose="02040503050406030204" pitchFamily="18" charset="0"/>
+                          </a:rPr>
+                          <m:t>𝑑𝑒𝑔</m:t>
+                        </m:r>
+                        <m:r>
+                          <a:rPr lang="it-IT" i="1">
+                            <a:latin typeface="Cambria Math" panose="02040503050406030204" pitchFamily="18" charset="0"/>
+                            <a:ea typeface="Cambria" panose="02040503050406030204" pitchFamily="18" charset="0"/>
+                          </a:rPr>
+                          <m:t>(</m:t>
+                        </m:r>
+                        <m:r>
+                          <a:rPr lang="it-IT" i="1">
+                            <a:latin typeface="Cambria Math" panose="02040503050406030204" pitchFamily="18" charset="0"/>
+                            <a:ea typeface="Cambria" panose="02040503050406030204" pitchFamily="18" charset="0"/>
+                          </a:rPr>
+                          <m:t>𝑖</m:t>
+                        </m:r>
+                        <m:r>
+                          <a:rPr lang="it-IT" i="1">
+                            <a:latin typeface="Cambria Math" panose="02040503050406030204" pitchFamily="18" charset="0"/>
+                            <a:ea typeface="Cambria" panose="02040503050406030204" pitchFamily="18" charset="0"/>
+                          </a:rPr>
+                          <m:t>)</m:t>
+                        </m:r>
+                      </m:e>
+                      <m:sub>
+                        <m:sSub>
+                          <m:sSubPr>
+                            <m:ctrlPr>
+                              <a:rPr lang="it-IT" b="0" i="1" smtClean="0">
+                                <a:latin typeface="Cambria Math" panose="02040503050406030204" pitchFamily="18" charset="0"/>
+                                <a:ea typeface="Cambria" panose="02040503050406030204" pitchFamily="18" charset="0"/>
+                              </a:rPr>
+                            </m:ctrlPr>
+                          </m:sSubPr>
+                          <m:e>
+                            <m:r>
+                              <a:rPr lang="it-IT" i="1">
+                                <a:latin typeface="Cambria Math" panose="02040503050406030204" pitchFamily="18" charset="0"/>
+                                <a:ea typeface="Cambria" panose="02040503050406030204" pitchFamily="18" charset="0"/>
+                              </a:rPr>
+                              <m:t>𝑢</m:t>
+                            </m:r>
+                          </m:e>
+                          <m:sub>
+                            <m:r>
+                              <a:rPr lang="it-IT" i="1">
+                                <a:latin typeface="Cambria Math" panose="02040503050406030204" pitchFamily="18" charset="0"/>
+                                <a:ea typeface="Cambria" panose="02040503050406030204" pitchFamily="18" charset="0"/>
+                              </a:rPr>
+                              <m:t>𝑖</m:t>
+                            </m:r>
+                          </m:sub>
+                        </m:sSub>
+                      </m:sub>
+                    </m:sSub>
+                    <m:r>
+                      <a:rPr lang="it-IT" i="1">
+                        <a:latin typeface="Cambria Math" panose="02040503050406030204" pitchFamily="18" charset="0"/>
+                        <a:ea typeface="Cambria" panose="02040503050406030204" pitchFamily="18" charset="0"/>
+                      </a:rPr>
+                      <m:t>−</m:t>
+                    </m:r>
+                    <m:nary>
+                      <m:naryPr>
+                        <m:chr m:val="∑"/>
+                        <m:supHide m:val="on"/>
+                        <m:ctrlPr>
+                          <a:rPr lang="it-IT" i="1">
+                            <a:latin typeface="Cambria Math" panose="02040503050406030204" pitchFamily="18" charset="0"/>
+                            <a:ea typeface="Cambria" panose="02040503050406030204" pitchFamily="18" charset="0"/>
+                          </a:rPr>
+                        </m:ctrlPr>
+                      </m:naryPr>
+                      <m:sub>
+                        <m:r>
+                          <m:rPr>
+                            <m:brk m:alnAt="7"/>
+                          </m:rPr>
+                          <a:rPr lang="it-IT" i="1">
+                            <a:latin typeface="Cambria Math" panose="02040503050406030204" pitchFamily="18" charset="0"/>
+                            <a:ea typeface="Cambria" panose="02040503050406030204" pitchFamily="18" charset="0"/>
+                          </a:rPr>
+                          <m:t>𝑖</m:t>
+                        </m:r>
+                        <m:r>
+                          <a:rPr lang="it-IT" i="1">
+                            <a:latin typeface="Cambria Math" panose="02040503050406030204" pitchFamily="18" charset="0"/>
+                            <a:ea typeface="Cambria Math" panose="02040503050406030204" pitchFamily="18" charset="0"/>
+                          </a:rPr>
+                          <m:t>~</m:t>
+                        </m:r>
+                        <m:r>
+                          <a:rPr lang="it-IT" i="1">
+                            <a:latin typeface="Cambria Math" panose="02040503050406030204" pitchFamily="18" charset="0"/>
+                            <a:ea typeface="Cambria Math" panose="02040503050406030204" pitchFamily="18" charset="0"/>
+                          </a:rPr>
+                          <m:t>𝑗</m:t>
+                        </m:r>
+                      </m:sub>
+                      <m:sup/>
+                      <m:e>
+                        <m:sSub>
+                          <m:sSubPr>
+                            <m:ctrlPr>
+                              <a:rPr lang="it-IT" b="0" i="1" smtClean="0">
+                                <a:latin typeface="Cambria Math" panose="02040503050406030204" pitchFamily="18" charset="0"/>
+                                <a:ea typeface="Cambria" panose="02040503050406030204" pitchFamily="18" charset="0"/>
+                              </a:rPr>
+                            </m:ctrlPr>
+                          </m:sSubPr>
+                          <m:e>
+                            <m:r>
+                              <a:rPr lang="it-IT" i="1">
+                                <a:latin typeface="Cambria Math" panose="02040503050406030204" pitchFamily="18" charset="0"/>
+                                <a:ea typeface="Cambria" panose="02040503050406030204" pitchFamily="18" charset="0"/>
+                              </a:rPr>
+                              <m:t>𝑢</m:t>
+                            </m:r>
+                          </m:e>
+                          <m:sub>
+                            <m:r>
+                              <a:rPr lang="it-IT" i="1">
+                                <a:latin typeface="Cambria Math" panose="02040503050406030204" pitchFamily="18" charset="0"/>
+                                <a:ea typeface="Cambria" panose="02040503050406030204" pitchFamily="18" charset="0"/>
+                              </a:rPr>
+                              <m:t>𝑗</m:t>
+                            </m:r>
+                          </m:sub>
+                        </m:sSub>
+                      </m:e>
+                    </m:nary>
+                    <m:r>
+                      <a:rPr lang="it-IT" i="1">
+                        <a:latin typeface="Cambria Math" panose="02040503050406030204" pitchFamily="18" charset="0"/>
+                        <a:ea typeface="Cambria" panose="02040503050406030204" pitchFamily="18" charset="0"/>
+                      </a:rPr>
+                      <m:t>=</m:t>
+                    </m:r>
+                    <m:nary>
+                      <m:naryPr>
+                        <m:chr m:val="∑"/>
+                        <m:supHide m:val="on"/>
+                        <m:ctrlPr>
+                          <a:rPr lang="it-IT" i="1">
+                            <a:latin typeface="Cambria Math" panose="02040503050406030204" pitchFamily="18" charset="0"/>
+                            <a:ea typeface="Cambria" panose="02040503050406030204" pitchFamily="18" charset="0"/>
+                          </a:rPr>
+                        </m:ctrlPr>
+                      </m:naryPr>
+                      <m:sub>
+                        <m:r>
+                          <m:rPr>
+                            <m:brk m:alnAt="7"/>
+                          </m:rPr>
+                          <a:rPr lang="it-IT" i="1">
+                            <a:latin typeface="Cambria Math" panose="02040503050406030204" pitchFamily="18" charset="0"/>
+                            <a:ea typeface="Cambria" panose="02040503050406030204" pitchFamily="18" charset="0"/>
+                          </a:rPr>
+                          <m:t>𝑗</m:t>
+                        </m:r>
+                        <m:r>
+                          <a:rPr lang="it-IT" i="1">
+                            <a:latin typeface="Cambria Math" panose="02040503050406030204" pitchFamily="18" charset="0"/>
+                            <a:ea typeface="Cambria Math" panose="02040503050406030204" pitchFamily="18" charset="0"/>
+                          </a:rPr>
+                          <m:t>~</m:t>
+                        </m:r>
+                        <m:r>
+                          <a:rPr lang="it-IT" i="1">
+                            <a:latin typeface="Cambria Math" panose="02040503050406030204" pitchFamily="18" charset="0"/>
+                            <a:ea typeface="Cambria Math" panose="02040503050406030204" pitchFamily="18" charset="0"/>
+                          </a:rPr>
+                          <m:t>𝑖</m:t>
+                        </m:r>
+                      </m:sub>
+                      <m:sup/>
+                      <m:e>
+                        <m:r>
+                          <a:rPr lang="it-IT" i="1">
+                            <a:latin typeface="Cambria Math" panose="02040503050406030204" pitchFamily="18" charset="0"/>
+                            <a:ea typeface="Cambria" panose="02040503050406030204" pitchFamily="18" charset="0"/>
+                          </a:rPr>
+                          <m:t>(</m:t>
+                        </m:r>
+                        <m:sSub>
+                          <m:sSubPr>
+                            <m:ctrlPr>
+                              <a:rPr lang="it-IT" b="0" i="1" smtClean="0">
+                                <a:latin typeface="Cambria Math" panose="02040503050406030204" pitchFamily="18" charset="0"/>
+                                <a:ea typeface="Cambria" panose="02040503050406030204" pitchFamily="18" charset="0"/>
+                              </a:rPr>
+                            </m:ctrlPr>
+                          </m:sSubPr>
+                          <m:e>
+                            <m:r>
+                              <a:rPr lang="it-IT" i="1">
+                                <a:latin typeface="Cambria Math" panose="02040503050406030204" pitchFamily="18" charset="0"/>
+                                <a:ea typeface="Cambria" panose="02040503050406030204" pitchFamily="18" charset="0"/>
+                              </a:rPr>
+                              <m:t>𝑢</m:t>
+                            </m:r>
+                          </m:e>
+                          <m:sub>
+                            <m:r>
+                              <a:rPr lang="it-IT" i="1">
+                                <a:latin typeface="Cambria Math" panose="02040503050406030204" pitchFamily="18" charset="0"/>
+                                <a:ea typeface="Cambria" panose="02040503050406030204" pitchFamily="18" charset="0"/>
+                              </a:rPr>
+                              <m:t>𝑖</m:t>
+                            </m:r>
+                          </m:sub>
+                        </m:sSub>
+                        <m:r>
+                          <a:rPr lang="it-IT" i="1">
+                            <a:latin typeface="Cambria Math" panose="02040503050406030204" pitchFamily="18" charset="0"/>
+                            <a:ea typeface="Cambria" panose="02040503050406030204" pitchFamily="18" charset="0"/>
+                          </a:rPr>
+                          <m:t>−</m:t>
+                        </m:r>
+                        <m:sSub>
+                          <m:sSubPr>
+                            <m:ctrlPr>
+                              <a:rPr lang="it-IT" b="0" i="1" smtClean="0">
+                                <a:latin typeface="Cambria Math" panose="02040503050406030204" pitchFamily="18" charset="0"/>
+                                <a:ea typeface="Cambria" panose="02040503050406030204" pitchFamily="18" charset="0"/>
+                              </a:rPr>
+                            </m:ctrlPr>
+                          </m:sSubPr>
+                          <m:e>
+                            <m:r>
+                              <a:rPr lang="it-IT" i="1">
+                                <a:latin typeface="Cambria Math" panose="02040503050406030204" pitchFamily="18" charset="0"/>
+                                <a:ea typeface="Cambria" panose="02040503050406030204" pitchFamily="18" charset="0"/>
+                              </a:rPr>
+                              <m:t>𝑢</m:t>
+                            </m:r>
+                          </m:e>
+                          <m:sub>
+                            <m:r>
+                              <a:rPr lang="it-IT" i="1">
+                                <a:latin typeface="Cambria Math" panose="02040503050406030204" pitchFamily="18" charset="0"/>
+                                <a:ea typeface="Cambria" panose="02040503050406030204" pitchFamily="18" charset="0"/>
+                              </a:rPr>
+                              <m:t>𝑗</m:t>
+                            </m:r>
+                          </m:sub>
+                        </m:sSub>
+                        <m:r>
+                          <a:rPr lang="it-IT" i="1">
+                            <a:latin typeface="Cambria Math" panose="02040503050406030204" pitchFamily="18" charset="0"/>
+                            <a:ea typeface="Cambria" panose="02040503050406030204" pitchFamily="18" charset="0"/>
+                          </a:rPr>
+                          <m:t>)</m:t>
+                        </m:r>
+                      </m:e>
+                    </m:nary>
+                  </m:oMath>
+                </a14:m>
+                <a:r>
+                  <a:rPr lang="it-IT" i="1" dirty="0"/>
+                  <a:t> </a:t>
+                </a:r>
+                <a:r>
+                  <a:rPr lang="it-IT" dirty="0"/>
+                  <a:t>quantifica lo squilibrio tra </a:t>
+                </a:r>
+                <a14:m>
+                  <m:oMath xmlns:m="http://schemas.openxmlformats.org/officeDocument/2006/math">
+                    <m:sSub>
+                      <m:sSubPr>
+                        <m:ctrlPr>
+                          <a:rPr lang="it-IT" b="0" i="1" dirty="0" smtClean="0">
+                            <a:latin typeface="Cambria Math" panose="02040503050406030204" pitchFamily="18" charset="0"/>
+                          </a:rPr>
+                        </m:ctrlPr>
+                      </m:sSubPr>
+                      <m:e>
+                        <m:r>
+                          <a:rPr lang="it-IT" i="1" dirty="0" smtClean="0">
+                            <a:latin typeface="Cambria Math" panose="02040503050406030204" pitchFamily="18" charset="0"/>
+                          </a:rPr>
+                          <m:t>𝑢</m:t>
+                        </m:r>
+                      </m:e>
+                      <m:sub>
+                        <m:r>
+                          <a:rPr lang="it-IT" i="1" dirty="0" smtClean="0">
+                            <a:latin typeface="Cambria Math" panose="02040503050406030204" pitchFamily="18" charset="0"/>
+                          </a:rPr>
+                          <m:t>𝑖</m:t>
+                        </m:r>
+                      </m:sub>
+                    </m:sSub>
+                  </m:oMath>
+                </a14:m>
+                <a:r>
+                  <a:rPr lang="it-IT" dirty="0"/>
+                  <a:t> ed i suoi vicini</a:t>
+                </a:r>
+              </a:p>
+              <a:p>
+                <a:pPr marL="285750" indent="-285750">
+                  <a:buFont typeface="Arial" panose="020B0604020202020204" pitchFamily="34" charset="0"/>
+                  <a:buChar char="•"/>
+                </a:pPr>
+                <a:r>
+                  <a:rPr lang="it-IT" dirty="0"/>
+                  <a:t>Se </a:t>
+                </a:r>
+                <a14:m>
+                  <m:oMath xmlns:m="http://schemas.openxmlformats.org/officeDocument/2006/math">
+                    <m:sSub>
+                      <m:sSubPr>
+                        <m:ctrlPr>
+                          <a:rPr lang="it-IT" b="0" i="1" dirty="0" smtClean="0">
+                            <a:latin typeface="Cambria Math" panose="02040503050406030204" pitchFamily="18" charset="0"/>
+                          </a:rPr>
+                        </m:ctrlPr>
+                      </m:sSubPr>
+                      <m:e>
+                        <m:d>
+                          <m:dPr>
+                            <m:ctrlPr>
+                              <a:rPr lang="it-IT" i="1" dirty="0" smtClean="0">
+                                <a:latin typeface="Cambria Math" panose="02040503050406030204" pitchFamily="18" charset="0"/>
+                              </a:rPr>
+                            </m:ctrlPr>
+                          </m:dPr>
+                          <m:e>
+                            <m:r>
+                              <a:rPr lang="it-IT" i="1" dirty="0" smtClean="0">
+                                <a:latin typeface="Cambria Math" panose="02040503050406030204" pitchFamily="18" charset="0"/>
+                              </a:rPr>
+                              <m:t>𝐿𝑢</m:t>
+                            </m:r>
+                          </m:e>
+                        </m:d>
+                      </m:e>
+                      <m:sub>
+                        <m:r>
+                          <a:rPr lang="it-IT" i="1" dirty="0" smtClean="0">
+                            <a:latin typeface="Cambria Math" panose="02040503050406030204" pitchFamily="18" charset="0"/>
+                          </a:rPr>
+                          <m:t>𝑖</m:t>
+                        </m:r>
+                      </m:sub>
+                    </m:sSub>
+                    <m:r>
+                      <a:rPr lang="it-IT" i="1" dirty="0" smtClean="0">
+                        <a:latin typeface="Cambria Math" panose="02040503050406030204" pitchFamily="18" charset="0"/>
+                      </a:rPr>
+                      <m:t>&gt;0</m:t>
+                    </m:r>
+                  </m:oMath>
+                </a14:m>
+                <a:r>
+                  <a:rPr lang="it-IT" dirty="0"/>
+                  <a:t> allora </a:t>
+                </a:r>
+                <a14:m>
+                  <m:oMath xmlns:m="http://schemas.openxmlformats.org/officeDocument/2006/math">
+                    <m:sSub>
+                      <m:sSubPr>
+                        <m:ctrlPr>
+                          <a:rPr lang="it-IT" b="0" i="1" smtClean="0">
+                            <a:latin typeface="Cambria Math" panose="02040503050406030204" pitchFamily="18" charset="0"/>
+                          </a:rPr>
+                        </m:ctrlPr>
+                      </m:sSubPr>
+                      <m:e>
+                        <m:r>
+                          <a:rPr lang="it-IT" b="0" i="1" smtClean="0">
+                            <a:latin typeface="Cambria Math" panose="02040503050406030204" pitchFamily="18" charset="0"/>
+                          </a:rPr>
+                          <m:t>𝑢</m:t>
+                        </m:r>
+                      </m:e>
+                      <m:sub>
+                        <m:r>
+                          <a:rPr lang="it-IT" b="0" i="1" smtClean="0">
+                            <a:latin typeface="Cambria Math" panose="02040503050406030204" pitchFamily="18" charset="0"/>
+                          </a:rPr>
+                          <m:t>𝑖</m:t>
+                        </m:r>
+                      </m:sub>
+                    </m:sSub>
+                  </m:oMath>
+                </a14:m>
+                <a:r>
+                  <a:rPr lang="it-IT" dirty="0"/>
+                  <a:t> è maggiore della sua media locale, e la diffusione farà diminuire </a:t>
+                </a:r>
+                <a14:m>
+                  <m:oMath xmlns:m="http://schemas.openxmlformats.org/officeDocument/2006/math">
+                    <m:sSub>
+                      <m:sSubPr>
+                        <m:ctrlPr>
+                          <a:rPr lang="it-IT" i="1">
+                            <a:latin typeface="Cambria Math" panose="02040503050406030204" pitchFamily="18" charset="0"/>
+                          </a:rPr>
+                        </m:ctrlPr>
+                      </m:sSubPr>
+                      <m:e>
+                        <m:r>
+                          <a:rPr lang="it-IT" i="1">
+                            <a:latin typeface="Cambria Math" panose="02040503050406030204" pitchFamily="18" charset="0"/>
+                          </a:rPr>
+                          <m:t>𝑢</m:t>
+                        </m:r>
+                      </m:e>
+                      <m:sub>
+                        <m:r>
+                          <a:rPr lang="it-IT" i="1">
+                            <a:latin typeface="Cambria Math" panose="02040503050406030204" pitchFamily="18" charset="0"/>
+                          </a:rPr>
+                          <m:t>𝑖</m:t>
+                        </m:r>
+                      </m:sub>
+                    </m:sSub>
+                  </m:oMath>
+                </a14:m>
+                <a:r>
+                  <a:rPr lang="it-IT" dirty="0"/>
+                  <a:t>, l’opposto per </a:t>
+                </a:r>
+                <a14:m>
+                  <m:oMath xmlns:m="http://schemas.openxmlformats.org/officeDocument/2006/math">
+                    <m:r>
+                      <a:rPr lang="it-IT" i="1" dirty="0" smtClean="0">
+                        <a:latin typeface="Cambria Math" panose="02040503050406030204" pitchFamily="18" charset="0"/>
+                      </a:rPr>
+                      <m:t>&lt; 0</m:t>
+                    </m:r>
+                  </m:oMath>
+                </a14:m>
+                <a:endParaRPr lang="it-IT" dirty="0"/>
+              </a:p>
+            </p:txBody>
+          </p:sp>
+        </mc:Choice>
+        <mc:Fallback>
+          <p:sp>
+            <p:nvSpPr>
+              <p:cNvPr id="4" name="Segnaposto contenuto 3">
+                <a:extLst>
+                  <a:ext uri="{FF2B5EF4-FFF2-40B4-BE49-F238E27FC236}">
+                    <a16:creationId xmlns:a16="http://schemas.microsoft.com/office/drawing/2014/main" id="{B6A6A8E9-C260-0669-9B9C-87D9E2C4CF81}"/>
+                  </a:ext>
+                </a:extLst>
+              </p:cNvPr>
+              <p:cNvSpPr>
+                <a:spLocks noGrp="1" noRot="1" noChangeAspect="1" noMove="1" noResize="1" noEditPoints="1" noAdjustHandles="1" noChangeArrowheads="1" noChangeShapeType="1" noTextEdit="1"/>
+              </p:cNvSpPr>
+              <p:nvPr>
+                <p:ph sz="half" idx="1"/>
+              </p:nvPr>
+            </p:nvSpPr>
+            <p:spPr>
+              <a:xfrm>
+                <a:off x="550862" y="1563105"/>
+                <a:ext cx="9271564" cy="4744036"/>
+              </a:xfrm>
+              <a:blipFill>
+                <a:blip r:embed="rId3"/>
+                <a:stretch>
+                  <a:fillRect l="-1512" t="-1669" r="-1512"/>
+                </a:stretch>
+              </a:blipFill>
+            </p:spPr>
+            <p:txBody>
+              <a:bodyPr/>
+              <a:lstStyle/>
+              <a:p>
+                <a:r>
+                  <a:rPr lang="it-IT">
+                    <a:noFill/>
+                  </a:rPr>
+                  <a:t> </a:t>
+                </a:r>
+              </a:p>
+            </p:txBody>
+          </p:sp>
+        </mc:Fallback>
+      </mc:AlternateContent>
       <p:pic>
         <p:nvPicPr>
           <p:cNvPr id="10" name="Immagine 9" descr="Immagine che contiene schizzo, arte, disegno, cerchio&#10;&#10;Il contenuto generato dall'IA potrebbe non essere corretto.">
             <a:extLst>
               <a:ext uri="{FF2B5EF4-FFF2-40B4-BE49-F238E27FC236}">
-                <a16:creationId xmlns:a16="http://schemas.microsoft.com/office/drawing/2014/main" id="{37897BD6-1596-87E5-7571-53666B6A3733}"/>
+                <a16:creationId xmlns:a16="http://schemas.microsoft.com/office/drawing/2014/main" id="{EBFF7E77-974F-1E39-7C27-7CF2EEC8DD00}"/>
               </a:ext>
             </a:extLst>
           </p:cNvPr>
@@ -17660,7 +18260,7 @@
           <p:nvPr/>
         </p:nvPicPr>
         <p:blipFill>
-          <a:blip r:embed="rId3">
+          <a:blip r:embed="rId4">
             <a:alphaModFix amt="38000"/>
             <a:extLst>
               <a:ext uri="{28A0092B-C50C-407E-A947-70E740481C1C}">
@@ -17688,7 +18288,7 @@
           <p:cNvPr id="11" name="Segnaposto numero diapositiva 10">
             <a:extLst>
               <a:ext uri="{FF2B5EF4-FFF2-40B4-BE49-F238E27FC236}">
-                <a16:creationId xmlns:a16="http://schemas.microsoft.com/office/drawing/2014/main" id="{7E3B276A-DEA6-5CE5-834D-C818409F5246}"/>
+                <a16:creationId xmlns:a16="http://schemas.microsoft.com/office/drawing/2014/main" id="{3BC72612-C699-7E27-2D06-64E43713FF51}"/>
               </a:ext>
             </a:extLst>
           </p:cNvPr>
@@ -17713,608 +18313,45 @@
           </a:p>
         </p:txBody>
       </p:sp>
-      <mc:AlternateContent xmlns:mc="http://schemas.openxmlformats.org/markup-compatibility/2006" xmlns:a14="http://schemas.microsoft.com/office/drawing/2010/main">
-        <mc:Choice Requires="a14">
-          <p:sp>
-            <p:nvSpPr>
-              <p:cNvPr id="14" name="CasellaDiTesto 13">
-                <a:extLst>
-                  <a:ext uri="{FF2B5EF4-FFF2-40B4-BE49-F238E27FC236}">
-                    <a16:creationId xmlns:a16="http://schemas.microsoft.com/office/drawing/2014/main" id="{DF14A0A3-5DD1-117F-66FD-C4A6E63B1429}"/>
-                  </a:ext>
-                </a:extLst>
-              </p:cNvPr>
-              <p:cNvSpPr txBox="1"/>
-              <p:nvPr/>
-            </p:nvSpPr>
-            <p:spPr>
-              <a:xfrm>
-                <a:off x="641023" y="4531269"/>
-                <a:ext cx="3285578" cy="1098891"/>
-              </a:xfrm>
-              <a:prstGeom prst="rect">
-                <a:avLst/>
-              </a:prstGeom>
-              <a:noFill/>
-            </p:spPr>
-            <p:txBody>
-              <a:bodyPr wrap="none" rtlCol="0">
-                <a:spAutoFit/>
-              </a:bodyPr>
-              <a:lstStyle/>
-              <a:p>
-                <a:pPr/>
-                <a14:m>
-                  <m:oMathPara xmlns:m="http://schemas.openxmlformats.org/officeDocument/2006/math">
-                    <m:oMathParaPr>
-                      <m:jc m:val="centerGroup"/>
-                    </m:oMathParaPr>
-                    <m:oMath xmlns:m="http://schemas.openxmlformats.org/officeDocument/2006/math">
-                      <m:r>
-                        <a:rPr lang="el-GR" sz="2400" b="0" i="1" smtClean="0">
-                          <a:latin typeface="Cambria Math" panose="02040503050406030204" pitchFamily="18" charset="0"/>
-                          <a:ea typeface="Cambria Math" panose="02040503050406030204" pitchFamily="18" charset="0"/>
-                        </a:rPr>
-                        <m:t>𝛥</m:t>
-                      </m:r>
-                      <m:r>
-                        <a:rPr lang="it-IT" sz="2400" b="0" i="1" smtClean="0">
-                          <a:latin typeface="Cambria Math" panose="02040503050406030204" pitchFamily="18" charset="0"/>
-                          <a:ea typeface="Cambria Math" panose="02040503050406030204" pitchFamily="18" charset="0"/>
-                        </a:rPr>
-                        <m:t>𝑓</m:t>
-                      </m:r>
-                      <m:d>
-                        <m:dPr>
-                          <m:ctrlPr>
-                            <a:rPr lang="it-IT" sz="2400" i="1" smtClean="0">
-                              <a:latin typeface="Cambria Math" panose="02040503050406030204" pitchFamily="18" charset="0"/>
-                              <a:ea typeface="Cambria Math" panose="02040503050406030204" pitchFamily="18" charset="0"/>
-                            </a:rPr>
-                          </m:ctrlPr>
-                        </m:dPr>
-                        <m:e>
-                          <m:r>
-                            <a:rPr lang="it-IT" sz="2400" b="0" i="1" smtClean="0">
-                              <a:latin typeface="Cambria Math" panose="02040503050406030204" pitchFamily="18" charset="0"/>
-                              <a:ea typeface="Cambria Math" panose="02040503050406030204" pitchFamily="18" charset="0"/>
-                            </a:rPr>
-                            <m:t>𝑥</m:t>
-                          </m:r>
-                        </m:e>
-                      </m:d>
-                      <m:r>
-                        <a:rPr lang="it-IT" sz="2400" b="0" i="1" smtClean="0">
-                          <a:latin typeface="Cambria Math" panose="02040503050406030204" pitchFamily="18" charset="0"/>
-                          <a:ea typeface="Cambria Math" panose="02040503050406030204" pitchFamily="18" charset="0"/>
-                        </a:rPr>
-                        <m:t>≔</m:t>
-                      </m:r>
-                      <m:nary>
-                        <m:naryPr>
-                          <m:chr m:val="∑"/>
-                          <m:ctrlPr>
-                            <a:rPr lang="it-IT" sz="2400" i="1" smtClean="0">
-                              <a:latin typeface="Cambria Math" panose="02040503050406030204" pitchFamily="18" charset="0"/>
-                              <a:ea typeface="Cambria Math" panose="02040503050406030204" pitchFamily="18" charset="0"/>
-                            </a:rPr>
-                          </m:ctrlPr>
-                        </m:naryPr>
-                        <m:sub>
-                          <m:r>
-                            <m:rPr>
-                              <m:brk m:alnAt="23"/>
-                            </m:rPr>
-                            <a:rPr lang="it-IT" sz="2400" b="0" i="1" smtClean="0">
-                              <a:latin typeface="Cambria Math" panose="02040503050406030204" pitchFamily="18" charset="0"/>
-                              <a:ea typeface="Cambria Math" panose="02040503050406030204" pitchFamily="18" charset="0"/>
-                            </a:rPr>
-                            <m:t>𝑖</m:t>
-                          </m:r>
-                          <m:r>
-                            <a:rPr lang="it-IT" sz="2400" b="0" i="1" smtClean="0">
-                              <a:latin typeface="Cambria Math" panose="02040503050406030204" pitchFamily="18" charset="0"/>
-                              <a:ea typeface="Cambria Math" panose="02040503050406030204" pitchFamily="18" charset="0"/>
-                            </a:rPr>
-                            <m:t>=1</m:t>
-                          </m:r>
-                        </m:sub>
-                        <m:sup>
-                          <m:r>
-                            <a:rPr lang="it-IT" sz="2400" b="0" i="1" smtClean="0">
-                              <a:latin typeface="Cambria Math" panose="02040503050406030204" pitchFamily="18" charset="0"/>
-                              <a:ea typeface="Cambria Math" panose="02040503050406030204" pitchFamily="18" charset="0"/>
-                            </a:rPr>
-                            <m:t>𝑛</m:t>
-                          </m:r>
-                        </m:sup>
-                        <m:e>
-                          <m:f>
-                            <m:fPr>
-                              <m:ctrlPr>
-                                <a:rPr lang="it-IT" sz="2400" i="1" smtClean="0">
-                                  <a:latin typeface="Cambria Math" panose="02040503050406030204" pitchFamily="18" charset="0"/>
-                                  <a:ea typeface="Cambria Math" panose="02040503050406030204" pitchFamily="18" charset="0"/>
-                                </a:rPr>
-                              </m:ctrlPr>
-                            </m:fPr>
-                            <m:num>
-                              <m:sSup>
-                                <m:sSupPr>
-                                  <m:ctrlPr>
-                                    <a:rPr lang="it-IT" sz="2400" i="1" smtClean="0">
-                                      <a:latin typeface="Cambria Math" panose="02040503050406030204" pitchFamily="18" charset="0"/>
-                                      <a:ea typeface="Cambria Math" panose="02040503050406030204" pitchFamily="18" charset="0"/>
-                                    </a:rPr>
-                                  </m:ctrlPr>
-                                </m:sSupPr>
-                                <m:e>
-                                  <m:r>
-                                    <a:rPr lang="it-IT" sz="2400" b="0" i="1" smtClean="0">
-                                      <a:latin typeface="Cambria Math" panose="02040503050406030204" pitchFamily="18" charset="0"/>
-                                      <a:ea typeface="Cambria Math" panose="02040503050406030204" pitchFamily="18" charset="0"/>
-                                    </a:rPr>
-                                    <m:t>𝜗</m:t>
-                                  </m:r>
-                                </m:e>
-                                <m:sup>
-                                  <m:r>
-                                    <a:rPr lang="it-IT" sz="2400" b="0" i="1" smtClean="0">
-                                      <a:latin typeface="Cambria Math" panose="02040503050406030204" pitchFamily="18" charset="0"/>
-                                      <a:ea typeface="Cambria Math" panose="02040503050406030204" pitchFamily="18" charset="0"/>
-                                    </a:rPr>
-                                    <m:t>2</m:t>
-                                  </m:r>
-                                </m:sup>
-                              </m:sSup>
-                            </m:num>
-                            <m:den>
-                              <m:r>
-                                <a:rPr lang="it-IT" sz="2400" b="0" i="1" smtClean="0">
-                                  <a:latin typeface="Cambria Math" panose="02040503050406030204" pitchFamily="18" charset="0"/>
-                                  <a:ea typeface="Cambria Math" panose="02040503050406030204" pitchFamily="18" charset="0"/>
-                                </a:rPr>
-                                <m:t>𝜗</m:t>
-                              </m:r>
-                              <m:sSup>
-                                <m:sSupPr>
-                                  <m:ctrlPr>
-                                    <a:rPr lang="it-IT" sz="2400" i="1" smtClean="0">
-                                      <a:latin typeface="Cambria Math" panose="02040503050406030204" pitchFamily="18" charset="0"/>
-                                      <a:ea typeface="Cambria Math" panose="02040503050406030204" pitchFamily="18" charset="0"/>
-                                    </a:rPr>
-                                  </m:ctrlPr>
-                                </m:sSupPr>
-                                <m:e>
-                                  <m:sSub>
-                                    <m:sSubPr>
-                                      <m:ctrlPr>
-                                        <a:rPr lang="it-IT" sz="2400" i="1" smtClean="0">
-                                          <a:latin typeface="Cambria Math" panose="02040503050406030204" pitchFamily="18" charset="0"/>
-                                          <a:ea typeface="Cambria Math" panose="02040503050406030204" pitchFamily="18" charset="0"/>
-                                        </a:rPr>
-                                      </m:ctrlPr>
-                                    </m:sSubPr>
-                                    <m:e>
-                                      <m:r>
-                                        <a:rPr lang="it-IT" sz="2400" b="0" i="1" smtClean="0">
-                                          <a:latin typeface="Cambria Math" panose="02040503050406030204" pitchFamily="18" charset="0"/>
-                                          <a:ea typeface="Cambria Math" panose="02040503050406030204" pitchFamily="18" charset="0"/>
-                                        </a:rPr>
-                                        <m:t>𝑥</m:t>
-                                      </m:r>
-                                    </m:e>
-                                    <m:sub>
-                                      <m:r>
-                                        <a:rPr lang="it-IT" sz="2400" b="0" i="1" smtClean="0">
-                                          <a:latin typeface="Cambria Math" panose="02040503050406030204" pitchFamily="18" charset="0"/>
-                                          <a:ea typeface="Cambria Math" panose="02040503050406030204" pitchFamily="18" charset="0"/>
-                                        </a:rPr>
-                                        <m:t>𝑖</m:t>
-                                      </m:r>
-                                    </m:sub>
-                                  </m:sSub>
-                                </m:e>
-                                <m:sup>
-                                  <m:r>
-                                    <a:rPr lang="it-IT" sz="2400" b="0" i="1" smtClean="0">
-                                      <a:latin typeface="Cambria Math" panose="02040503050406030204" pitchFamily="18" charset="0"/>
-                                      <a:ea typeface="Cambria Math" panose="02040503050406030204" pitchFamily="18" charset="0"/>
-                                    </a:rPr>
-                                    <m:t>2</m:t>
-                                  </m:r>
-                                </m:sup>
-                              </m:sSup>
-                            </m:den>
-                          </m:f>
-                        </m:e>
-                      </m:nary>
-                      <m:r>
-                        <a:rPr lang="it-IT" sz="2400" b="0" i="1" smtClean="0">
-                          <a:latin typeface="Cambria Math" panose="02040503050406030204" pitchFamily="18" charset="0"/>
-                          <a:ea typeface="Cambria Math" panose="02040503050406030204" pitchFamily="18" charset="0"/>
-                        </a:rPr>
-                        <m:t>𝑓</m:t>
-                      </m:r>
-                      <m:r>
-                        <a:rPr lang="it-IT" sz="2400" b="0" i="1" smtClean="0">
-                          <a:latin typeface="Cambria Math" panose="02040503050406030204" pitchFamily="18" charset="0"/>
-                          <a:ea typeface="Cambria Math" panose="02040503050406030204" pitchFamily="18" charset="0"/>
-                        </a:rPr>
-                        <m:t>(</m:t>
-                      </m:r>
-                      <m:r>
-                        <a:rPr lang="it-IT" sz="2400" b="0" i="1" smtClean="0">
-                          <a:latin typeface="Cambria Math" panose="02040503050406030204" pitchFamily="18" charset="0"/>
-                          <a:ea typeface="Cambria Math" panose="02040503050406030204" pitchFamily="18" charset="0"/>
-                        </a:rPr>
-                        <m:t>𝑥</m:t>
-                      </m:r>
-                      <m:r>
-                        <a:rPr lang="it-IT" sz="2400" b="0" i="1" smtClean="0">
-                          <a:latin typeface="Cambria Math" panose="02040503050406030204" pitchFamily="18" charset="0"/>
-                          <a:ea typeface="Cambria Math" panose="02040503050406030204" pitchFamily="18" charset="0"/>
-                        </a:rPr>
-                        <m:t>)</m:t>
-                      </m:r>
-                    </m:oMath>
-                  </m:oMathPara>
-                </a14:m>
-                <a:endParaRPr lang="it-IT" sz="2400" i="1" dirty="0"/>
-              </a:p>
-            </p:txBody>
-          </p:sp>
-        </mc:Choice>
-        <mc:Fallback xmlns="">
-          <p:sp>
-            <p:nvSpPr>
-              <p:cNvPr id="14" name="CasellaDiTesto 13">
-                <a:extLst>
-                  <a:ext uri="{FF2B5EF4-FFF2-40B4-BE49-F238E27FC236}">
-                    <a16:creationId xmlns:a16="http://schemas.microsoft.com/office/drawing/2014/main" id="{DF14A0A3-5DD1-117F-66FD-C4A6E63B1429}"/>
-                  </a:ext>
-                </a:extLst>
-              </p:cNvPr>
-              <p:cNvSpPr txBox="1">
-                <a:spLocks noRot="1" noChangeAspect="1" noMove="1" noResize="1" noEditPoints="1" noAdjustHandles="1" noChangeArrowheads="1" noChangeShapeType="1" noTextEdit="1"/>
-              </p:cNvSpPr>
-              <p:nvPr/>
-            </p:nvSpPr>
-            <p:spPr>
-              <a:xfrm>
-                <a:off x="641023" y="4531269"/>
-                <a:ext cx="3285578" cy="1098891"/>
-              </a:xfrm>
-              <a:prstGeom prst="rect">
-                <a:avLst/>
-              </a:prstGeom>
-              <a:blipFill>
-                <a:blip r:embed="rId4"/>
-                <a:stretch>
-                  <a:fillRect/>
-                </a:stretch>
-              </a:blipFill>
-            </p:spPr>
-            <p:txBody>
-              <a:bodyPr/>
-              <a:lstStyle/>
-              <a:p>
-                <a:r>
-                  <a:rPr lang="it-IT">
-                    <a:noFill/>
-                  </a:rPr>
-                  <a:t> </a:t>
-                </a:r>
-              </a:p>
-            </p:txBody>
-          </p:sp>
-        </mc:Fallback>
-      </mc:AlternateContent>
-      <mc:AlternateContent xmlns:mc="http://schemas.openxmlformats.org/markup-compatibility/2006" xmlns:a14="http://schemas.microsoft.com/office/drawing/2010/main">
-        <mc:Choice Requires="a14">
-          <p:sp>
-            <p:nvSpPr>
-              <p:cNvPr id="15" name="CasellaDiTesto 14">
-                <a:extLst>
-                  <a:ext uri="{FF2B5EF4-FFF2-40B4-BE49-F238E27FC236}">
-                    <a16:creationId xmlns:a16="http://schemas.microsoft.com/office/drawing/2014/main" id="{A429EE53-7D72-584D-9278-C715D21F846A}"/>
-                  </a:ext>
-                </a:extLst>
-              </p:cNvPr>
-              <p:cNvSpPr txBox="1"/>
-              <p:nvPr/>
-            </p:nvSpPr>
-            <p:spPr>
-              <a:xfrm>
-                <a:off x="5156177" y="4672365"/>
-                <a:ext cx="4105996" cy="816698"/>
-              </a:xfrm>
-              <a:prstGeom prst="rect">
-                <a:avLst/>
-              </a:prstGeom>
-              <a:noFill/>
-            </p:spPr>
-            <p:txBody>
-              <a:bodyPr wrap="none" lIns="0" tIns="0" rIns="0" bIns="0" rtlCol="0">
-                <a:spAutoFit/>
-              </a:bodyPr>
-              <a:lstStyle/>
-              <a:p>
-                <a:pPr/>
-                <a14:m>
-                  <m:oMathPara xmlns:m="http://schemas.openxmlformats.org/officeDocument/2006/math">
-                    <m:oMathParaPr>
-                      <m:jc m:val="centerGroup"/>
-                    </m:oMathParaPr>
-                    <m:oMath xmlns:m="http://schemas.openxmlformats.org/officeDocument/2006/math">
-                      <m:r>
-                        <a:rPr lang="it-IT" sz="2400" i="1" smtClean="0">
-                          <a:latin typeface="Cambria Math" panose="02040503050406030204" pitchFamily="18" charset="0"/>
-                        </a:rPr>
-                        <m:t>𝑓</m:t>
-                      </m:r>
-                      <m:d>
-                        <m:dPr>
-                          <m:ctrlPr>
-                            <a:rPr lang="it-IT" sz="2400" i="1">
-                              <a:latin typeface="Cambria Math" panose="02040503050406030204" pitchFamily="18" charset="0"/>
-                            </a:rPr>
-                          </m:ctrlPr>
-                        </m:dPr>
-                        <m:e>
-                          <m:acc>
-                            <m:accPr>
-                              <m:chr m:val="̅"/>
-                              <m:ctrlPr>
-                                <a:rPr lang="it-IT" sz="2400" i="1">
-                                  <a:latin typeface="Cambria Math" panose="02040503050406030204" pitchFamily="18" charset="0"/>
-                                </a:rPr>
-                              </m:ctrlPr>
-                            </m:accPr>
-                            <m:e>
-                              <m:r>
-                                <a:rPr lang="it-IT" sz="2400" i="1">
-                                  <a:latin typeface="Cambria Math" panose="02040503050406030204" pitchFamily="18" charset="0"/>
-                                </a:rPr>
-                                <m:t>𝑥</m:t>
-                              </m:r>
-                            </m:e>
-                          </m:acc>
-                        </m:e>
-                      </m:d>
-                      <m:r>
-                        <a:rPr lang="it-IT" sz="2400" i="1">
-                          <a:latin typeface="Cambria Math" panose="02040503050406030204" pitchFamily="18" charset="0"/>
-                        </a:rPr>
-                        <m:t>=</m:t>
-                      </m:r>
-                      <m:f>
-                        <m:fPr>
-                          <m:ctrlPr>
-                            <a:rPr lang="it-IT" sz="2400" i="1">
-                              <a:latin typeface="Cambria Math" panose="02040503050406030204" pitchFamily="18" charset="0"/>
-                            </a:rPr>
-                          </m:ctrlPr>
-                        </m:fPr>
-                        <m:num>
-                          <m:r>
-                            <a:rPr lang="it-IT" sz="2400" i="1">
-                              <a:latin typeface="Cambria Math" panose="02040503050406030204" pitchFamily="18" charset="0"/>
-                            </a:rPr>
-                            <m:t>1</m:t>
-                          </m:r>
-                        </m:num>
-                        <m:den>
-                          <m:d>
-                            <m:dPr>
-                              <m:begChr m:val="|"/>
-                              <m:endChr m:val="|"/>
-                              <m:ctrlPr>
-                                <a:rPr lang="it-IT" sz="2400" i="1">
-                                  <a:latin typeface="Cambria Math" panose="02040503050406030204" pitchFamily="18" charset="0"/>
-                                </a:rPr>
-                              </m:ctrlPr>
-                            </m:dPr>
-                            <m:e>
-                              <m:r>
-                                <a:rPr lang="it-IT" sz="2400" i="1">
-                                  <a:latin typeface="Cambria Math" panose="02040503050406030204" pitchFamily="18" charset="0"/>
-                                </a:rPr>
-                                <m:t>𝐵</m:t>
-                              </m:r>
-                              <m:d>
-                                <m:dPr>
-                                  <m:ctrlPr>
-                                    <a:rPr lang="it-IT" sz="2400" i="1">
-                                      <a:latin typeface="Cambria Math" panose="02040503050406030204" pitchFamily="18" charset="0"/>
-                                    </a:rPr>
-                                  </m:ctrlPr>
-                                </m:dPr>
-                                <m:e>
-                                  <m:acc>
-                                    <m:accPr>
-                                      <m:chr m:val="̅"/>
-                                      <m:ctrlPr>
-                                        <a:rPr lang="it-IT" sz="2400" i="1">
-                                          <a:latin typeface="Cambria Math" panose="02040503050406030204" pitchFamily="18" charset="0"/>
-                                        </a:rPr>
-                                      </m:ctrlPr>
-                                    </m:accPr>
-                                    <m:e>
-                                      <m:r>
-                                        <a:rPr lang="it-IT" sz="2400" i="1">
-                                          <a:latin typeface="Cambria Math" panose="02040503050406030204" pitchFamily="18" charset="0"/>
-                                        </a:rPr>
-                                        <m:t>𝑥</m:t>
-                                      </m:r>
-                                    </m:e>
-                                  </m:acc>
-                                  <m:r>
-                                    <a:rPr lang="it-IT" sz="2400" i="1">
-                                      <a:latin typeface="Cambria Math" panose="02040503050406030204" pitchFamily="18" charset="0"/>
-                                    </a:rPr>
-                                    <m:t>,</m:t>
-                                  </m:r>
-                                  <m:r>
-                                    <a:rPr lang="it-IT" sz="2400" i="1">
-                                      <a:latin typeface="Cambria Math" panose="02040503050406030204" pitchFamily="18" charset="0"/>
-                                    </a:rPr>
-                                    <m:t>𝑟</m:t>
-                                  </m:r>
-                                </m:e>
-                              </m:d>
-                            </m:e>
-                          </m:d>
-                        </m:den>
-                      </m:f>
-                      <m:nary>
-                        <m:naryPr>
-                          <m:supHide m:val="on"/>
-                          <m:ctrlPr>
-                            <a:rPr lang="it-IT" sz="2400" i="1">
-                              <a:latin typeface="Cambria Math" panose="02040503050406030204" pitchFamily="18" charset="0"/>
-                            </a:rPr>
-                          </m:ctrlPr>
-                        </m:naryPr>
-                        <m:sub>
-                          <m:r>
-                            <a:rPr lang="it-IT" sz="2400" i="1">
-                              <a:latin typeface="Cambria Math" panose="02040503050406030204" pitchFamily="18" charset="0"/>
-                            </a:rPr>
-                            <m:t>𝐵</m:t>
-                          </m:r>
-                          <m:d>
-                            <m:dPr>
-                              <m:ctrlPr>
-                                <a:rPr lang="it-IT" sz="2400" i="1">
-                                  <a:latin typeface="Cambria Math" panose="02040503050406030204" pitchFamily="18" charset="0"/>
-                                </a:rPr>
-                              </m:ctrlPr>
-                            </m:dPr>
-                            <m:e>
-                              <m:acc>
-                                <m:accPr>
-                                  <m:chr m:val="̅"/>
-                                  <m:ctrlPr>
-                                    <a:rPr lang="it-IT" sz="2400" i="1">
-                                      <a:latin typeface="Cambria Math" panose="02040503050406030204" pitchFamily="18" charset="0"/>
-                                    </a:rPr>
-                                  </m:ctrlPr>
-                                </m:accPr>
-                                <m:e>
-                                  <m:r>
-                                    <a:rPr lang="it-IT" sz="2400" i="1">
-                                      <a:latin typeface="Cambria Math" panose="02040503050406030204" pitchFamily="18" charset="0"/>
-                                    </a:rPr>
-                                    <m:t>𝑥</m:t>
-                                  </m:r>
-                                </m:e>
-                              </m:acc>
-                              <m:r>
-                                <a:rPr lang="it-IT" sz="2400" i="1">
-                                  <a:latin typeface="Cambria Math" panose="02040503050406030204" pitchFamily="18" charset="0"/>
-                                </a:rPr>
-                                <m:t>,</m:t>
-                              </m:r>
-                              <m:r>
-                                <a:rPr lang="it-IT" sz="2400" i="1">
-                                  <a:latin typeface="Cambria Math" panose="02040503050406030204" pitchFamily="18" charset="0"/>
-                                </a:rPr>
-                                <m:t>𝑟</m:t>
-                              </m:r>
-                            </m:e>
-                          </m:d>
-                        </m:sub>
-                        <m:sup/>
-                        <m:e>
-                          <m:r>
-                            <a:rPr lang="it-IT" sz="2400" i="1">
-                              <a:latin typeface="Cambria Math" panose="02040503050406030204" pitchFamily="18" charset="0"/>
-                            </a:rPr>
-                            <m:t>𝑓</m:t>
-                          </m:r>
-                          <m:d>
-                            <m:dPr>
-                              <m:ctrlPr>
-                                <a:rPr lang="it-IT" sz="2400" i="1">
-                                  <a:latin typeface="Cambria Math" panose="02040503050406030204" pitchFamily="18" charset="0"/>
-                                </a:rPr>
-                              </m:ctrlPr>
-                            </m:dPr>
-                            <m:e>
-                              <m:r>
-                                <a:rPr lang="it-IT" sz="2400" i="1">
-                                  <a:latin typeface="Cambria Math" panose="02040503050406030204" pitchFamily="18" charset="0"/>
-                                </a:rPr>
-                                <m:t>𝑥</m:t>
-                              </m:r>
-                            </m:e>
-                          </m:d>
-                          <m:r>
-                            <a:rPr lang="it-IT" sz="2400" i="1">
-                              <a:latin typeface="Cambria Math" panose="02040503050406030204" pitchFamily="18" charset="0"/>
-                            </a:rPr>
-                            <m:t>𝑑𝑥</m:t>
-                          </m:r>
-                        </m:e>
-                      </m:nary>
-                    </m:oMath>
-                  </m:oMathPara>
-                </a14:m>
-                <a:endParaRPr lang="it-IT" sz="2400" dirty="0"/>
-              </a:p>
-            </p:txBody>
-          </p:sp>
-        </mc:Choice>
-        <mc:Fallback xmlns="">
-          <p:sp>
-            <p:nvSpPr>
-              <p:cNvPr id="15" name="CasellaDiTesto 14">
-                <a:extLst>
-                  <a:ext uri="{FF2B5EF4-FFF2-40B4-BE49-F238E27FC236}">
-                    <a16:creationId xmlns:a16="http://schemas.microsoft.com/office/drawing/2014/main" id="{A429EE53-7D72-584D-9278-C715D21F846A}"/>
-                  </a:ext>
-                </a:extLst>
-              </p:cNvPr>
-              <p:cNvSpPr txBox="1">
-                <a:spLocks noRot="1" noChangeAspect="1" noMove="1" noResize="1" noEditPoints="1" noAdjustHandles="1" noChangeArrowheads="1" noChangeShapeType="1" noTextEdit="1"/>
-              </p:cNvSpPr>
-              <p:nvPr/>
-            </p:nvSpPr>
-            <p:spPr>
-              <a:xfrm>
-                <a:off x="5156177" y="4672365"/>
-                <a:ext cx="4105996" cy="816698"/>
-              </a:xfrm>
-              <a:prstGeom prst="rect">
-                <a:avLst/>
-              </a:prstGeom>
-              <a:blipFill>
-                <a:blip r:embed="rId5"/>
-                <a:stretch>
-                  <a:fillRect/>
-                </a:stretch>
-              </a:blipFill>
-            </p:spPr>
-            <p:txBody>
-              <a:bodyPr/>
-              <a:lstStyle/>
-              <a:p>
-                <a:r>
-                  <a:rPr lang="it-IT">
-                    <a:noFill/>
-                  </a:rPr>
-                  <a:t> </a:t>
-                </a:r>
-              </a:p>
-            </p:txBody>
-          </p:sp>
-        </mc:Fallback>
-      </mc:AlternateContent>
+      <p:sp>
+        <p:nvSpPr>
+          <p:cNvPr id="3" name="CasellaDiTesto 2">
+            <a:extLst>
+              <a:ext uri="{FF2B5EF4-FFF2-40B4-BE49-F238E27FC236}">
+                <a16:creationId xmlns:a16="http://schemas.microsoft.com/office/drawing/2014/main" id="{A2867F8F-E92B-FB10-5159-AA57C44487C4}"/>
+              </a:ext>
+            </a:extLst>
+          </p:cNvPr>
+          <p:cNvSpPr txBox="1"/>
+          <p:nvPr/>
+        </p:nvSpPr>
+        <p:spPr>
+          <a:xfrm>
+            <a:off x="683341" y="5431820"/>
+            <a:ext cx="65" cy="369332"/>
+          </a:xfrm>
+          <a:prstGeom prst="rect">
+            <a:avLst/>
+          </a:prstGeom>
+          <a:noFill/>
+        </p:spPr>
+        <p:txBody>
+          <a:bodyPr wrap="none" lIns="0" tIns="0" rIns="0" bIns="0" rtlCol="0">
+            <a:spAutoFit/>
+          </a:bodyPr>
+          <a:lstStyle/>
+          <a:p>
+            <a:endParaRPr lang="it-IT" sz="2400" i="1" dirty="0">
+              <a:latin typeface="Cambria" panose="02040503050406030204" pitchFamily="18" charset="0"/>
+              <a:ea typeface="Cambria" panose="02040503050406030204" pitchFamily="18" charset="0"/>
+            </a:endParaRPr>
+          </a:p>
+        </p:txBody>
+      </p:sp>
     </p:spTree>
     <p:extLst>
       <p:ext uri="{BB962C8B-B14F-4D97-AF65-F5344CB8AC3E}">
-        <p14:creationId xmlns:p14="http://schemas.microsoft.com/office/powerpoint/2010/main" val="849465297"/>
+        <p14:creationId xmlns:p14="http://schemas.microsoft.com/office/powerpoint/2010/main" val="4073578586"/>
       </p:ext>
     </p:extLst>
   </p:cSld>
@@ -18332,7 +18369,7 @@
         <p:cNvPr id="1" name="">
           <a:extLst>
             <a:ext uri="{FF2B5EF4-FFF2-40B4-BE49-F238E27FC236}">
-              <a16:creationId xmlns:a16="http://schemas.microsoft.com/office/drawing/2014/main" id="{4320D817-1A14-269A-8EAE-7AD91E891406}"/>
+              <a16:creationId xmlns:a16="http://schemas.microsoft.com/office/drawing/2014/main" id="{8FA37ED7-7AC9-5C90-2250-F97B36BAEA26}"/>
             </a:ext>
           </a:extLst>
         </p:cNvPr>
@@ -18352,7 +18389,7 @@
           <p:cNvPr id="2" name="Titolo 1">
             <a:extLst>
               <a:ext uri="{FF2B5EF4-FFF2-40B4-BE49-F238E27FC236}">
-                <a16:creationId xmlns:a16="http://schemas.microsoft.com/office/drawing/2014/main" id="{23F120DC-47C4-751E-5AB8-9718009D6E57}"/>
+                <a16:creationId xmlns:a16="http://schemas.microsoft.com/office/drawing/2014/main" id="{DA768747-D45D-298C-42CC-99C958B9F7AF}"/>
               </a:ext>
             </a:extLst>
           </p:cNvPr>
@@ -18381,19 +18418,19 @@
             <a:pPr rtl="0"/>
             <a:r>
               <a:rPr lang="it-IT" dirty="0"/>
-              <a:t>Contesto: Equazione del calore</a:t>
+              <a:t>Evoluzione dell’informazione</a:t>
             </a:r>
           </a:p>
         </p:txBody>
       </p:sp>
-      <mc:AlternateContent xmlns:mc="http://schemas.openxmlformats.org/markup-compatibility/2006" xmlns:a14="http://schemas.microsoft.com/office/drawing/2010/main">
-        <mc:Choice Requires="a14">
+      <mc:AlternateContent xmlns:mc="http://schemas.openxmlformats.org/markup-compatibility/2006">
+        <mc:Choice xmlns:a14="http://schemas.microsoft.com/office/drawing/2010/main" Requires="a14">
           <p:sp>
             <p:nvSpPr>
               <p:cNvPr id="4" name="Segnaposto contenuto 3">
                 <a:extLst>
                   <a:ext uri="{FF2B5EF4-FFF2-40B4-BE49-F238E27FC236}">
-                    <a16:creationId xmlns:a16="http://schemas.microsoft.com/office/drawing/2014/main" id="{DE49AFF4-A59E-0629-DD15-8539A59358CC}"/>
+                    <a16:creationId xmlns:a16="http://schemas.microsoft.com/office/drawing/2014/main" id="{DFE960C0-51F2-F435-DC7F-8B6132D3E1FB}"/>
                   </a:ext>
                 </a:extLst>
               </p:cNvPr>
@@ -18406,8 +18443,8 @@
             </p:nvSpPr>
             <p:spPr>
               <a:xfrm>
-                <a:off x="550862" y="1917064"/>
-                <a:ext cx="8555070" cy="4744036"/>
+                <a:off x="550862" y="1464778"/>
+                <a:ext cx="9271564" cy="4744036"/>
               </a:xfrm>
             </p:spPr>
             <p:txBody>
@@ -18416,162 +18453,328 @@
               </a:bodyPr>
               <a:lstStyle/>
               <a:p>
-                <a:pPr marL="285750" indent="-285750">
-                  <a:buFont typeface="Arial" panose="020B0604020202020204" pitchFamily="34" charset="0"/>
-                  <a:buChar char="•"/>
-                </a:pPr>
                 <a:r>
-                  <a:rPr lang="it-IT" dirty="0"/>
-                  <a:t>Perfetto esempio di processo diffusivo</a:t>
-                </a:r>
-              </a:p>
-              <a:p>
-                <a:pPr marL="285750" indent="-285750">
-                  <a:buFont typeface="Arial" panose="020B0604020202020204" pitchFamily="34" charset="0"/>
-                  <a:buChar char="•"/>
-                </a:pPr>
-                <a:r>
-                  <a:rPr lang="it-IT" dirty="0"/>
-                  <a:t>Dispersione omnidirezionale</a:t>
-                </a:r>
-              </a:p>
-              <a:p>
-                <a:pPr marL="285750" indent="-285750">
-                  <a:buFont typeface="Arial" panose="020B0604020202020204" pitchFamily="34" charset="0"/>
-                  <a:buChar char="•"/>
-                </a:pPr>
-                <a:r>
-                  <a:rPr lang="it-IT" dirty="0"/>
-                  <a:t>Effetto immediato anche a distanza infinita</a:t>
-                </a:r>
-              </a:p>
-              <a:p>
-                <a:pPr marL="285750" indent="-285750">
-                  <a:buFont typeface="Arial" panose="020B0604020202020204" pitchFamily="34" charset="0"/>
-                  <a:buChar char="•"/>
-                </a:pPr>
-                <a:r>
-                  <a:rPr lang="it-IT" dirty="0"/>
-                  <a:t>Decadimento rapido</a:t>
-                </a:r>
-              </a:p>
-              <a:p>
-                <a:pPr marL="285750" indent="-285750">
-                  <a:buFont typeface="Arial" panose="020B0604020202020204" pitchFamily="34" charset="0"/>
-                  <a:buChar char="•"/>
-                </a:pPr>
-                <a:r>
-                  <a:rPr lang="it-IT" dirty="0"/>
-                  <a:t> </a:t>
-                </a:r>
-                <a:br>
-                  <a:rPr lang="it-IT" dirty="0"/>
-                </a:br>
-                <a:br>
-                  <a:rPr lang="it-IT" dirty="0"/>
-                </a:br>
-                <a:br>
-                  <a:rPr lang="it-IT" dirty="0"/>
-                </a:br>
-                <a:br>
-                  <a:rPr lang="it-IT" dirty="0"/>
-                </a:br>
-                <a:br>
-                  <a:rPr lang="it-IT" dirty="0"/>
-                </a:br>
-                <a:r>
-                  <a:rPr lang="it-IT" dirty="0"/>
-                  <a:t>La quantità </a:t>
+                  <a:rPr lang="it-IT" sz="2400" dirty="0"/>
+                  <a:t>L’evoluzione temporale di </a:t>
                 </a:r>
                 <a14:m>
                   <m:oMath xmlns:m="http://schemas.openxmlformats.org/officeDocument/2006/math">
                     <m:r>
-                      <a:rPr lang="it-IT" i="1" dirty="0" smtClean="0">
-                        <a:latin typeface="Cambria Math" panose="02040503050406030204" pitchFamily="18" charset="0"/>
-                      </a:rPr>
-                      <m:t>𝑢</m:t>
-                    </m:r>
-                  </m:oMath>
-                </a14:m>
-                <a:r>
-                  <a:rPr lang="it-IT" dirty="0"/>
-                  <a:t> valutata nel punto </a:t>
-                </a:r>
-                <a14:m>
-                  <m:oMath xmlns:m="http://schemas.openxmlformats.org/officeDocument/2006/math">
-                    <m:r>
-                      <a:rPr lang="it-IT" i="1" dirty="0" smtClean="0">
-                        <a:latin typeface="Cambria Math" panose="02040503050406030204" pitchFamily="18" charset="0"/>
-                      </a:rPr>
-                      <m:t>𝑥</m:t>
-                    </m:r>
-                  </m:oMath>
-                </a14:m>
-                <a:r>
-                  <a:rPr lang="it-IT" dirty="0"/>
-                  <a:t> varia nel tempo a seconda di quanto </a:t>
-                </a:r>
-                <a14:m>
-                  <m:oMath xmlns:m="http://schemas.openxmlformats.org/officeDocument/2006/math">
-                    <m:r>
-                      <a:rPr lang="it-IT" i="1" dirty="0" smtClean="0">
+                      <a:rPr lang="it-IT" sz="2400" i="1" dirty="0" smtClean="0">
                         <a:latin typeface="Cambria Math" panose="02040503050406030204" pitchFamily="18" charset="0"/>
                       </a:rPr>
                       <m:t>𝑢</m:t>
                     </m:r>
                     <m:r>
-                      <a:rPr lang="it-IT" i="1" dirty="0" smtClean="0">
+                      <a:rPr lang="it-IT" sz="2400" i="1" dirty="0" smtClean="0">
                         <a:latin typeface="Cambria Math" panose="02040503050406030204" pitchFamily="18" charset="0"/>
                       </a:rPr>
                       <m:t>(</m:t>
                     </m:r>
                     <m:r>
-                      <a:rPr lang="it-IT" i="1" dirty="0" smtClean="0">
+                      <a:rPr lang="it-IT" sz="2400" i="1" dirty="0" smtClean="0">
                         <a:latin typeface="Cambria Math" panose="02040503050406030204" pitchFamily="18" charset="0"/>
                       </a:rPr>
-                      <m:t>𝑥</m:t>
+                      <m:t>𝑡</m:t>
                     </m:r>
                     <m:r>
-                      <a:rPr lang="it-IT" i="1" dirty="0" smtClean="0">
+                      <a:rPr lang="it-IT" sz="2400" i="1" dirty="0" smtClean="0">
                         <a:latin typeface="Cambria Math" panose="02040503050406030204" pitchFamily="18" charset="0"/>
                       </a:rPr>
-                      <m:t>,...)</m:t>
+                      <m:t>)</m:t>
                     </m:r>
                   </m:oMath>
                 </a14:m>
                 <a:r>
-                  <a:rPr lang="it-IT" dirty="0"/>
-                  <a:t> differisce dalla sua media attorno a </a:t>
+                  <a:rPr lang="it-IT" sz="2400" dirty="0"/>
+                  <a:t> è descritta dall’equazione differenziale lineare: </a:t>
+                </a:r>
+                <a14:m>
+                  <m:oMath xmlns:m="http://schemas.openxmlformats.org/officeDocument/2006/math">
+                    <m:f>
+                      <m:fPr>
+                        <m:ctrlPr>
+                          <a:rPr lang="it-IT" sz="2400" i="1" dirty="0" smtClean="0">
+                            <a:latin typeface="Cambria Math" panose="02040503050406030204" pitchFamily="18" charset="0"/>
+                          </a:rPr>
+                        </m:ctrlPr>
+                      </m:fPr>
+                      <m:num>
+                        <m:r>
+                          <a:rPr lang="it-IT" sz="2400" b="0" i="1" dirty="0" smtClean="0">
+                            <a:latin typeface="Cambria Math" panose="02040503050406030204" pitchFamily="18" charset="0"/>
+                          </a:rPr>
+                          <m:t>𝑑</m:t>
+                        </m:r>
+                      </m:num>
+                      <m:den>
+                        <m:r>
+                          <a:rPr lang="it-IT" sz="2400" b="0" i="1" dirty="0" smtClean="0">
+                            <a:latin typeface="Cambria Math" panose="02040503050406030204" pitchFamily="18" charset="0"/>
+                          </a:rPr>
+                          <m:t>𝑑𝑡</m:t>
+                        </m:r>
+                      </m:den>
+                    </m:f>
+                    <m:r>
+                      <a:rPr lang="it-IT" sz="2400" b="0" i="1" dirty="0">
+                        <a:latin typeface="Cambria Math" panose="02040503050406030204" pitchFamily="18" charset="0"/>
+                      </a:rPr>
+                      <m:t>𝑢</m:t>
+                    </m:r>
+                    <m:d>
+                      <m:dPr>
+                        <m:ctrlPr>
+                          <a:rPr lang="it-IT" sz="2400" i="1" dirty="0">
+                            <a:latin typeface="Cambria Math" panose="02040503050406030204" pitchFamily="18" charset="0"/>
+                          </a:rPr>
+                        </m:ctrlPr>
+                      </m:dPr>
+                      <m:e>
+                        <m:r>
+                          <a:rPr lang="it-IT" sz="2400" b="0" i="1" dirty="0">
+                            <a:latin typeface="Cambria Math" panose="02040503050406030204" pitchFamily="18" charset="0"/>
+                          </a:rPr>
+                          <m:t>𝑡</m:t>
+                        </m:r>
+                      </m:e>
+                    </m:d>
+                    <m:r>
+                      <a:rPr lang="it-IT" sz="2400" b="0" i="1" dirty="0">
+                        <a:latin typeface="Cambria Math" panose="02040503050406030204" pitchFamily="18" charset="0"/>
+                      </a:rPr>
+                      <m:t>=−</m:t>
+                    </m:r>
+                    <m:r>
+                      <a:rPr lang="it-IT" sz="2400" b="0" i="1" dirty="0">
+                        <a:latin typeface="Cambria Math" panose="02040503050406030204" pitchFamily="18" charset="0"/>
+                      </a:rPr>
+                      <m:t>𝐿𝑢</m:t>
+                    </m:r>
+                    <m:d>
+                      <m:dPr>
+                        <m:ctrlPr>
+                          <a:rPr lang="it-IT" sz="2400" i="1" dirty="0">
+                            <a:latin typeface="Cambria Math" panose="02040503050406030204" pitchFamily="18" charset="0"/>
+                          </a:rPr>
+                        </m:ctrlPr>
+                      </m:dPr>
+                      <m:e>
+                        <m:r>
+                          <a:rPr lang="it-IT" sz="2400" b="0" i="1" dirty="0">
+                            <a:latin typeface="Cambria Math" panose="02040503050406030204" pitchFamily="18" charset="0"/>
+                          </a:rPr>
+                          <m:t>𝑡</m:t>
+                        </m:r>
+                      </m:e>
+                    </m:d>
+                    <m:r>
+                      <a:rPr lang="it-IT" sz="2400" b="0" i="1" dirty="0">
+                        <a:latin typeface="Cambria Math" panose="02040503050406030204" pitchFamily="18" charset="0"/>
+                      </a:rPr>
+                      <m:t>,</m:t>
+                    </m:r>
+                    <m:r>
+                      <a:rPr lang="it-IT" sz="2400" b="0" i="1" dirty="0">
+                        <a:latin typeface="Cambria Math" panose="02040503050406030204" pitchFamily="18" charset="0"/>
+                      </a:rPr>
+                      <m:t>𝑡</m:t>
+                    </m:r>
+                    <m:r>
+                      <a:rPr lang="it-IT" sz="2400" b="0" i="1" dirty="0">
+                        <a:latin typeface="Cambria Math" panose="02040503050406030204" pitchFamily="18" charset="0"/>
+                      </a:rPr>
+                      <m:t>&gt;0</m:t>
+                    </m:r>
+                  </m:oMath>
+                </a14:m>
+                <a:endParaRPr lang="it-IT" sz="2400" dirty="0"/>
+              </a:p>
+              <a:p>
+                <a:r>
+                  <a:rPr lang="it-IT" sz="2400" dirty="0"/>
+                  <a:t>tale che per condizione iniziale </a:t>
                 </a:r>
                 <a14:m>
                   <m:oMath xmlns:m="http://schemas.openxmlformats.org/officeDocument/2006/math">
                     <m:r>
-                      <a:rPr lang="it-IT" i="1" dirty="0" smtClean="0">
+                      <a:rPr lang="it-IT" sz="2400" b="0" i="1" dirty="0" smtClean="0">
                         <a:latin typeface="Cambria Math" panose="02040503050406030204" pitchFamily="18" charset="0"/>
                       </a:rPr>
-                      <m:t>𝑥</m:t>
+                      <m:t>𝑢</m:t>
+                    </m:r>
+                    <m:d>
+                      <m:dPr>
+                        <m:ctrlPr>
+                          <a:rPr lang="it-IT" sz="2400" b="0" i="1" dirty="0">
+                            <a:latin typeface="Cambria Math" panose="02040503050406030204" pitchFamily="18" charset="0"/>
+                          </a:rPr>
+                        </m:ctrlPr>
+                      </m:dPr>
+                      <m:e>
+                        <m:r>
+                          <a:rPr lang="it-IT" sz="2400" b="0" i="1" dirty="0">
+                            <a:latin typeface="Cambria Math" panose="02040503050406030204" pitchFamily="18" charset="0"/>
+                          </a:rPr>
+                          <m:t>0</m:t>
+                        </m:r>
+                      </m:e>
+                    </m:d>
+                    <m:r>
+                      <a:rPr lang="it-IT" sz="2400" b="0" i="1" dirty="0">
+                        <a:latin typeface="Cambria Math" panose="02040503050406030204" pitchFamily="18" charset="0"/>
+                      </a:rPr>
+                      <m:t>=</m:t>
+                    </m:r>
+                    <m:sSub>
+                      <m:sSubPr>
+                        <m:ctrlPr>
+                          <a:rPr lang="it-IT" sz="2400" b="0" i="1" dirty="0" smtClean="0">
+                            <a:latin typeface="Cambria Math" panose="02040503050406030204" pitchFamily="18" charset="0"/>
+                          </a:rPr>
+                        </m:ctrlPr>
+                      </m:sSubPr>
+                      <m:e>
+                        <m:r>
+                          <a:rPr lang="it-IT" sz="2400" b="0" i="1" dirty="0">
+                            <a:latin typeface="Cambria Math" panose="02040503050406030204" pitchFamily="18" charset="0"/>
+                          </a:rPr>
+                          <m:t>𝑢</m:t>
+                        </m:r>
+                      </m:e>
+                      <m:sub>
+                        <m:r>
+                          <a:rPr lang="it-IT" sz="2400" b="0" i="1" dirty="0">
+                            <a:latin typeface="Cambria Math" panose="02040503050406030204" pitchFamily="18" charset="0"/>
+                          </a:rPr>
+                          <m:t>0</m:t>
+                        </m:r>
+                      </m:sub>
+                    </m:sSub>
+                  </m:oMath>
+                </a14:m>
+                <a:r>
+                  <a:rPr lang="it-IT" sz="2400" dirty="0"/>
+                  <a:t>, abbiamo come soluzione analitica: </a:t>
+                </a:r>
+                <a14:m>
+                  <m:oMath xmlns:m="http://schemas.openxmlformats.org/officeDocument/2006/math">
+                    <m:r>
+                      <a:rPr lang="it-IT" sz="2400" b="0" i="1" dirty="0" smtClean="0">
+                        <a:latin typeface="Cambria Math" panose="02040503050406030204" pitchFamily="18" charset="0"/>
+                      </a:rPr>
+                      <m:t>𝑢</m:t>
+                    </m:r>
+                    <m:d>
+                      <m:dPr>
+                        <m:ctrlPr>
+                          <a:rPr lang="it-IT" sz="2400" b="0" i="1" dirty="0">
+                            <a:latin typeface="Cambria Math" panose="02040503050406030204" pitchFamily="18" charset="0"/>
+                          </a:rPr>
+                        </m:ctrlPr>
+                      </m:dPr>
+                      <m:e>
+                        <m:r>
+                          <a:rPr lang="it-IT" sz="2400" b="0" i="1" dirty="0">
+                            <a:latin typeface="Cambria Math" panose="02040503050406030204" pitchFamily="18" charset="0"/>
+                          </a:rPr>
+                          <m:t>𝑡</m:t>
+                        </m:r>
+                      </m:e>
+                    </m:d>
+                    <m:r>
+                      <a:rPr lang="it-IT" sz="2400" b="0" i="1" dirty="0">
+                        <a:latin typeface="Cambria Math" panose="02040503050406030204" pitchFamily="18" charset="0"/>
+                      </a:rPr>
+                      <m:t>=</m:t>
+                    </m:r>
+                    <m:sSup>
+                      <m:sSupPr>
+                        <m:ctrlPr>
+                          <a:rPr lang="it-IT" sz="2400" i="1" dirty="0" smtClean="0">
+                            <a:latin typeface="Cambria Math" panose="02040503050406030204" pitchFamily="18" charset="0"/>
+                          </a:rPr>
+                        </m:ctrlPr>
+                      </m:sSupPr>
+                      <m:e>
+                        <m:r>
+                          <a:rPr lang="it-IT" sz="2400" b="0" i="1" dirty="0">
+                            <a:latin typeface="Cambria Math" panose="02040503050406030204" pitchFamily="18" charset="0"/>
+                          </a:rPr>
+                          <m:t>𝑒</m:t>
+                        </m:r>
+                      </m:e>
+                      <m:sup>
+                        <m:d>
+                          <m:dPr>
+                            <m:ctrlPr>
+                              <a:rPr lang="it-IT" sz="2400" i="1" dirty="0">
+                                <a:latin typeface="Cambria Math" panose="02040503050406030204" pitchFamily="18" charset="0"/>
+                              </a:rPr>
+                            </m:ctrlPr>
+                          </m:dPr>
+                          <m:e>
+                            <m:r>
+                              <a:rPr lang="it-IT" sz="2400" b="0" i="1" dirty="0">
+                                <a:latin typeface="Cambria Math" panose="02040503050406030204" pitchFamily="18" charset="0"/>
+                              </a:rPr>
+                              <m:t>−</m:t>
+                            </m:r>
+                            <m:r>
+                              <a:rPr lang="it-IT" sz="2400" b="0" i="1" dirty="0" err="1">
+                                <a:latin typeface="Cambria Math" panose="02040503050406030204" pitchFamily="18" charset="0"/>
+                              </a:rPr>
+                              <m:t>𝑡𝐿</m:t>
+                            </m:r>
+                          </m:e>
+                        </m:d>
+                      </m:sup>
+                    </m:sSup>
+                    <m:sSub>
+                      <m:sSubPr>
+                        <m:ctrlPr>
+                          <a:rPr lang="it-IT" sz="2400" b="0" i="1" dirty="0" smtClean="0">
+                            <a:latin typeface="Cambria Math" panose="02040503050406030204" pitchFamily="18" charset="0"/>
+                          </a:rPr>
+                        </m:ctrlPr>
+                      </m:sSubPr>
+                      <m:e>
+                        <m:r>
+                          <a:rPr lang="it-IT" sz="2400" b="0" i="1" dirty="0">
+                            <a:latin typeface="Cambria Math" panose="02040503050406030204" pitchFamily="18" charset="0"/>
+                          </a:rPr>
+                          <m:t>𝑢</m:t>
+                        </m:r>
+                      </m:e>
+                      <m:sub>
+                        <m:r>
+                          <a:rPr lang="it-IT" sz="2400" b="0" i="1" dirty="0">
+                            <a:latin typeface="Cambria Math" panose="02040503050406030204" pitchFamily="18" charset="0"/>
+                          </a:rPr>
+                          <m:t>0</m:t>
+                        </m:r>
+                      </m:sub>
+                    </m:sSub>
+                    <m:r>
+                      <a:rPr lang="it-IT" sz="2400" b="0" i="1" dirty="0" smtClean="0">
+                        <a:latin typeface="Cambria Math" panose="02040503050406030204" pitchFamily="18" charset="0"/>
+                      </a:rPr>
+                      <m:t>( ?)</m:t>
                     </m:r>
                   </m:oMath>
                 </a14:m>
-                <a:endParaRPr lang="it-IT" dirty="0"/>
-              </a:p>
-              <a:p>
-                <a:pPr marL="285750" indent="-285750">
-                  <a:buFont typeface="Arial" panose="020B0604020202020204" pitchFamily="34" charset="0"/>
-                  <a:buChar char="•"/>
-                </a:pPr>
-                <a:endParaRPr lang="it-IT" dirty="0"/>
+                <a:endParaRPr lang="it-IT" sz="2400" dirty="0"/>
               </a:p>
             </p:txBody>
           </p:sp>
         </mc:Choice>
-        <mc:Fallback xmlns="">
+        <mc:Fallback>
           <p:sp>
             <p:nvSpPr>
               <p:cNvPr id="4" name="Segnaposto contenuto 3">
                 <a:extLst>
                   <a:ext uri="{FF2B5EF4-FFF2-40B4-BE49-F238E27FC236}">
-                    <a16:creationId xmlns:a16="http://schemas.microsoft.com/office/drawing/2014/main" id="{DE49AFF4-A59E-0629-DD15-8539A59358CC}"/>
+                    <a16:creationId xmlns:a16="http://schemas.microsoft.com/office/drawing/2014/main" id="{DFE960C0-51F2-F435-DC7F-8B6132D3E1FB}"/>
                   </a:ext>
                 </a:extLst>
               </p:cNvPr>
@@ -18584,13 +18787,13 @@
             </p:nvSpPr>
             <p:spPr>
               <a:xfrm>
-                <a:off x="550862" y="1917064"/>
-                <a:ext cx="8555070" cy="4744036"/>
+                <a:off x="550862" y="1464778"/>
+                <a:ext cx="9271564" cy="4744036"/>
               </a:xfrm>
               <a:blipFill>
                 <a:blip r:embed="rId3"/>
                 <a:stretch>
-                  <a:fillRect l="-1496" t="-1540"/>
+                  <a:fillRect l="-1972" t="-1669"/>
                 </a:stretch>
               </a:blipFill>
             </p:spPr>
@@ -18614,7 +18817,7 @@
           <p:cNvPr id="10" name="Immagine 9" descr="Immagine che contiene schizzo, arte, disegno, cerchio&#10;&#10;Il contenuto generato dall'IA potrebbe non essere corretto.">
             <a:extLst>
               <a:ext uri="{FF2B5EF4-FFF2-40B4-BE49-F238E27FC236}">
-                <a16:creationId xmlns:a16="http://schemas.microsoft.com/office/drawing/2014/main" id="{0C706D8F-2FFD-7C1C-6DA6-38E2724C91E1}"/>
+                <a16:creationId xmlns:a16="http://schemas.microsoft.com/office/drawing/2014/main" id="{584D9DA9-32A3-4541-4948-DFEDEFFA4A59}"/>
               </a:ext>
             </a:extLst>
           </p:cNvPr>
@@ -18652,7 +18855,7 @@
           <p:cNvPr id="11" name="Segnaposto numero diapositiva 10">
             <a:extLst>
               <a:ext uri="{FF2B5EF4-FFF2-40B4-BE49-F238E27FC236}">
-                <a16:creationId xmlns:a16="http://schemas.microsoft.com/office/drawing/2014/main" id="{6B3053FF-65B3-DEBD-887A-110A52C1D36D}"/>
+                <a16:creationId xmlns:a16="http://schemas.microsoft.com/office/drawing/2014/main" id="{10D36AD3-E394-56C2-9A5F-8768C0A556D7}"/>
               </a:ext>
             </a:extLst>
           </p:cNvPr>
@@ -18677,40 +18880,124 @@
           </a:p>
         </p:txBody>
       </p:sp>
-      <p:pic>
-        <p:nvPicPr>
-          <p:cNvPr id="7" name="Immagine 6" descr="Immagine che contiene testo, Carattere, calligrafia, nero&#10;&#10;Il contenuto generato dall'IA potrebbe non essere corretto.">
+      <p:sp>
+        <p:nvSpPr>
+          <p:cNvPr id="3" name="CasellaDiTesto 2">
             <a:extLst>
               <a:ext uri="{FF2B5EF4-FFF2-40B4-BE49-F238E27FC236}">
-                <a16:creationId xmlns:a16="http://schemas.microsoft.com/office/drawing/2014/main" id="{9C4BEF6E-77DA-B4C6-9854-251714C269FE}"/>
+                <a16:creationId xmlns:a16="http://schemas.microsoft.com/office/drawing/2014/main" id="{00BD31D6-214F-A4BF-5409-EF9B3EEF82FA}"/>
               </a:ext>
             </a:extLst>
           </p:cNvPr>
-          <p:cNvPicPr>
-            <a:picLocks noChangeAspect="1"/>
-          </p:cNvPicPr>
+          <p:cNvSpPr txBox="1"/>
           <p:nvPr/>
-        </p:nvPicPr>
-        <p:blipFill>
-          <a:blip r:embed="rId5"/>
-          <a:stretch>
-            <a:fillRect/>
-          </a:stretch>
-        </p:blipFill>
+        </p:nvSpPr>
         <p:spPr>
           <a:xfrm>
-            <a:off x="814507" y="4065903"/>
-            <a:ext cx="6848816" cy="1420497"/>
+            <a:off x="683341" y="5431820"/>
+            <a:ext cx="65" cy="369332"/>
           </a:xfrm>
           <a:prstGeom prst="rect">
             <a:avLst/>
           </a:prstGeom>
+          <a:noFill/>
         </p:spPr>
-      </p:pic>
+        <p:txBody>
+          <a:bodyPr wrap="none" lIns="0" tIns="0" rIns="0" bIns="0" rtlCol="0">
+            <a:spAutoFit/>
+          </a:bodyPr>
+          <a:lstStyle/>
+          <a:p>
+            <a:endParaRPr lang="it-IT" sz="2400" i="1" dirty="0">
+              <a:latin typeface="Cambria" panose="02040503050406030204" pitchFamily="18" charset="0"/>
+              <a:ea typeface="Cambria" panose="02040503050406030204" pitchFamily="18" charset="0"/>
+            </a:endParaRPr>
+          </a:p>
+        </p:txBody>
+      </p:sp>
+      <p:cxnSp>
+        <p:nvCxnSpPr>
+          <p:cNvPr id="6" name="Connettore 2 5">
+            <a:extLst>
+              <a:ext uri="{FF2B5EF4-FFF2-40B4-BE49-F238E27FC236}">
+                <a16:creationId xmlns:a16="http://schemas.microsoft.com/office/drawing/2014/main" id="{89FDFF76-FB3D-1BC8-3D20-2D7E7D2E5051}"/>
+              </a:ext>
+            </a:extLst>
+          </p:cNvPr>
+          <p:cNvCxnSpPr>
+            <a:cxnSpLocks/>
+          </p:cNvCxnSpPr>
+          <p:nvPr/>
+        </p:nvCxnSpPr>
+        <p:spPr>
+          <a:xfrm>
+            <a:off x="3931040" y="3480619"/>
+            <a:ext cx="0" cy="747252"/>
+          </a:xfrm>
+          <a:prstGeom prst="straightConnector1">
+            <a:avLst/>
+          </a:prstGeom>
+          <a:ln w="38100">
+            <a:solidFill>
+              <a:schemeClr val="tx1"/>
+            </a:solidFill>
+            <a:tailEnd type="triangle"/>
+          </a:ln>
+        </p:spPr>
+        <p:style>
+          <a:lnRef idx="1">
+            <a:schemeClr val="accent1"/>
+          </a:lnRef>
+          <a:fillRef idx="0">
+            <a:schemeClr val="accent1"/>
+          </a:fillRef>
+          <a:effectRef idx="0">
+            <a:schemeClr val="accent1"/>
+          </a:effectRef>
+          <a:fontRef idx="minor">
+            <a:schemeClr val="tx1"/>
+          </a:fontRef>
+        </p:style>
+      </p:cxnSp>
+      <p:sp>
+        <p:nvSpPr>
+          <p:cNvPr id="7" name="CasellaDiTesto 6">
+            <a:extLst>
+              <a:ext uri="{FF2B5EF4-FFF2-40B4-BE49-F238E27FC236}">
+                <a16:creationId xmlns:a16="http://schemas.microsoft.com/office/drawing/2014/main" id="{69E34ACC-C912-E965-F78E-2095AE0308AD}"/>
+              </a:ext>
+            </a:extLst>
+          </p:cNvPr>
+          <p:cNvSpPr txBox="1"/>
+          <p:nvPr/>
+        </p:nvSpPr>
+        <p:spPr>
+          <a:xfrm>
+            <a:off x="2202425" y="4198375"/>
+            <a:ext cx="3816750" cy="400110"/>
+          </a:xfrm>
+          <a:prstGeom prst="rect">
+            <a:avLst/>
+          </a:prstGeom>
+          <a:noFill/>
+        </p:spPr>
+        <p:txBody>
+          <a:bodyPr wrap="none" rtlCol="0">
+            <a:spAutoFit/>
+          </a:bodyPr>
+          <a:lstStyle/>
+          <a:p>
+            <a:r>
+              <a:rPr lang="it-IT" sz="2000" dirty="0"/>
+              <a:t>Lo riempiremo nella prossima slide</a:t>
+            </a:r>
+          </a:p>
+        </p:txBody>
+      </p:sp>
     </p:spTree>
     <p:extLst>
       <p:ext uri="{BB962C8B-B14F-4D97-AF65-F5344CB8AC3E}">
-        <p14:creationId xmlns:p14="http://schemas.microsoft.com/office/powerpoint/2010/main" val="3729409598"/>
+        <p14:creationId xmlns:p14="http://schemas.microsoft.com/office/powerpoint/2010/main" val="2725422219"/>
       </p:ext>
     </p:extLst>
   </p:cSld>
@@ -18728,7 +19015,7 @@
         <p:cNvPr id="1" name="">
           <a:extLst>
             <a:ext uri="{FF2B5EF4-FFF2-40B4-BE49-F238E27FC236}">
-              <a16:creationId xmlns:a16="http://schemas.microsoft.com/office/drawing/2014/main" id="{E8D011E6-1595-592F-3BBE-EB40521CF633}"/>
+              <a16:creationId xmlns:a16="http://schemas.microsoft.com/office/drawing/2014/main" id="{ECFAC8E5-E4E3-A49F-A8D1-986B08E91DA1}"/>
             </a:ext>
           </a:extLst>
         </p:cNvPr>
@@ -18748,7 +19035,7 @@
           <p:cNvPr id="2" name="Titolo 1">
             <a:extLst>
               <a:ext uri="{FF2B5EF4-FFF2-40B4-BE49-F238E27FC236}">
-                <a16:creationId xmlns:a16="http://schemas.microsoft.com/office/drawing/2014/main" id="{4BCB0D6A-B5FB-56A6-0780-1271D204F0BF}"/>
+                <a16:creationId xmlns:a16="http://schemas.microsoft.com/office/drawing/2014/main" id="{601CE776-474F-6F20-4E82-210E65416321}"/>
               </a:ext>
             </a:extLst>
           </p:cNvPr>
@@ -18774,22 +19061,21 @@
             </a:defPPr>
           </a:lstStyle>
           <a:p>
-            <a:pPr rtl="0"/>
             <a:r>
               <a:rPr lang="it-IT" dirty="0"/>
-              <a:t>Contesto: Diffusione su un grafo</a:t>
+              <a:t>Dallo spazio dei nodi allo spazio dei modi</a:t>
             </a:r>
           </a:p>
         </p:txBody>
       </p:sp>
-      <mc:AlternateContent xmlns:mc="http://schemas.openxmlformats.org/markup-compatibility/2006" xmlns:a14="http://schemas.microsoft.com/office/drawing/2010/main">
-        <mc:Choice Requires="a14">
+      <mc:AlternateContent xmlns:mc="http://schemas.openxmlformats.org/markup-compatibility/2006">
+        <mc:Choice xmlns:a14="http://schemas.microsoft.com/office/drawing/2010/main" Requires="a14">
           <p:sp>
             <p:nvSpPr>
               <p:cNvPr id="4" name="Segnaposto contenuto 3">
                 <a:extLst>
                   <a:ext uri="{FF2B5EF4-FFF2-40B4-BE49-F238E27FC236}">
-                    <a16:creationId xmlns:a16="http://schemas.microsoft.com/office/drawing/2014/main" id="{6E2A9576-AFC4-7EDB-2597-1A9B04469440}"/>
+                    <a16:creationId xmlns:a16="http://schemas.microsoft.com/office/drawing/2014/main" id="{6FCEADEE-3C8D-024B-524F-96747380BAEF}"/>
                   </a:ext>
                 </a:extLst>
               </p:cNvPr>
@@ -18802,8 +19088,8 @@
             </p:nvSpPr>
             <p:spPr>
               <a:xfrm>
-                <a:off x="550862" y="1917064"/>
-                <a:ext cx="8555070" cy="4744036"/>
+                <a:off x="550862" y="1563105"/>
+                <a:ext cx="9271564" cy="4744036"/>
               </a:xfrm>
             </p:spPr>
             <p:txBody>
@@ -18818,7 +19104,222 @@
                 </a:pPr>
                 <a:r>
                   <a:rPr lang="it-IT" dirty="0"/>
-                  <a:t>Grafo topologico: insieme finito di «nodi» e di una relazione anti riflessiva simmetrica non transitiva su di essi</a:t>
+                  <a:t>Dato che </a:t>
+                </a:r>
+                <a14:m>
+                  <m:oMath xmlns:m="http://schemas.openxmlformats.org/officeDocument/2006/math">
+                    <m:r>
+                      <a:rPr lang="it-IT" i="1" dirty="0" smtClean="0">
+                        <a:latin typeface="Cambria Math" panose="02040503050406030204" pitchFamily="18" charset="0"/>
+                      </a:rPr>
+                      <m:t>𝐿</m:t>
+                    </m:r>
+                  </m:oMath>
+                </a14:m>
+                <a:r>
+                  <a:rPr lang="it-IT" dirty="0"/>
+                  <a:t> è reale e simmetrica (per grafi non orientati), grazie al Teorema Spettrale, essa è diagonalizzabile nella forma: </a:t>
+                </a:r>
+                <a14:m>
+                  <m:oMath xmlns:m="http://schemas.openxmlformats.org/officeDocument/2006/math">
+                    <m:r>
+                      <a:rPr lang="it-IT" i="1" dirty="0" smtClean="0">
+                        <a:latin typeface="Cambria Math" panose="02040503050406030204" pitchFamily="18" charset="0"/>
+                      </a:rPr>
+                      <m:t>𝐿</m:t>
+                    </m:r>
+                    <m:r>
+                      <a:rPr lang="it-IT" i="1" dirty="0" smtClean="0">
+                        <a:latin typeface="Cambria Math" panose="02040503050406030204" pitchFamily="18" charset="0"/>
+                      </a:rPr>
+                      <m:t>=</m:t>
+                    </m:r>
+                    <m:r>
+                      <a:rPr lang="it-IT" i="1" dirty="0" smtClean="0">
+                        <a:latin typeface="Cambria Math" panose="02040503050406030204" pitchFamily="18" charset="0"/>
+                      </a:rPr>
+                      <m:t>𝑃</m:t>
+                    </m:r>
+                    <m:r>
+                      <m:rPr>
+                        <m:sty m:val="p"/>
+                      </m:rPr>
+                      <a:rPr lang="it-IT" i="0" dirty="0">
+                        <a:latin typeface="Cambria Math" panose="02040503050406030204" pitchFamily="18" charset="0"/>
+                      </a:rPr>
+                      <m:t>Λ</m:t>
+                    </m:r>
+                    <m:sSup>
+                      <m:sSupPr>
+                        <m:ctrlPr>
+                          <a:rPr lang="it-IT" i="1" dirty="0">
+                            <a:latin typeface="Cambria Math" panose="02040503050406030204" pitchFamily="18" charset="0"/>
+                          </a:rPr>
+                        </m:ctrlPr>
+                      </m:sSupPr>
+                      <m:e>
+                        <m:r>
+                          <a:rPr lang="it-IT" i="1" dirty="0">
+                            <a:latin typeface="Cambria Math" panose="02040503050406030204" pitchFamily="18" charset="0"/>
+                          </a:rPr>
+                          <m:t>𝑃</m:t>
+                        </m:r>
+                      </m:e>
+                      <m:sup>
+                        <m:r>
+                          <a:rPr lang="it-IT" i="1" dirty="0">
+                            <a:latin typeface="Cambria Math" panose="02040503050406030204" pitchFamily="18" charset="0"/>
+                          </a:rPr>
+                          <m:t>𝑇</m:t>
+                        </m:r>
+                      </m:sup>
+                    </m:sSup>
+                  </m:oMath>
+                </a14:m>
+                <a:endParaRPr lang="it-IT" dirty="0"/>
+              </a:p>
+              <a:p>
+                <a:pPr marL="285750" indent="-285750">
+                  <a:buFont typeface="Arial" panose="020B0604020202020204" pitchFamily="34" charset="0"/>
+                  <a:buChar char="•"/>
+                </a:pPr>
+                <a14:m>
+                  <m:oMath xmlns:m="http://schemas.openxmlformats.org/officeDocument/2006/math">
+                    <m:r>
+                      <m:rPr>
+                        <m:sty m:val="p"/>
+                      </m:rPr>
+                      <a:rPr lang="it-IT" i="0" dirty="0" smtClean="0">
+                        <a:latin typeface="Cambria Math" panose="02040503050406030204" pitchFamily="18" charset="0"/>
+                      </a:rPr>
+                      <m:t>Λ</m:t>
+                    </m:r>
+                  </m:oMath>
+                </a14:m>
+                <a:r>
+                  <a:rPr lang="it-IT" dirty="0"/>
+                  <a:t> è una matrice diagonale tale che </a:t>
+                </a:r>
+                <a14:m>
+                  <m:oMath xmlns:m="http://schemas.openxmlformats.org/officeDocument/2006/math">
+                    <m:r>
+                      <a:rPr lang="it-IT" i="1" dirty="0" smtClean="0">
+                        <a:latin typeface="Cambria Math" panose="02040503050406030204" pitchFamily="18" charset="0"/>
+                      </a:rPr>
+                      <m:t>0=</m:t>
+                    </m:r>
+                    <m:sSub>
+                      <m:sSubPr>
+                        <m:ctrlPr>
+                          <a:rPr lang="it-IT" b="0" i="1" dirty="0" smtClean="0">
+                            <a:latin typeface="Cambria Math" panose="02040503050406030204" pitchFamily="18" charset="0"/>
+                          </a:rPr>
+                        </m:ctrlPr>
+                      </m:sSubPr>
+                      <m:e>
+                        <m:r>
+                          <a:rPr lang="it-IT" i="1" dirty="0" smtClean="0">
+                            <a:latin typeface="Cambria Math" panose="02040503050406030204" pitchFamily="18" charset="0"/>
+                          </a:rPr>
+                          <m:t>𝜆</m:t>
+                        </m:r>
+                      </m:e>
+                      <m:sub>
+                        <m:r>
+                          <a:rPr lang="it-IT" i="1" dirty="0" smtClean="0">
+                            <a:latin typeface="Cambria Math" panose="02040503050406030204" pitchFamily="18" charset="0"/>
+                          </a:rPr>
+                          <m:t>1</m:t>
+                        </m:r>
+                      </m:sub>
+                    </m:sSub>
+                    <m:r>
+                      <a:rPr lang="it-IT" i="1" dirty="0" smtClean="0">
+                        <a:latin typeface="Cambria Math" panose="02040503050406030204" pitchFamily="18" charset="0"/>
+                      </a:rPr>
+                      <m:t>≤</m:t>
+                    </m:r>
+                    <m:sSub>
+                      <m:sSubPr>
+                        <m:ctrlPr>
+                          <a:rPr lang="it-IT" b="0" i="1" dirty="0" smtClean="0">
+                            <a:latin typeface="Cambria Math" panose="02040503050406030204" pitchFamily="18" charset="0"/>
+                          </a:rPr>
+                        </m:ctrlPr>
+                      </m:sSubPr>
+                      <m:e>
+                        <m:r>
+                          <a:rPr lang="it-IT" i="1" dirty="0" smtClean="0">
+                            <a:latin typeface="Cambria Math" panose="02040503050406030204" pitchFamily="18" charset="0"/>
+                          </a:rPr>
+                          <m:t>𝜆</m:t>
+                        </m:r>
+                      </m:e>
+                      <m:sub>
+                        <m:r>
+                          <a:rPr lang="it-IT" i="1" dirty="0" smtClean="0">
+                            <a:latin typeface="Cambria Math" panose="02040503050406030204" pitchFamily="18" charset="0"/>
+                          </a:rPr>
+                          <m:t>2</m:t>
+                        </m:r>
+                      </m:sub>
+                    </m:sSub>
+                    <m:r>
+                      <a:rPr lang="it-IT" i="1" dirty="0" smtClean="0">
+                        <a:latin typeface="Cambria Math" panose="02040503050406030204" pitchFamily="18" charset="0"/>
+                      </a:rPr>
+                      <m:t>≤⋯≤</m:t>
+                    </m:r>
+                    <m:sSub>
+                      <m:sSubPr>
+                        <m:ctrlPr>
+                          <a:rPr lang="it-IT" b="0" i="1" dirty="0" smtClean="0">
+                            <a:latin typeface="Cambria Math" panose="02040503050406030204" pitchFamily="18" charset="0"/>
+                          </a:rPr>
+                        </m:ctrlPr>
+                      </m:sSubPr>
+                      <m:e>
+                        <m:r>
+                          <a:rPr lang="it-IT" i="1" dirty="0" err="1">
+                            <a:latin typeface="Cambria Math" panose="02040503050406030204" pitchFamily="18" charset="0"/>
+                          </a:rPr>
+                          <m:t>𝜆</m:t>
+                        </m:r>
+                      </m:e>
+                      <m:sub>
+                        <m:r>
+                          <a:rPr lang="it-IT" b="0" i="1" dirty="0" smtClean="0">
+                            <a:latin typeface="Cambria Math" panose="02040503050406030204" pitchFamily="18" charset="0"/>
+                          </a:rPr>
+                          <m:t>𝑚</m:t>
+                        </m:r>
+                      </m:sub>
+                    </m:sSub>
+                  </m:oMath>
+                </a14:m>
+                <a:r>
+                  <a:rPr lang="it-IT" dirty="0"/>
+                  <a:t> e «P» contiene gli autovettori ortonormali </a:t>
+                </a:r>
+                <a14:m>
+                  <m:oMath xmlns:m="http://schemas.openxmlformats.org/officeDocument/2006/math">
+                    <m:r>
+                      <a:rPr lang="it-IT" i="1" dirty="0" smtClean="0">
+                        <a:latin typeface="Cambria Math" panose="02040503050406030204" pitchFamily="18" charset="0"/>
+                      </a:rPr>
+                      <m:t>𝜙</m:t>
+                    </m:r>
+                    <m:r>
+                      <a:rPr lang="it-IT" i="1" dirty="0" smtClean="0">
+                        <a:latin typeface="Cambria Math" panose="02040503050406030204" pitchFamily="18" charset="0"/>
+                      </a:rPr>
+                      <m:t>𝑘</m:t>
+                    </m:r>
+                  </m:oMath>
+                </a14:m>
+                <a:r>
+                  <a:rPr lang="it-IT" dirty="0"/>
+                  <a:t> come spazio delle colonne</a:t>
                 </a:r>
               </a:p>
               <a:p>
@@ -18828,418 +19329,283 @@
                 </a:pPr>
                 <a:r>
                   <a:rPr lang="it-IT" dirty="0"/>
-                  <a:t>Usiamo i due precedenti strumenti per creare diffusione di calore su un grafo</a:t>
-                </a:r>
-              </a:p>
-              <a:p>
-                <a:pPr marL="285750" indent="-285750">
-                  <a:buFont typeface="Arial" panose="020B0604020202020204" pitchFamily="34" charset="0"/>
-                  <a:buChar char="•"/>
-                </a:pPr>
-                <a:r>
-                  <a:rPr lang="it-IT" dirty="0"/>
-                  <a:t>Algebricamente parlando, con i grafi:  </a:t>
+                  <a:t>Sostituendo nella soluzione analitica di prima </a:t>
                 </a:r>
                 <a14:m>
                   <m:oMath xmlns:m="http://schemas.openxmlformats.org/officeDocument/2006/math">
                     <m:r>
-                      <a:rPr lang="it-IT" i="1" dirty="0">
+                      <a:rPr lang="it-IT" i="1" dirty="0" smtClean="0">
                         <a:latin typeface="Cambria Math" panose="02040503050406030204" pitchFamily="18" charset="0"/>
                       </a:rPr>
-                      <m:t>𝐿</m:t>
+                      <m:t>(</m:t>
+                    </m:r>
+                    <m:r>
+                      <a:rPr lang="it-IT" b="0" i="1" dirty="0" smtClean="0">
+                        <a:latin typeface="Cambria Math" panose="02040503050406030204" pitchFamily="18" charset="0"/>
+                      </a:rPr>
+                      <m:t> </m:t>
+                    </m:r>
+                    <m:r>
+                      <a:rPr lang="it-IT" i="1" dirty="0" smtClean="0">
+                        <a:latin typeface="Cambria Math" panose="02040503050406030204" pitchFamily="18" charset="0"/>
+                      </a:rPr>
+                      <m:t>?</m:t>
                     </m:r>
                     <m:r>
                       <a:rPr lang="it-IT" i="1" dirty="0">
                         <a:latin typeface="Cambria Math" panose="02040503050406030204" pitchFamily="18" charset="0"/>
                       </a:rPr>
-                      <m:t> =</m:t>
-                    </m:r>
-                    <m:r>
-                      <a:rPr lang="it-IT" i="1" dirty="0">
-                        <a:latin typeface="Cambria Math" panose="02040503050406030204" pitchFamily="18" charset="0"/>
-                      </a:rPr>
-                      <m:t>𝐷</m:t>
-                    </m:r>
-                    <m:r>
-                      <a:rPr lang="it-IT" i="1" dirty="0">
-                        <a:latin typeface="Cambria Math" panose="02040503050406030204" pitchFamily="18" charset="0"/>
-                        <a:ea typeface="Cambria Math" panose="02040503050406030204" pitchFamily="18" charset="0"/>
-                      </a:rPr>
-                      <m:t>−</m:t>
-                    </m:r>
-                    <m:r>
-                      <a:rPr lang="it-IT" i="1" dirty="0">
-                        <a:latin typeface="Cambria Math" panose="02040503050406030204" pitchFamily="18" charset="0"/>
-                      </a:rPr>
-                      <m:t>𝐴</m:t>
+                      <m:t>)</m:t>
                     </m:r>
                   </m:oMath>
                 </a14:m>
-                <a:endParaRPr lang="it-IT" i="1" dirty="0"/>
-              </a:p>
-              <a:p>
-                <a:pPr marL="285750" indent="-285750">
-                  <a:buFont typeface="Arial" panose="020B0604020202020204" pitchFamily="34" charset="0"/>
-                  <a:buChar char="•"/>
-                </a:pPr>
+                <a:r>
+                  <a:rPr lang="it-IT" dirty="0"/>
+                  <a:t>, otteniamo che</a:t>
+                </a:r>
+                <a:br>
+                  <a:rPr lang="it-IT" i="1" dirty="0">
+                    <a:latin typeface="Cambria Math" panose="02040503050406030204" pitchFamily="18" charset="0"/>
+                  </a:rPr>
+                </a:br>
                 <a14:m>
                   <m:oMath xmlns:m="http://schemas.openxmlformats.org/officeDocument/2006/math">
-                    <m:sSub>
-                      <m:sSubPr>
+                    <m:r>
+                      <a:rPr lang="it-IT" i="1">
+                        <a:latin typeface="Cambria Math" panose="02040503050406030204" pitchFamily="18" charset="0"/>
+                      </a:rPr>
+                      <m:t>𝑢</m:t>
+                    </m:r>
+                    <m:d>
+                      <m:dPr>
                         <m:ctrlPr>
-                          <a:rPr lang="it-IT" i="1" dirty="0">
+                          <a:rPr lang="it-IT" i="1">
                             <a:latin typeface="Cambria Math" panose="02040503050406030204" pitchFamily="18" charset="0"/>
                           </a:rPr>
                         </m:ctrlPr>
-                      </m:sSubPr>
+                      </m:dPr>
+                      <m:e>
+                        <m:r>
+                          <a:rPr lang="it-IT" i="1">
+                            <a:latin typeface="Cambria Math" panose="02040503050406030204" pitchFamily="18" charset="0"/>
+                          </a:rPr>
+                          <m:t>𝑡</m:t>
+                        </m:r>
+                      </m:e>
+                    </m:d>
+                    <m:r>
+                      <a:rPr lang="it-IT" i="1">
+                        <a:latin typeface="Cambria Math" panose="02040503050406030204" pitchFamily="18" charset="0"/>
+                      </a:rPr>
+                      <m:t>=</m:t>
+                    </m:r>
+                    <m:nary>
+                      <m:naryPr>
+                        <m:chr m:val="∑"/>
+                        <m:ctrlPr>
+                          <a:rPr lang="it-IT" i="1">
+                            <a:latin typeface="Cambria Math" panose="02040503050406030204" pitchFamily="18" charset="0"/>
+                          </a:rPr>
+                        </m:ctrlPr>
+                      </m:naryPr>
+                      <m:sub>
+                        <m:r>
+                          <a:rPr lang="it-IT" i="1">
+                            <a:latin typeface="Cambria Math" panose="02040503050406030204" pitchFamily="18" charset="0"/>
+                          </a:rPr>
+                          <m:t>𝑘</m:t>
+                        </m:r>
+                        <m:r>
+                          <a:rPr lang="it-IT" i="1">
+                            <a:latin typeface="Cambria Math" panose="02040503050406030204" pitchFamily="18" charset="0"/>
+                          </a:rPr>
+                          <m:t>=1</m:t>
+                        </m:r>
+                      </m:sub>
+                      <m:sup>
+                        <m:r>
+                          <a:rPr lang="it-IT" i="1">
+                            <a:latin typeface="Cambria Math" panose="02040503050406030204" pitchFamily="18" charset="0"/>
+                          </a:rPr>
+                          <m:t>𝑚</m:t>
+                        </m:r>
+                      </m:sup>
                       <m:e>
                         <m:d>
                           <m:dPr>
                             <m:ctrlPr>
-                              <a:rPr lang="it-IT" i="1" dirty="0">
+                              <a:rPr lang="it-IT" i="1">
+                                <a:latin typeface="Cambria Math" panose="02040503050406030204" pitchFamily="18" charset="0"/>
+                              </a:rPr>
+                            </m:ctrlPr>
+                          </m:dPr>
+                          <m:e>
+                            <m:sSubSup>
+                              <m:sSubSupPr>
+                                <m:ctrlPr>
+                                  <a:rPr lang="it-IT" i="1">
+                                    <a:latin typeface="Cambria Math" panose="02040503050406030204" pitchFamily="18" charset="0"/>
+                                  </a:rPr>
+                                </m:ctrlPr>
+                              </m:sSubSupPr>
+                              <m:e>
+                                <m:r>
+                                  <a:rPr lang="it-IT" i="1">
+                                    <a:latin typeface="Cambria Math" panose="02040503050406030204" pitchFamily="18" charset="0"/>
+                                  </a:rPr>
+                                  <m:t>𝑢</m:t>
+                                </m:r>
+                              </m:e>
+                              <m:sub>
+                                <m:r>
+                                  <a:rPr lang="it-IT" i="1">
+                                    <a:latin typeface="Cambria Math" panose="02040503050406030204" pitchFamily="18" charset="0"/>
+                                  </a:rPr>
+                                  <m:t>0</m:t>
+                                </m:r>
+                              </m:sub>
+                              <m:sup>
+                                <m:r>
+                                  <a:rPr lang="it-IT" i="1">
+                                    <a:latin typeface="Cambria Math" panose="02040503050406030204" pitchFamily="18" charset="0"/>
+                                  </a:rPr>
+                                  <m:t>𝑇</m:t>
+                                </m:r>
+                              </m:sup>
+                            </m:sSubSup>
+                            <m:sSub>
+                              <m:sSubPr>
+                                <m:ctrlPr>
+                                  <a:rPr lang="it-IT" i="1">
+                                    <a:latin typeface="Cambria Math" panose="02040503050406030204" pitchFamily="18" charset="0"/>
+                                  </a:rPr>
+                                </m:ctrlPr>
+                              </m:sSubPr>
+                              <m:e>
+                                <m:r>
+                                  <a:rPr lang="it-IT" i="1">
+                                    <a:latin typeface="Cambria Math" panose="02040503050406030204" pitchFamily="18" charset="0"/>
+                                  </a:rPr>
+                                  <m:t>𝜙</m:t>
+                                </m:r>
+                              </m:e>
+                              <m:sub>
+                                <m:r>
+                                  <a:rPr lang="it-IT" i="1">
+                                    <a:latin typeface="Cambria Math" panose="02040503050406030204" pitchFamily="18" charset="0"/>
+                                  </a:rPr>
+                                  <m:t>𝑘</m:t>
+                                </m:r>
+                              </m:sub>
+                            </m:sSub>
+                          </m:e>
+                        </m:d>
+                        <m:sSup>
+                          <m:sSupPr>
+                            <m:ctrlPr>
+                              <a:rPr lang="it-IT" i="1">
+                                <a:latin typeface="Cambria Math" panose="02040503050406030204" pitchFamily="18" charset="0"/>
+                              </a:rPr>
+                            </m:ctrlPr>
+                          </m:sSupPr>
+                          <m:e>
+                            <m:r>
+                              <a:rPr lang="it-IT" i="1">
+                                <a:latin typeface="Cambria Math" panose="02040503050406030204" pitchFamily="18" charset="0"/>
+                              </a:rPr>
+                              <m:t>𝑒</m:t>
+                            </m:r>
+                          </m:e>
+                          <m:sup>
+                            <m:r>
+                              <a:rPr lang="it-IT" i="1">
+                                <a:latin typeface="Cambria Math" panose="02040503050406030204" pitchFamily="18" charset="0"/>
+                              </a:rPr>
+                              <m:t>−</m:t>
+                            </m:r>
+                            <m:sSub>
+                              <m:sSubPr>
+                                <m:ctrlPr>
+                                  <a:rPr lang="it-IT" i="1">
+                                    <a:latin typeface="Cambria Math" panose="02040503050406030204" pitchFamily="18" charset="0"/>
+                                  </a:rPr>
+                                </m:ctrlPr>
+                              </m:sSubPr>
+                              <m:e>
+                                <m:r>
+                                  <a:rPr lang="it-IT" i="1">
+                                    <a:latin typeface="Cambria Math" panose="02040503050406030204" pitchFamily="18" charset="0"/>
+                                  </a:rPr>
+                                  <m:t>𝜆</m:t>
+                                </m:r>
+                              </m:e>
+                              <m:sub>
+                                <m:r>
+                                  <a:rPr lang="it-IT" i="1">
+                                    <a:latin typeface="Cambria Math" panose="02040503050406030204" pitchFamily="18" charset="0"/>
+                                  </a:rPr>
+                                  <m:t>𝑘</m:t>
+                                </m:r>
+                              </m:sub>
+                            </m:sSub>
+                            <m:r>
+                              <a:rPr lang="it-IT" i="1">
+                                <a:latin typeface="Cambria Math" panose="02040503050406030204" pitchFamily="18" charset="0"/>
+                              </a:rPr>
+                              <m:t>𝑡</m:t>
+                            </m:r>
+                          </m:sup>
+                        </m:sSup>
+                        <m:sSub>
+                          <m:sSubPr>
+                            <m:ctrlPr>
+                              <a:rPr lang="it-IT" i="1">
+                                <a:latin typeface="Cambria Math" panose="02040503050406030204" pitchFamily="18" charset="0"/>
+                              </a:rPr>
+                            </m:ctrlPr>
+                          </m:sSubPr>
+                          <m:e>
+                            <m:r>
+                              <a:rPr lang="it-IT" i="1">
+                                <a:latin typeface="Cambria Math" panose="02040503050406030204" pitchFamily="18" charset="0"/>
+                              </a:rPr>
+                              <m:t>𝜙</m:t>
+                            </m:r>
+                          </m:e>
+                          <m:sub>
+                            <m:r>
+                              <a:rPr lang="it-IT" i="1">
+                                <a:latin typeface="Cambria Math" panose="02040503050406030204" pitchFamily="18" charset="0"/>
+                              </a:rPr>
+                              <m:t>𝑘</m:t>
+                            </m:r>
+                          </m:sub>
+                        </m:sSub>
+                        <m:r>
+                          <a:rPr lang="it-IT" i="1">
+                            <a:latin typeface="Cambria Math" panose="02040503050406030204" pitchFamily="18" charset="0"/>
+                          </a:rPr>
+                          <m:t>𝑢</m:t>
+                        </m:r>
+                        <m:d>
+                          <m:dPr>
+                            <m:ctrlPr>
+                              <a:rPr lang="it-IT" i="1">
                                 <a:latin typeface="Cambria Math" panose="02040503050406030204" pitchFamily="18" charset="0"/>
                               </a:rPr>
                             </m:ctrlPr>
                           </m:dPr>
                           <m:e>
                             <m:r>
-                              <a:rPr lang="it-IT" i="1" dirty="0">
+                              <a:rPr lang="it-IT" i="1">
                                 <a:latin typeface="Cambria Math" panose="02040503050406030204" pitchFamily="18" charset="0"/>
                               </a:rPr>
-                              <m:t>𝐿𝑢</m:t>
+                              <m:t>𝑡</m:t>
                             </m:r>
                           </m:e>
                         </m:d>
                       </m:e>
-                      <m:sub>
-                        <m:r>
-                          <a:rPr lang="it-IT" i="1" dirty="0">
-                            <a:latin typeface="Cambria Math" panose="02040503050406030204" pitchFamily="18" charset="0"/>
-                          </a:rPr>
-                          <m:t>𝑖</m:t>
-                        </m:r>
-                      </m:sub>
-                    </m:sSub>
-                  </m:oMath>
-                </a14:m>
-                <a:r>
-                  <a:rPr lang="it-IT" dirty="0"/>
-                  <a:t> = somma delle differenze tra il nodo </a:t>
-                </a:r>
-                <a14:m>
-                  <m:oMath xmlns:m="http://schemas.openxmlformats.org/officeDocument/2006/math">
-                    <m:r>
-                      <a:rPr lang="it-IT" i="1" dirty="0">
-                        <a:latin typeface="Cambria Math" panose="02040503050406030204" pitchFamily="18" charset="0"/>
-                      </a:rPr>
-                      <m:t>𝑖</m:t>
-                    </m:r>
-                  </m:oMath>
-                </a14:m>
-                <a:r>
-                  <a:rPr lang="it-IT" dirty="0"/>
-                  <a:t> e i suoi vicini</a:t>
-                </a:r>
-              </a:p>
-              <a:p>
-                <a:pPr marL="285750" indent="-285750">
-                  <a:buFont typeface="Arial" panose="020B0604020202020204" pitchFamily="34" charset="0"/>
-                  <a:buChar char="•"/>
-                </a:pPr>
-                <a:r>
-                  <a:rPr lang="it-IT" dirty="0"/>
-                  <a:t> L’equazione del calore diventa:</a:t>
-                </a:r>
-                <a:br>
-                  <a:rPr lang="it-IT" dirty="0"/>
-                </a:br>
-                <a:br>
-                  <a:rPr lang="it-IT" dirty="0"/>
-                </a:br>
-                <a:br>
-                  <a:rPr lang="it-IT" dirty="0"/>
-                </a:br>
-                <a:br>
-                  <a:rPr lang="it-IT" dirty="0"/>
-                </a:br>
-                <a:endParaRPr lang="it-IT" dirty="0"/>
-              </a:p>
-            </p:txBody>
-          </p:sp>
-        </mc:Choice>
-        <mc:Fallback xmlns="">
-          <p:sp>
-            <p:nvSpPr>
-              <p:cNvPr id="4" name="Segnaposto contenuto 3">
-                <a:extLst>
-                  <a:ext uri="{FF2B5EF4-FFF2-40B4-BE49-F238E27FC236}">
-                    <a16:creationId xmlns:a16="http://schemas.microsoft.com/office/drawing/2014/main" id="{6E2A9576-AFC4-7EDB-2597-1A9B04469440}"/>
-                  </a:ext>
-                </a:extLst>
-              </p:cNvPr>
-              <p:cNvSpPr>
-                <a:spLocks noGrp="1" noRot="1" noChangeAspect="1" noMove="1" noResize="1" noEditPoints="1" noAdjustHandles="1" noChangeArrowheads="1" noChangeShapeType="1" noTextEdit="1"/>
-              </p:cNvSpPr>
-              <p:nvPr>
-                <p:ph sz="half" idx="1"/>
-              </p:nvPr>
-            </p:nvSpPr>
-            <p:spPr>
-              <a:xfrm>
-                <a:off x="550862" y="1917064"/>
-                <a:ext cx="8555070" cy="4744036"/>
-              </a:xfrm>
-              <a:blipFill>
-                <a:blip r:embed="rId3"/>
-                <a:stretch>
-                  <a:fillRect l="-1496" t="-1540"/>
-                </a:stretch>
-              </a:blipFill>
-            </p:spPr>
-            <p:txBody>
-              <a:bodyPr/>
-              <a:lstStyle/>
-              <a:p>
-                <a:r>
-                  <a:rPr lang="it-IT">
-                    <a:noFill/>
-                  </a:rPr>
-                  <a:t> </a:t>
-                </a:r>
-              </a:p>
-            </p:txBody>
-          </p:sp>
-        </mc:Fallback>
-      </mc:AlternateContent>
-      <p:pic>
-        <p:nvPicPr>
-          <p:cNvPr id="10" name="Immagine 9" descr="Immagine che contiene schizzo, arte, disegno, cerchio&#10;&#10;Il contenuto generato dall'IA potrebbe non essere corretto.">
-            <a:extLst>
-              <a:ext uri="{FF2B5EF4-FFF2-40B4-BE49-F238E27FC236}">
-                <a16:creationId xmlns:a16="http://schemas.microsoft.com/office/drawing/2014/main" id="{5BE24576-70F5-1CAF-17E0-15C44898EC39}"/>
-              </a:ext>
-            </a:extLst>
-          </p:cNvPr>
-          <p:cNvPicPr>
-            <a:picLocks noChangeAspect="1"/>
-          </p:cNvPicPr>
-          <p:nvPr/>
-        </p:nvPicPr>
-        <p:blipFill>
-          <a:blip r:embed="rId4">
-            <a:alphaModFix amt="38000"/>
-            <a:extLst>
-              <a:ext uri="{28A0092B-C50C-407E-A947-70E740481C1C}">
-                <a14:useLocalDpi xmlns:a14="http://schemas.microsoft.com/office/drawing/2010/main" val="0"/>
-              </a:ext>
-            </a:extLst>
-          </a:blip>
-          <a:srcRect r="44078" b="64193"/>
-          <a:stretch>
-            <a:fillRect/>
-          </a:stretch>
-        </p:blipFill>
-        <p:spPr>
-          <a:xfrm>
-            <a:off x="9105931" y="4402319"/>
-            <a:ext cx="3086069" cy="2455682"/>
-          </a:xfrm>
-          <a:prstGeom prst="rect">
-            <a:avLst/>
-          </a:prstGeom>
-        </p:spPr>
-      </p:pic>
-      <p:sp>
-        <p:nvSpPr>
-          <p:cNvPr id="11" name="Segnaposto numero diapositiva 10">
-            <a:extLst>
-              <a:ext uri="{FF2B5EF4-FFF2-40B4-BE49-F238E27FC236}">
-                <a16:creationId xmlns:a16="http://schemas.microsoft.com/office/drawing/2014/main" id="{5F308BC2-3933-8698-A728-4F548A9CD8DE}"/>
-              </a:ext>
-            </a:extLst>
-          </p:cNvPr>
-          <p:cNvSpPr>
-            <a:spLocks noGrp="1"/>
-          </p:cNvSpPr>
-          <p:nvPr>
-            <p:ph type="sldNum" sz="quarter" idx="12"/>
-          </p:nvPr>
-        </p:nvSpPr>
-        <p:spPr/>
-        <p:txBody>
-          <a:bodyPr/>
-          <a:lstStyle/>
-          <a:p>
-            <a:pPr rtl="0"/>
-            <a:fld id="{CBD12358-51D2-46B3-9BDE-DF29528B9454}" type="slidenum">
-              <a:rPr lang="it-IT" smtClean="0"/>
-              <a:t>7</a:t>
-            </a:fld>
-            <a:endParaRPr lang="it-IT" dirty="0"/>
-          </a:p>
-        </p:txBody>
-      </p:sp>
-      <p:pic>
-        <p:nvPicPr>
-          <p:cNvPr id="5" name="Immagine 4" descr="Immagine che contiene Carattere, tipografia, Elementi grafici, schermata&#10;&#10;Il contenuto generato dall'IA potrebbe non essere corretto.">
-            <a:extLst>
-              <a:ext uri="{FF2B5EF4-FFF2-40B4-BE49-F238E27FC236}">
-                <a16:creationId xmlns:a16="http://schemas.microsoft.com/office/drawing/2014/main" id="{BAAC55A1-2C5A-55C5-95F2-4895D7A01FB8}"/>
-              </a:ext>
-            </a:extLst>
-          </p:cNvPr>
-          <p:cNvPicPr>
-            <a:picLocks noChangeAspect="1"/>
-          </p:cNvPicPr>
-          <p:nvPr/>
-        </p:nvPicPr>
-        <p:blipFill>
-          <a:blip r:embed="rId5"/>
-          <a:stretch>
-            <a:fillRect/>
-          </a:stretch>
-        </p:blipFill>
-        <p:spPr>
-          <a:xfrm>
-            <a:off x="880987" y="4722714"/>
-            <a:ext cx="4105792" cy="1185599"/>
-          </a:xfrm>
-          <a:prstGeom prst="rect">
-            <a:avLst/>
-          </a:prstGeom>
-        </p:spPr>
-      </p:pic>
-    </p:spTree>
-    <p:extLst>
-      <p:ext uri="{BB962C8B-B14F-4D97-AF65-F5344CB8AC3E}">
-        <p14:creationId xmlns:p14="http://schemas.microsoft.com/office/powerpoint/2010/main" val="2620810767"/>
-      </p:ext>
-    </p:extLst>
-  </p:cSld>
-  <p:clrMapOvr>
-    <a:masterClrMapping/>
-  </p:clrMapOvr>
-</p:sld>
-</file>
-
-<file path=ppt/slides/slide8.xml><?xml version="1.0" encoding="utf-8"?>
-<p:sld xmlns:a="http://schemas.openxmlformats.org/drawingml/2006/main" xmlns:r="http://schemas.openxmlformats.org/officeDocument/2006/relationships" xmlns:p="http://schemas.openxmlformats.org/presentationml/2006/main">
-  <p:cSld>
-    <p:spTree>
-      <p:nvGrpSpPr>
-        <p:cNvPr id="1" name="">
-          <a:extLst>
-            <a:ext uri="{FF2B5EF4-FFF2-40B4-BE49-F238E27FC236}">
-              <a16:creationId xmlns:a16="http://schemas.microsoft.com/office/drawing/2014/main" id="{ED2EB78B-F67C-567C-170B-458235EC053D}"/>
-            </a:ext>
-          </a:extLst>
-        </p:cNvPr>
-        <p:cNvGrpSpPr/>
-        <p:nvPr/>
-      </p:nvGrpSpPr>
-      <p:grpSpPr>
-        <a:xfrm>
-          <a:off x="0" y="0"/>
-          <a:ext cx="0" cy="0"/>
-          <a:chOff x="0" y="0"/>
-          <a:chExt cx="0" cy="0"/>
-        </a:xfrm>
-      </p:grpSpPr>
-      <p:sp>
-        <p:nvSpPr>
-          <p:cNvPr id="2" name="Titolo 1">
-            <a:extLst>
-              <a:ext uri="{FF2B5EF4-FFF2-40B4-BE49-F238E27FC236}">
-                <a16:creationId xmlns:a16="http://schemas.microsoft.com/office/drawing/2014/main" id="{1F6D8D0C-71AE-5017-8D49-F84F77AF0868}"/>
-              </a:ext>
-            </a:extLst>
-          </p:cNvPr>
-          <p:cNvSpPr>
-            <a:spLocks noGrp="1"/>
-          </p:cNvSpPr>
-          <p:nvPr>
-            <p:ph type="title"/>
-          </p:nvPr>
-        </p:nvSpPr>
-        <p:spPr>
-          <a:xfrm>
-            <a:off x="550863" y="560961"/>
-            <a:ext cx="11090275" cy="1186560"/>
-          </a:xfrm>
-          <a:noFill/>
-        </p:spPr>
-        <p:txBody>
-          <a:bodyPr rtlCol="0" anchor="t"/>
-          <a:lstStyle>
-            <a:defPPr>
-              <a:defRPr lang="it-IT"/>
-            </a:defPPr>
-          </a:lstStyle>
-          <a:p>
-            <a:pPr rtl="0"/>
-            <a:r>
-              <a:rPr lang="it-IT" dirty="0"/>
-              <a:t>Contesto: Diffusione su un grafo</a:t>
-            </a:r>
-          </a:p>
-        </p:txBody>
-      </p:sp>
-      <mc:AlternateContent xmlns:mc="http://schemas.openxmlformats.org/markup-compatibility/2006" xmlns:a14="http://schemas.microsoft.com/office/drawing/2010/main">
-        <mc:Choice Requires="a14">
-          <p:sp>
-            <p:nvSpPr>
-              <p:cNvPr id="4" name="Segnaposto contenuto 3">
-                <a:extLst>
-                  <a:ext uri="{FF2B5EF4-FFF2-40B4-BE49-F238E27FC236}">
-                    <a16:creationId xmlns:a16="http://schemas.microsoft.com/office/drawing/2014/main" id="{5D4B3BE8-7C1F-626F-50C0-E767D8C589E9}"/>
-                  </a:ext>
-                </a:extLst>
-              </p:cNvPr>
-              <p:cNvSpPr>
-                <a:spLocks noGrp="1"/>
-              </p:cNvSpPr>
-              <p:nvPr>
-                <p:ph sz="half" idx="1"/>
-              </p:nvPr>
-            </p:nvSpPr>
-            <p:spPr>
-              <a:xfrm>
-                <a:off x="550862" y="1917064"/>
-                <a:ext cx="10421938" cy="4744036"/>
-              </a:xfrm>
-            </p:spPr>
-            <p:txBody>
-              <a:bodyPr>
-                <a:normAutofit/>
-              </a:bodyPr>
-              <a:lstStyle/>
-              <a:p>
-                <a:pPr marL="285750" indent="-285750">
-                  <a:buFont typeface="Arial" panose="020B0604020202020204" pitchFamily="34" charset="0"/>
-                  <a:buChar char="•"/>
-                </a:pPr>
-                <a:r>
-                  <a:rPr lang="it-IT" dirty="0"/>
-                  <a:t>Abbiamo ottenuto un sistema di equazioni differenziali ordinarie (ODE) accoppiate dalla matrice Laplaciana</a:t>
-                </a:r>
-              </a:p>
-              <a:p>
-                <a:pPr marL="285750" indent="-285750">
-                  <a:buFont typeface="Arial" panose="020B0604020202020204" pitchFamily="34" charset="0"/>
-                  <a:buChar char="•"/>
-                </a:pPr>
-                <a:r>
-                  <a:rPr lang="it-IT" dirty="0"/>
-                  <a:t>Sfruttiamo la decomposizione spettrale </a:t>
-                </a:r>
-                <a14:m>
-                  <m:oMath xmlns:m="http://schemas.openxmlformats.org/officeDocument/2006/math">
-                    <m:r>
-                      <a:rPr lang="it-IT" i="1">
-                        <a:latin typeface="Cambria Math" panose="02040503050406030204" pitchFamily="18" charset="0"/>
-                      </a:rPr>
-                      <m:t>𝐿</m:t>
-                    </m:r>
+                    </m:nary>
                     <m:r>
                       <a:rPr lang="it-IT" i="1">
                         <a:latin typeface="Cambria Math" panose="02040503050406030204" pitchFamily="18" charset="0"/>
@@ -19253,13 +19619,56 @@
                       <m:t>𝑃</m:t>
                     </m:r>
                     <m:r>
-                      <m:rPr>
-                        <m:sty m:val="p"/>
-                      </m:rPr>
-                      <a:rPr lang="it-IT">
+                      <a:rPr lang="it-IT" i="1">
                         <a:latin typeface="Cambria Math" panose="02040503050406030204" pitchFamily="18" charset="0"/>
                       </a:rPr>
-                      <m:t>Λ</m:t>
+                      <m:t>⋅</m:t>
+                    </m:r>
+                    <m:sSup>
+                      <m:sSupPr>
+                        <m:ctrlPr>
+                          <a:rPr lang="it-IT" i="1">
+                            <a:latin typeface="Cambria Math" panose="02040503050406030204" pitchFamily="18" charset="0"/>
+                          </a:rPr>
+                        </m:ctrlPr>
+                      </m:sSupPr>
+                      <m:e>
+                        <m:r>
+                          <a:rPr lang="it-IT" i="1">
+                            <a:latin typeface="Cambria Math" panose="02040503050406030204" pitchFamily="18" charset="0"/>
+                          </a:rPr>
+                          <m:t>𝑒</m:t>
+                        </m:r>
+                      </m:e>
+                      <m:sup>
+                        <m:r>
+                          <a:rPr lang="it-IT" i="1">
+                            <a:latin typeface="Cambria Math" panose="02040503050406030204" pitchFamily="18" charset="0"/>
+                          </a:rPr>
+                          <m:t>−</m:t>
+                        </m:r>
+                        <m:r>
+                          <m:rPr>
+                            <m:sty m:val="p"/>
+                          </m:rPr>
+                          <a:rPr lang="it-IT">
+                            <a:latin typeface="Cambria Math" panose="02040503050406030204" pitchFamily="18" charset="0"/>
+                          </a:rPr>
+                          <m:t>Λ</m:t>
+                        </m:r>
+                        <m:r>
+                          <a:rPr lang="it-IT" i="1">
+                            <a:latin typeface="Cambria Math" panose="02040503050406030204" pitchFamily="18" charset="0"/>
+                          </a:rPr>
+                          <m:t>𝑡</m:t>
+                        </m:r>
+                      </m:sup>
+                    </m:sSup>
+                    <m:r>
+                      <a:rPr lang="it-IT" i="1">
+                        <a:latin typeface="Cambria Math" panose="02040503050406030204" pitchFamily="18" charset="0"/>
+                      </a:rPr>
+                      <m:t>⋅</m:t>
                     </m:r>
                     <m:sSup>
                       <m:sSupPr>
@@ -19286,21 +19695,38 @@
                         </m:r>
                       </m:sup>
                     </m:sSup>
+                    <m:r>
+                      <a:rPr lang="it-IT" i="1">
+                        <a:latin typeface="Cambria Math" panose="02040503050406030204" pitchFamily="18" charset="0"/>
+                        <a:ea typeface="Cambria Math" panose="02040503050406030204" pitchFamily="18" charset="0"/>
+                      </a:rPr>
+                      <m:t>∙</m:t>
+                    </m:r>
+                    <m:r>
+                      <a:rPr lang="it-IT" i="1">
+                        <a:latin typeface="Cambria Math" panose="02040503050406030204" pitchFamily="18" charset="0"/>
+                      </a:rPr>
+                      <m:t>𝑢</m:t>
+                    </m:r>
+                    <m:d>
+                      <m:dPr>
+                        <m:ctrlPr>
+                          <a:rPr lang="it-IT" i="1">
+                            <a:latin typeface="Cambria Math" panose="02040503050406030204" pitchFamily="18" charset="0"/>
+                          </a:rPr>
+                        </m:ctrlPr>
+                      </m:dPr>
+                      <m:e>
+                        <m:r>
+                          <a:rPr lang="it-IT" i="1">
+                            <a:latin typeface="Cambria Math" panose="02040503050406030204" pitchFamily="18" charset="0"/>
+                          </a:rPr>
+                          <m:t>0</m:t>
+                        </m:r>
+                      </m:e>
+                    </m:d>
                   </m:oMath>
                 </a14:m>
-                <a:r>
-                  <a:rPr lang="it-IT" dirty="0"/>
-                  <a:t> per risolverla:</a:t>
-                </a:r>
-                <a:br>
-                  <a:rPr lang="it-IT" dirty="0"/>
-                </a:br>
-                <a:br>
-                  <a:rPr lang="it-IT" dirty="0"/>
-                </a:br>
-                <a:br>
-                  <a:rPr lang="it-IT" dirty="0"/>
-                </a:br>
                 <a:endParaRPr lang="it-IT" dirty="0"/>
               </a:p>
               <a:p>
@@ -19308,23 +19734,98 @@
                   <a:buFont typeface="Arial" panose="020B0604020202020204" pitchFamily="34" charset="0"/>
                   <a:buChar char="•"/>
                 </a:pPr>
+                <a14:m>
+                  <m:oMath xmlns:m="http://schemas.openxmlformats.org/officeDocument/2006/math">
+                    <m:r>
+                      <a:rPr lang="it-IT" i="1" dirty="0" smtClean="0">
+                        <a:latin typeface="Cambria Math" panose="02040503050406030204" pitchFamily="18" charset="0"/>
+                      </a:rPr>
+                      <m:t>𝜙</m:t>
+                    </m:r>
+                    <m:r>
+                      <a:rPr lang="it-IT" i="1" dirty="0" smtClean="0">
+                        <a:latin typeface="Cambria Math" panose="02040503050406030204" pitchFamily="18" charset="0"/>
+                      </a:rPr>
+                      <m:t>𝑘</m:t>
+                    </m:r>
+                  </m:oMath>
+                </a14:m>
+                <a:r>
+                  <a:rPr lang="it-IT" i="1" dirty="0"/>
+                  <a:t> </a:t>
+                </a:r>
                 <a:r>
                   <a:rPr lang="it-IT" dirty="0"/>
-                  <a:t>Risultato: somma pesata dei modi naturali di vibrazione del grafo che decadono nel tempo</a:t>
+                  <a:t>rappresenta i modi stazionari</a:t>
                 </a:r>
-                <a:br>
-                  <a:rPr lang="it-IT" dirty="0"/>
-                </a:br>
-                <a:endParaRPr lang="it-IT" dirty="0"/>
               </a:p>
               <a:p>
                 <a:pPr marL="285750" indent="-285750">
                   <a:buFont typeface="Arial" panose="020B0604020202020204" pitchFamily="34" charset="0"/>
                   <a:buChar char="•"/>
                 </a:pPr>
+                <a14:m>
+                  <m:oMath xmlns:m="http://schemas.openxmlformats.org/officeDocument/2006/math">
+                    <m:r>
+                      <a:rPr lang="it-IT" i="1" dirty="0" smtClean="0">
+                        <a:latin typeface="Cambria Math" panose="02040503050406030204" pitchFamily="18" charset="0"/>
+                      </a:rPr>
+                      <m:t>𝜆</m:t>
+                    </m:r>
+                    <m:r>
+                      <a:rPr lang="it-IT" i="1" dirty="0" smtClean="0">
+                        <a:latin typeface="Cambria Math" panose="02040503050406030204" pitchFamily="18" charset="0"/>
+                      </a:rPr>
+                      <m:t>𝑘</m:t>
+                    </m:r>
+                  </m:oMath>
+                </a14:m>
+                <a:r>
+                  <a:rPr lang="it-IT" i="1" dirty="0"/>
+                  <a:t> </a:t>
+                </a:r>
                 <a:r>
                   <a:rPr lang="it-IT" dirty="0"/>
-                  <a:t>Possiamo calcolare lo stato del sistema a qualsiasi tempo </a:t>
+                  <a:t>rappresenta la velocità di decadimento, con </a:t>
+                </a:r>
+                <a14:m>
+                  <m:oMath xmlns:m="http://schemas.openxmlformats.org/officeDocument/2006/math">
+                    <m:sSub>
+                      <m:sSubPr>
+                        <m:ctrlPr>
+                          <a:rPr lang="it-IT" b="0" i="1" dirty="0" smtClean="0">
+                            <a:latin typeface="Cambria Math" panose="02040503050406030204" pitchFamily="18" charset="0"/>
+                          </a:rPr>
+                        </m:ctrlPr>
+                      </m:sSubPr>
+                      <m:e>
+                        <m:r>
+                          <a:rPr lang="it-IT" i="1" dirty="0" smtClean="0">
+                            <a:latin typeface="Cambria Math" panose="02040503050406030204" pitchFamily="18" charset="0"/>
+                          </a:rPr>
+                          <m:t>𝜆</m:t>
+                        </m:r>
+                      </m:e>
+                      <m:sub>
+                        <m:r>
+                          <a:rPr lang="it-IT" i="1" dirty="0" smtClean="0">
+                            <a:latin typeface="Cambria Math" panose="02040503050406030204" pitchFamily="18" charset="0"/>
+                          </a:rPr>
+                          <m:t>1</m:t>
+                        </m:r>
+                      </m:sub>
+                    </m:sSub>
+                    <m:r>
+                      <a:rPr lang="it-IT" i="1" dirty="0" smtClean="0">
+                        <a:latin typeface="Cambria Math" panose="02040503050406030204" pitchFamily="18" charset="0"/>
+                      </a:rPr>
+                      <m:t>=0</m:t>
+                    </m:r>
+                  </m:oMath>
+                </a14:m>
+                <a:r>
+                  <a:rPr lang="it-IT" dirty="0"/>
+                  <a:t> significando stato di equilibrio, mentre </a:t>
                 </a:r>
                 <a14:m>
                   <m:oMath xmlns:m="http://schemas.openxmlformats.org/officeDocument/2006/math">
@@ -19332,25 +19833,35 @@
                       <a:rPr lang="it-IT" i="1" dirty="0" smtClean="0">
                         <a:latin typeface="Cambria Math" panose="02040503050406030204" pitchFamily="18" charset="0"/>
                       </a:rPr>
-                      <m:t>𝑡</m:t>
+                      <m:t>𝜆</m:t>
+                    </m:r>
+                    <m:r>
+                      <a:rPr lang="it-IT" i="1" dirty="0" smtClean="0">
+                        <a:latin typeface="Cambria Math" panose="02040503050406030204" pitchFamily="18" charset="0"/>
+                      </a:rPr>
+                      <m:t>𝑘</m:t>
                     </m:r>
                   </m:oMath>
                 </a14:m>
                 <a:r>
+                  <a:rPr lang="it-IT" i="1" dirty="0"/>
+                  <a:t> </a:t>
+                </a:r>
+                <a:r>
                   <a:rPr lang="it-IT" dirty="0"/>
-                  <a:t> usando l’algebra</a:t>
+                  <a:t>grandi significano decadimento veloce</a:t>
                 </a:r>
               </a:p>
             </p:txBody>
           </p:sp>
         </mc:Choice>
-        <mc:Fallback xmlns="">
+        <mc:Fallback>
           <p:sp>
             <p:nvSpPr>
               <p:cNvPr id="4" name="Segnaposto contenuto 3">
                 <a:extLst>
                   <a:ext uri="{FF2B5EF4-FFF2-40B4-BE49-F238E27FC236}">
-                    <a16:creationId xmlns:a16="http://schemas.microsoft.com/office/drawing/2014/main" id="{5D4B3BE8-7C1F-626F-50C0-E767D8C589E9}"/>
+                    <a16:creationId xmlns:a16="http://schemas.microsoft.com/office/drawing/2014/main" id="{6FCEADEE-3C8D-024B-524F-96747380BAEF}"/>
                   </a:ext>
                 </a:extLst>
               </p:cNvPr>
@@ -19363,13 +19874,13 @@
             </p:nvSpPr>
             <p:spPr>
               <a:xfrm>
-                <a:off x="550862" y="1917064"/>
-                <a:ext cx="10421938" cy="4744036"/>
+                <a:off x="550862" y="1563105"/>
+                <a:ext cx="9271564" cy="4744036"/>
               </a:xfrm>
               <a:blipFill>
                 <a:blip r:embed="rId3"/>
                 <a:stretch>
-                  <a:fillRect l="-1228" t="-1540"/>
+                  <a:fillRect l="-1381" t="-1540"/>
                 </a:stretch>
               </a:blipFill>
             </p:spPr>
@@ -19393,7 +19904,7 @@
           <p:cNvPr id="10" name="Immagine 9" descr="Immagine che contiene schizzo, arte, disegno, cerchio&#10;&#10;Il contenuto generato dall'IA potrebbe non essere corretto.">
             <a:extLst>
               <a:ext uri="{FF2B5EF4-FFF2-40B4-BE49-F238E27FC236}">
-                <a16:creationId xmlns:a16="http://schemas.microsoft.com/office/drawing/2014/main" id="{3C9A1D36-3178-9521-4CD6-9B9803524856}"/>
+                <a16:creationId xmlns:a16="http://schemas.microsoft.com/office/drawing/2014/main" id="{07D0CA84-2E76-3ED3-6B7E-61531D4C6C69}"/>
               </a:ext>
             </a:extLst>
           </p:cNvPr>
@@ -19431,7 +19942,7 @@
           <p:cNvPr id="11" name="Segnaposto numero diapositiva 10">
             <a:extLst>
               <a:ext uri="{FF2B5EF4-FFF2-40B4-BE49-F238E27FC236}">
-                <a16:creationId xmlns:a16="http://schemas.microsoft.com/office/drawing/2014/main" id="{B08714FC-7ECF-ED2A-DB80-D14DE0102D0D}"/>
+                <a16:creationId xmlns:a16="http://schemas.microsoft.com/office/drawing/2014/main" id="{EA1B8BD7-C814-9CE4-1132-6516A07E2C63}"/>
               </a:ext>
             </a:extLst>
           </p:cNvPr>
@@ -19450,278 +19961,51 @@
             <a:pPr rtl="0"/>
             <a:fld id="{CBD12358-51D2-46B3-9BDE-DF29528B9454}" type="slidenum">
               <a:rPr lang="it-IT" smtClean="0"/>
-              <a:t>8</a:t>
+              <a:t>7</a:t>
             </a:fld>
             <a:endParaRPr lang="it-IT" dirty="0"/>
           </a:p>
         </p:txBody>
       </p:sp>
-      <p:pic>
-        <p:nvPicPr>
-          <p:cNvPr id="6" name="Immagine 5" descr="Immagine che contiene testo, Carattere, calligrafia, nero&#10;&#10;Il contenuto generato dall'IA potrebbe non essere corretto.">
+      <p:sp>
+        <p:nvSpPr>
+          <p:cNvPr id="3" name="CasellaDiTesto 2">
             <a:extLst>
               <a:ext uri="{FF2B5EF4-FFF2-40B4-BE49-F238E27FC236}">
-                <a16:creationId xmlns:a16="http://schemas.microsoft.com/office/drawing/2014/main" id="{F4932EC7-E0DD-A55D-929B-F5B35868A575}"/>
+                <a16:creationId xmlns:a16="http://schemas.microsoft.com/office/drawing/2014/main" id="{C0254A30-29CE-3EBB-F729-187972E57ECD}"/>
               </a:ext>
             </a:extLst>
           </p:cNvPr>
-          <p:cNvPicPr>
-            <a:picLocks noChangeAspect="1"/>
-          </p:cNvPicPr>
+          <p:cNvSpPr txBox="1"/>
           <p:nvPr/>
-        </p:nvPicPr>
-        <p:blipFill>
-          <a:blip r:embed="rId5"/>
-          <a:stretch>
-            <a:fillRect/>
-          </a:stretch>
-        </p:blipFill>
+        </p:nvSpPr>
         <p:spPr>
           <a:xfrm>
-            <a:off x="791851" y="2781264"/>
-            <a:ext cx="7022970" cy="1035018"/>
+            <a:off x="683341" y="5431820"/>
+            <a:ext cx="65" cy="369332"/>
           </a:xfrm>
           <a:prstGeom prst="rect">
             <a:avLst/>
           </a:prstGeom>
+          <a:noFill/>
         </p:spPr>
-      </p:pic>
-      <mc:AlternateContent xmlns:mc="http://schemas.openxmlformats.org/markup-compatibility/2006" xmlns:a14="http://schemas.microsoft.com/office/drawing/2010/main">
-        <mc:Choice Requires="a14">
-          <p:sp>
-            <p:nvSpPr>
-              <p:cNvPr id="8" name="CasellaDiTesto 7">
-                <a:extLst>
-                  <a:ext uri="{FF2B5EF4-FFF2-40B4-BE49-F238E27FC236}">
-                    <a16:creationId xmlns:a16="http://schemas.microsoft.com/office/drawing/2014/main" id="{37B89364-F8D6-E4C0-A2A5-F940F6DFE011}"/>
-                  </a:ext>
-                </a:extLst>
-              </p:cNvPr>
-              <p:cNvSpPr txBox="1"/>
-              <p:nvPr/>
-            </p:nvSpPr>
-            <p:spPr>
-              <a:xfrm>
-                <a:off x="791851" y="4213485"/>
-                <a:ext cx="3492046" cy="377667"/>
-              </a:xfrm>
-              <a:prstGeom prst="rect">
-                <a:avLst/>
-              </a:prstGeom>
-              <a:noFill/>
-            </p:spPr>
-            <p:txBody>
-              <a:bodyPr wrap="none" lIns="0" tIns="0" rIns="0" bIns="0" rtlCol="0">
-                <a:spAutoFit/>
-              </a:bodyPr>
-              <a:lstStyle/>
-              <a:p>
-                <a:pPr/>
-                <a14:m>
-                  <m:oMathPara xmlns:m="http://schemas.openxmlformats.org/officeDocument/2006/math">
-                    <m:oMathParaPr>
-                      <m:jc m:val="centerGroup"/>
-                    </m:oMathParaPr>
-                    <m:oMath xmlns:m="http://schemas.openxmlformats.org/officeDocument/2006/math">
-                      <m:r>
-                        <a:rPr lang="it-IT" sz="2400" b="0" i="1" smtClean="0">
-                          <a:latin typeface="Cambria Math" panose="02040503050406030204" pitchFamily="18" charset="0"/>
-                        </a:rPr>
-                        <m:t>𝑢</m:t>
-                      </m:r>
-                      <m:d>
-                        <m:dPr>
-                          <m:ctrlPr>
-                            <a:rPr lang="it-IT" sz="2400" i="1" smtClean="0">
-                              <a:latin typeface="Cambria Math" panose="02040503050406030204" pitchFamily="18" charset="0"/>
-                            </a:rPr>
-                          </m:ctrlPr>
-                        </m:dPr>
-                        <m:e>
-                          <m:r>
-                            <a:rPr lang="it-IT" sz="2400" i="1" smtClean="0">
-                              <a:latin typeface="Cambria Math" panose="02040503050406030204" pitchFamily="18" charset="0"/>
-                            </a:rPr>
-                            <m:t>𝑡</m:t>
-                          </m:r>
-                        </m:e>
-                      </m:d>
-                      <m:r>
-                        <a:rPr lang="it-IT" sz="2400" i="1" smtClean="0">
-                          <a:latin typeface="Cambria Math" panose="02040503050406030204" pitchFamily="18" charset="0"/>
-                        </a:rPr>
-                        <m:t>=</m:t>
-                      </m:r>
-                      <m:r>
-                        <a:rPr lang="it-IT" sz="2400" i="1" smtClean="0">
-                          <a:latin typeface="Cambria Math" panose="02040503050406030204" pitchFamily="18" charset="0"/>
-                        </a:rPr>
-                        <m:t>𝑃</m:t>
-                      </m:r>
-                      <m:r>
-                        <a:rPr lang="it-IT" sz="2400" i="1" smtClean="0">
-                          <a:latin typeface="Cambria Math" panose="02040503050406030204" pitchFamily="18" charset="0"/>
-                        </a:rPr>
-                        <m:t>⋅</m:t>
-                      </m:r>
-                      <m:sSup>
-                        <m:sSupPr>
-                          <m:ctrlPr>
-                            <a:rPr lang="it-IT" sz="2400" i="1" smtClean="0">
-                              <a:latin typeface="Cambria Math" panose="02040503050406030204" pitchFamily="18" charset="0"/>
-                            </a:rPr>
-                          </m:ctrlPr>
-                        </m:sSupPr>
-                        <m:e>
-                          <m:r>
-                            <a:rPr lang="it-IT" sz="2400" i="1" smtClean="0">
-                              <a:latin typeface="Cambria Math" panose="02040503050406030204" pitchFamily="18" charset="0"/>
-                            </a:rPr>
-                            <m:t>𝑒</m:t>
-                          </m:r>
-                        </m:e>
-                        <m:sup>
-                          <m:r>
-                            <a:rPr lang="it-IT" sz="2400" i="1" smtClean="0">
-                              <a:latin typeface="Cambria Math" panose="02040503050406030204" pitchFamily="18" charset="0"/>
-                            </a:rPr>
-                            <m:t>−</m:t>
-                          </m:r>
-                          <m:r>
-                            <m:rPr>
-                              <m:sty m:val="p"/>
-                            </m:rPr>
-                            <a:rPr lang="it-IT" sz="2400" i="0" smtClean="0">
-                              <a:latin typeface="Cambria Math" panose="02040503050406030204" pitchFamily="18" charset="0"/>
-                            </a:rPr>
-                            <m:t>Λ</m:t>
-                          </m:r>
-                          <m:r>
-                            <a:rPr lang="it-IT" sz="2400" i="1" smtClean="0">
-                              <a:latin typeface="Cambria Math" panose="02040503050406030204" pitchFamily="18" charset="0"/>
-                            </a:rPr>
-                            <m:t>𝑡</m:t>
-                          </m:r>
-                        </m:sup>
-                      </m:sSup>
-                      <m:r>
-                        <a:rPr lang="it-IT" sz="2400" i="1" smtClean="0">
-                          <a:latin typeface="Cambria Math" panose="02040503050406030204" pitchFamily="18" charset="0"/>
-                        </a:rPr>
-                        <m:t>⋅</m:t>
-                      </m:r>
-                      <m:sSup>
-                        <m:sSupPr>
-                          <m:ctrlPr>
-                            <a:rPr lang="it-IT" sz="2400" i="1">
-                              <a:latin typeface="Cambria Math" panose="02040503050406030204" pitchFamily="18" charset="0"/>
-                            </a:rPr>
-                          </m:ctrlPr>
-                        </m:sSupPr>
-                        <m:e>
-                          <m:r>
-                            <a:rPr lang="it-IT" sz="2400" i="1">
-                              <a:latin typeface="Cambria Math" panose="02040503050406030204" pitchFamily="18" charset="0"/>
-                            </a:rPr>
-                            <m:t>𝑃</m:t>
-                          </m:r>
-                        </m:e>
-                        <m:sup>
-                          <m:r>
-                            <a:rPr lang="it-IT" sz="2400" i="1">
-                              <a:latin typeface="Cambria Math" panose="02040503050406030204" pitchFamily="18" charset="0"/>
-                            </a:rPr>
-                            <m:t>𝑇</m:t>
-                          </m:r>
-                        </m:sup>
-                      </m:sSup>
-                      <m:r>
-                        <a:rPr lang="it-IT" sz="2400" i="1" smtClean="0">
-                          <a:latin typeface="Cambria Math" panose="02040503050406030204" pitchFamily="18" charset="0"/>
-                          <a:ea typeface="Cambria Math" panose="02040503050406030204" pitchFamily="18" charset="0"/>
-                        </a:rPr>
-                        <m:t>∙</m:t>
-                      </m:r>
-                      <m:r>
-                        <a:rPr lang="it-IT" sz="2400" b="0" i="1">
-                          <a:latin typeface="Cambria Math" panose="02040503050406030204" pitchFamily="18" charset="0"/>
-                        </a:rPr>
-                        <m:t>𝑢</m:t>
-                      </m:r>
-                      <m:d>
-                        <m:dPr>
-                          <m:ctrlPr>
-                            <a:rPr lang="it-IT" sz="2400" i="1">
-                              <a:latin typeface="Cambria Math" panose="02040503050406030204" pitchFamily="18" charset="0"/>
-                            </a:rPr>
-                          </m:ctrlPr>
-                        </m:dPr>
-                        <m:e>
-                          <m:r>
-                            <a:rPr lang="it-IT" sz="2400" i="1">
-                              <a:latin typeface="Cambria Math" panose="02040503050406030204" pitchFamily="18" charset="0"/>
-                            </a:rPr>
-                            <m:t>0</m:t>
-                          </m:r>
-                        </m:e>
-                      </m:d>
-                    </m:oMath>
-                  </m:oMathPara>
-                </a14:m>
-                <a:endParaRPr lang="it-IT" sz="2400" dirty="0"/>
-              </a:p>
-            </p:txBody>
-          </p:sp>
-        </mc:Choice>
-        <mc:Fallback xmlns="">
-          <p:sp>
-            <p:nvSpPr>
-              <p:cNvPr id="8" name="CasellaDiTesto 7">
-                <a:extLst>
-                  <a:ext uri="{FF2B5EF4-FFF2-40B4-BE49-F238E27FC236}">
-                    <a16:creationId xmlns:a16="http://schemas.microsoft.com/office/drawing/2014/main" id="{37B89364-F8D6-E4C0-A2A5-F940F6DFE011}"/>
-                  </a:ext>
-                </a:extLst>
-              </p:cNvPr>
-              <p:cNvSpPr txBox="1">
-                <a:spLocks noRot="1" noChangeAspect="1" noMove="1" noResize="1" noEditPoints="1" noAdjustHandles="1" noChangeArrowheads="1" noChangeShapeType="1" noTextEdit="1"/>
-              </p:cNvSpPr>
-              <p:nvPr/>
-            </p:nvSpPr>
-            <p:spPr>
-              <a:xfrm>
-                <a:off x="791851" y="4213485"/>
-                <a:ext cx="3492046" cy="377667"/>
-              </a:xfrm>
-              <a:prstGeom prst="rect">
-                <a:avLst/>
-              </a:prstGeom>
-              <a:blipFill>
-                <a:blip r:embed="rId6"/>
-                <a:stretch>
-                  <a:fillRect l="-524" b="-9677"/>
-                </a:stretch>
-              </a:blipFill>
-            </p:spPr>
-            <p:txBody>
-              <a:bodyPr/>
-              <a:lstStyle/>
-              <a:p>
-                <a:r>
-                  <a:rPr lang="it-IT">
-                    <a:noFill/>
-                  </a:rPr>
-                  <a:t> </a:t>
-                </a:r>
-              </a:p>
-            </p:txBody>
-          </p:sp>
-        </mc:Fallback>
-      </mc:AlternateContent>
+        <p:txBody>
+          <a:bodyPr wrap="none" lIns="0" tIns="0" rIns="0" bIns="0" rtlCol="0">
+            <a:spAutoFit/>
+          </a:bodyPr>
+          <a:lstStyle/>
+          <a:p>
+            <a:endParaRPr lang="it-IT" sz="2400" i="1" dirty="0">
+              <a:latin typeface="Cambria" panose="02040503050406030204" pitchFamily="18" charset="0"/>
+              <a:ea typeface="Cambria" panose="02040503050406030204" pitchFamily="18" charset="0"/>
+            </a:endParaRPr>
+          </a:p>
+        </p:txBody>
+      </p:sp>
     </p:spTree>
     <p:extLst>
       <p:ext uri="{BB962C8B-B14F-4D97-AF65-F5344CB8AC3E}">
-        <p14:creationId xmlns:p14="http://schemas.microsoft.com/office/powerpoint/2010/main" val="1814893304"/>
+        <p14:creationId xmlns:p14="http://schemas.microsoft.com/office/powerpoint/2010/main" val="4161560511"/>
       </p:ext>
     </p:extLst>
   </p:cSld>
@@ -19731,7 +20015,7 @@
 </p:sld>
 </file>
 
-<file path=ppt/slides/slide9.xml><?xml version="1.0" encoding="utf-8"?>
+<file path=ppt/slides/slide8.xml><?xml version="1.0" encoding="utf-8"?>
 <p:sld xmlns:a="http://schemas.openxmlformats.org/drawingml/2006/main" xmlns:r="http://schemas.openxmlformats.org/officeDocument/2006/relationships" xmlns:p="http://schemas.openxmlformats.org/presentationml/2006/main">
   <p:cSld>
     <p:spTree>
@@ -19739,7 +20023,7 @@
         <p:cNvPr id="1" name="">
           <a:extLst>
             <a:ext uri="{FF2B5EF4-FFF2-40B4-BE49-F238E27FC236}">
-              <a16:creationId xmlns:a16="http://schemas.microsoft.com/office/drawing/2014/main" id="{350CA2DF-FFBC-A3C8-AF2C-90549E63038B}"/>
+              <a16:creationId xmlns:a16="http://schemas.microsoft.com/office/drawing/2014/main" id="{1DA8A876-2CF3-D573-32FC-576C1B4D7843}"/>
             </a:ext>
           </a:extLst>
         </p:cNvPr>
@@ -19759,7 +20043,7 @@
           <p:cNvPr id="2" name="Titolo 1">
             <a:extLst>
               <a:ext uri="{FF2B5EF4-FFF2-40B4-BE49-F238E27FC236}">
-                <a16:creationId xmlns:a16="http://schemas.microsoft.com/office/drawing/2014/main" id="{6CF8B1E2-052B-648B-1E0B-E05491B5E62D}"/>
+                <a16:creationId xmlns:a16="http://schemas.microsoft.com/office/drawing/2014/main" id="{ACB4984E-D363-862F-0DC1-550F52E943D1}"/>
               </a:ext>
             </a:extLst>
           </p:cNvPr>
@@ -19785,99 +20069,822 @@
             </a:defPPr>
           </a:lstStyle>
           <a:p>
-            <a:pPr rtl="0"/>
             <a:r>
               <a:rPr lang="it-IT" dirty="0"/>
-              <a:t>Scopo del progetto: Ricostruzione di un grafo</a:t>
+              <a:t>Esperimenti e casi</a:t>
             </a:r>
           </a:p>
         </p:txBody>
       </p:sp>
-      <p:sp>
-        <p:nvSpPr>
-          <p:cNvPr id="4" name="Segnaposto contenuto 3">
-            <a:extLst>
-              <a:ext uri="{FF2B5EF4-FFF2-40B4-BE49-F238E27FC236}">
-                <a16:creationId xmlns:a16="http://schemas.microsoft.com/office/drawing/2014/main" id="{B6A6A8E9-C260-0669-9B9C-87D9E2C4CF81}"/>
-              </a:ext>
-            </a:extLst>
-          </p:cNvPr>
-          <p:cNvSpPr>
-            <a:spLocks noGrp="1"/>
-          </p:cNvSpPr>
-          <p:nvPr>
-            <p:ph sz="half" idx="1"/>
-          </p:nvPr>
-        </p:nvSpPr>
-        <p:spPr>
-          <a:xfrm>
-            <a:off x="550862" y="1917064"/>
-            <a:ext cx="7825832" cy="4744036"/>
-          </a:xfrm>
-        </p:spPr>
-        <p:txBody>
-          <a:bodyPr>
-            <a:normAutofit/>
-          </a:bodyPr>
-          <a:lstStyle/>
-          <a:p>
-            <a:pPr marL="285750" indent="-285750">
-              <a:buFont typeface="Arial" panose="020B0604020202020204" pitchFamily="34" charset="0"/>
-              <a:buChar char="•"/>
-            </a:pPr>
-            <a:r>
-              <a:rPr lang="it-IT" dirty="0"/>
-              <a:t>Un dato fenomeno evolve su un grafo per diffusione</a:t>
-            </a:r>
-          </a:p>
-          <a:p>
-            <a:pPr marL="285750" indent="-285750">
-              <a:buFont typeface="Arial" panose="020B0604020202020204" pitchFamily="34" charset="0"/>
-              <a:buChar char="•"/>
-            </a:pPr>
-            <a:r>
-              <a:rPr lang="it-IT" dirty="0"/>
-              <a:t>Non c’è conoscenza del grafo</a:t>
-            </a:r>
-          </a:p>
-          <a:p>
-            <a:pPr marL="285750" indent="-285750">
-              <a:buFont typeface="Arial" panose="020B0604020202020204" pitchFamily="34" charset="0"/>
-              <a:buChar char="•"/>
-            </a:pPr>
-            <a:r>
-              <a:rPr lang="it-IT" dirty="0"/>
-              <a:t>Ricostruzione possibile grazie a misurazioni di fenomeni diffusivi</a:t>
-            </a:r>
-          </a:p>
-          <a:p>
-            <a:pPr marL="285750" indent="-285750">
-              <a:buFont typeface="Arial" panose="020B0604020202020204" pitchFamily="34" charset="0"/>
-              <a:buChar char="•"/>
-            </a:pPr>
-            <a:r>
-              <a:rPr lang="it-IT" dirty="0"/>
-              <a:t>Idea: partendo a scaldare un nodo, i nodi vicini avrebbero veloce variazione di calore nel tempo, mentre quelli distanti avrebbero una lenta variazione</a:t>
-            </a:r>
-          </a:p>
-          <a:p>
-            <a:pPr marL="285750" indent="-285750">
-              <a:buFont typeface="Arial" panose="020B0604020202020204" pitchFamily="34" charset="0"/>
-              <a:buChar char="•"/>
-            </a:pPr>
-            <a:r>
-              <a:rPr lang="it-IT" dirty="0"/>
-              <a:t>Adatto per tempi sufficientemente brevi</a:t>
-            </a:r>
-          </a:p>
-        </p:txBody>
-      </p:sp>
+      <mc:AlternateContent xmlns:mc="http://schemas.openxmlformats.org/markup-compatibility/2006">
+        <mc:Choice xmlns:a14="http://schemas.microsoft.com/office/drawing/2010/main" Requires="a14">
+          <p:sp>
+            <p:nvSpPr>
+              <p:cNvPr id="4" name="Segnaposto contenuto 3">
+                <a:extLst>
+                  <a:ext uri="{FF2B5EF4-FFF2-40B4-BE49-F238E27FC236}">
+                    <a16:creationId xmlns:a16="http://schemas.microsoft.com/office/drawing/2014/main" id="{E9FDD409-160E-088A-CF19-C8234E3C25C3}"/>
+                  </a:ext>
+                </a:extLst>
+              </p:cNvPr>
+              <p:cNvSpPr>
+                <a:spLocks noGrp="1"/>
+              </p:cNvSpPr>
+              <p:nvPr>
+                <p:ph sz="half" idx="1"/>
+              </p:nvPr>
+            </p:nvSpPr>
+            <p:spPr>
+              <a:xfrm>
+                <a:off x="550862" y="1336962"/>
+                <a:ext cx="9398001" cy="4744036"/>
+              </a:xfrm>
+            </p:spPr>
+            <p:txBody>
+              <a:bodyPr>
+                <a:noAutofit/>
+              </a:bodyPr>
+              <a:lstStyle/>
+              <a:p>
+                <a:pPr marL="285750" indent="-285750">
+                  <a:buFont typeface="Arial" panose="020B0604020202020204" pitchFamily="34" charset="0"/>
+                  <a:buChar char="•"/>
+                </a:pPr>
+                <a:r>
+                  <a:rPr lang="it-IT" dirty="0"/>
+                  <a:t>Non conoscendo </a:t>
+                </a:r>
+                <a14:m>
+                  <m:oMath xmlns:m="http://schemas.openxmlformats.org/officeDocument/2006/math">
+                    <m:r>
+                      <a:rPr lang="it-IT" i="1" dirty="0" smtClean="0">
+                        <a:latin typeface="Cambria Math" panose="02040503050406030204" pitchFamily="18" charset="0"/>
+                      </a:rPr>
+                      <m:t>𝐿</m:t>
+                    </m:r>
+                  </m:oMath>
+                </a14:m>
+                <a:r>
+                  <a:rPr lang="it-IT" dirty="0"/>
+                  <a:t>, </a:t>
+                </a:r>
+                <a14:m>
+                  <m:oMath xmlns:m="http://schemas.openxmlformats.org/officeDocument/2006/math">
+                    <m:r>
+                      <a:rPr lang="it-IT" i="1" dirty="0" smtClean="0">
+                        <a:latin typeface="Cambria Math" panose="02040503050406030204" pitchFamily="18" charset="0"/>
+                      </a:rPr>
+                      <m:t>𝑃</m:t>
+                    </m:r>
+                  </m:oMath>
+                </a14:m>
+                <a:r>
+                  <a:rPr lang="it-IT" dirty="0"/>
+                  <a:t>, o </a:t>
+                </a:r>
+                <a14:m>
+                  <m:oMath xmlns:m="http://schemas.openxmlformats.org/officeDocument/2006/math">
+                    <m:r>
+                      <m:rPr>
+                        <m:sty m:val="p"/>
+                      </m:rPr>
+                      <a:rPr lang="it-IT" i="0" dirty="0" smtClean="0">
+                        <a:latin typeface="Cambria Math" panose="02040503050406030204" pitchFamily="18" charset="0"/>
+                      </a:rPr>
+                      <m:t>Λ</m:t>
+                    </m:r>
+                  </m:oMath>
+                </a14:m>
+                <a:r>
+                  <a:rPr lang="it-IT" dirty="0"/>
+                  <a:t>, ed avendo </a:t>
+                </a:r>
+                <a14:m>
+                  <m:oMath xmlns:m="http://schemas.openxmlformats.org/officeDocument/2006/math">
+                    <m:sSub>
+                      <m:sSubPr>
+                        <m:ctrlPr>
+                          <a:rPr lang="it-IT" b="0" i="1" dirty="0" smtClean="0">
+                            <a:latin typeface="Cambria Math" panose="02040503050406030204" pitchFamily="18" charset="0"/>
+                          </a:rPr>
+                        </m:ctrlPr>
+                      </m:sSubPr>
+                      <m:e>
+                        <m:d>
+                          <m:dPr>
+                            <m:ctrlPr>
+                              <a:rPr lang="it-IT" b="1" i="1" dirty="0" smtClean="0">
+                                <a:latin typeface="Cambria Math" panose="02040503050406030204" pitchFamily="18" charset="0"/>
+                              </a:rPr>
+                            </m:ctrlPr>
+                          </m:dPr>
+                          <m:e>
+                            <m:r>
+                              <a:rPr lang="it-IT" b="1" i="1" dirty="0">
+                                <a:latin typeface="Cambria Math" panose="02040503050406030204" pitchFamily="18" charset="0"/>
+                              </a:rPr>
+                              <m:t>𝒖</m:t>
+                            </m:r>
+                            <m:d>
+                              <m:dPr>
+                                <m:ctrlPr>
+                                  <a:rPr lang="it-IT" b="1" i="1" dirty="0">
+                                    <a:latin typeface="Cambria Math" panose="02040503050406030204" pitchFamily="18" charset="0"/>
+                                  </a:rPr>
+                                </m:ctrlPr>
+                              </m:dPr>
+                              <m:e>
+                                <m:r>
+                                  <a:rPr lang="it-IT" i="1" dirty="0">
+                                    <a:latin typeface="Cambria Math" panose="02040503050406030204" pitchFamily="18" charset="0"/>
+                                  </a:rPr>
+                                  <m:t>𝑗</m:t>
+                                </m:r>
+                              </m:e>
+                            </m:d>
+                            <m:d>
+                              <m:dPr>
+                                <m:ctrlPr>
+                                  <a:rPr lang="it-IT" i="1" dirty="0">
+                                    <a:latin typeface="Cambria Math" panose="02040503050406030204" pitchFamily="18" charset="0"/>
+                                  </a:rPr>
+                                </m:ctrlPr>
+                              </m:dPr>
+                              <m:e>
+                                <m:r>
+                                  <a:rPr lang="it-IT" i="1" dirty="0">
+                                    <a:latin typeface="Cambria Math" panose="02040503050406030204" pitchFamily="18" charset="0"/>
+                                  </a:rPr>
+                                  <m:t>0</m:t>
+                                </m:r>
+                              </m:e>
+                            </m:d>
+                            <m:r>
+                              <a:rPr lang="it-IT" i="1" dirty="0">
+                                <a:latin typeface="Cambria Math" panose="02040503050406030204" pitchFamily="18" charset="0"/>
+                              </a:rPr>
+                              <m:t>,</m:t>
+                            </m:r>
+                            <m:r>
+                              <a:rPr lang="it-IT" b="1" i="1" dirty="0">
+                                <a:latin typeface="Cambria Math" panose="02040503050406030204" pitchFamily="18" charset="0"/>
+                              </a:rPr>
+                              <m:t>𝒖</m:t>
+                            </m:r>
+                            <m:d>
+                              <m:dPr>
+                                <m:ctrlPr>
+                                  <a:rPr lang="it-IT" b="1" i="1" dirty="0">
+                                    <a:latin typeface="Cambria Math" panose="02040503050406030204" pitchFamily="18" charset="0"/>
+                                  </a:rPr>
+                                </m:ctrlPr>
+                              </m:dPr>
+                              <m:e>
+                                <m:r>
+                                  <a:rPr lang="it-IT" i="1" dirty="0">
+                                    <a:latin typeface="Cambria Math" panose="02040503050406030204" pitchFamily="18" charset="0"/>
+                                  </a:rPr>
+                                  <m:t>𝑗</m:t>
+                                </m:r>
+                              </m:e>
+                            </m:d>
+                            <m:d>
+                              <m:dPr>
+                                <m:ctrlPr>
+                                  <a:rPr lang="it-IT" i="1" dirty="0">
+                                    <a:latin typeface="Cambria Math" panose="02040503050406030204" pitchFamily="18" charset="0"/>
+                                  </a:rPr>
+                                </m:ctrlPr>
+                              </m:dPr>
+                              <m:e>
+                                <m:sSub>
+                                  <m:sSubPr>
+                                    <m:ctrlPr>
+                                      <a:rPr lang="it-IT" b="0" i="1" dirty="0" smtClean="0">
+                                        <a:latin typeface="Cambria Math" panose="02040503050406030204" pitchFamily="18" charset="0"/>
+                                      </a:rPr>
+                                    </m:ctrlPr>
+                                  </m:sSubPr>
+                                  <m:e>
+                                    <m:r>
+                                      <a:rPr lang="it-IT" i="1" dirty="0" err="1">
+                                        <a:latin typeface="Cambria Math" panose="02040503050406030204" pitchFamily="18" charset="0"/>
+                                      </a:rPr>
+                                      <m:t>𝑡</m:t>
+                                    </m:r>
+                                  </m:e>
+                                  <m:sub>
+                                    <m:r>
+                                      <a:rPr lang="it-IT" i="1" dirty="0" err="1">
+                                        <a:latin typeface="Cambria Math" panose="02040503050406030204" pitchFamily="18" charset="0"/>
+                                      </a:rPr>
+                                      <m:t>𝑘</m:t>
+                                    </m:r>
+                                  </m:sub>
+                                </m:sSub>
+                              </m:e>
+                            </m:d>
+                          </m:e>
+                        </m:d>
+                      </m:e>
+                      <m:sub>
+                        <m:r>
+                          <a:rPr lang="it-IT" i="1" dirty="0">
+                            <a:latin typeface="Cambria Math" panose="02040503050406030204" pitchFamily="18" charset="0"/>
+                          </a:rPr>
+                          <m:t>𝑗</m:t>
+                        </m:r>
+                        <m:r>
+                          <a:rPr lang="it-IT" i="1" dirty="0">
+                            <a:latin typeface="Cambria Math" panose="02040503050406030204" pitchFamily="18" charset="0"/>
+                          </a:rPr>
+                          <m:t>=1…</m:t>
+                        </m:r>
+                        <m:r>
+                          <a:rPr lang="it-IT" i="1" dirty="0" err="1">
+                            <a:latin typeface="Cambria Math" panose="02040503050406030204" pitchFamily="18" charset="0"/>
+                          </a:rPr>
+                          <m:t>𝑀</m:t>
+                        </m:r>
+                        <m:r>
+                          <a:rPr lang="it-IT" i="1" dirty="0" err="1">
+                            <a:latin typeface="Cambria Math" panose="02040503050406030204" pitchFamily="18" charset="0"/>
+                          </a:rPr>
+                          <m:t>,</m:t>
+                        </m:r>
+                        <m:r>
+                          <a:rPr lang="it-IT" i="1" dirty="0" err="1">
+                            <a:latin typeface="Cambria Math" panose="02040503050406030204" pitchFamily="18" charset="0"/>
+                          </a:rPr>
+                          <m:t>𝑘</m:t>
+                        </m:r>
+                        <m:r>
+                          <a:rPr lang="it-IT" i="1" dirty="0">
+                            <a:latin typeface="Cambria Math" panose="02040503050406030204" pitchFamily="18" charset="0"/>
+                          </a:rPr>
+                          <m:t>=1…</m:t>
+                        </m:r>
+                        <m:r>
+                          <a:rPr lang="it-IT" i="1" dirty="0">
+                            <a:latin typeface="Cambria Math" panose="02040503050406030204" pitchFamily="18" charset="0"/>
+                          </a:rPr>
+                          <m:t>𝑇</m:t>
+                        </m:r>
+                      </m:sub>
+                    </m:sSub>
+                  </m:oMath>
+                </a14:m>
+                <a:r>
+                  <a:rPr lang="it-IT" dirty="0"/>
+                  <a:t>, ovvero coppie di input ed output, la risoluzione effettiva si divide per due sottocasi fondamentali:</a:t>
+                </a:r>
+              </a:p>
+              <a:p>
+                <a:pPr marL="1028700" lvl="1" indent="-342900" fontAlgn="base">
+                  <a:buFont typeface="+mj-lt"/>
+                  <a:buAutoNum type="arabicParenR"/>
+                </a:pPr>
+                <a:r>
+                  <a:rPr lang="it-IT" dirty="0"/>
+                  <a:t>Dati sovrabbondanti (caso </a:t>
+                </a:r>
+                <a14:m>
+                  <m:oMath xmlns:m="http://schemas.openxmlformats.org/officeDocument/2006/math">
+                    <m:r>
+                      <a:rPr lang="it-IT" i="1" dirty="0" smtClean="0">
+                        <a:latin typeface="Cambria Math" panose="02040503050406030204" pitchFamily="18" charset="0"/>
+                      </a:rPr>
+                      <m:t>𝑀</m:t>
+                    </m:r>
+                    <m:r>
+                      <a:rPr lang="it-IT" i="1" dirty="0" smtClean="0">
+                        <a:latin typeface="Cambria Math" panose="02040503050406030204" pitchFamily="18" charset="0"/>
+                      </a:rPr>
+                      <m:t>≥</m:t>
+                    </m:r>
+                    <m:r>
+                      <a:rPr lang="it-IT" i="1" dirty="0" smtClean="0">
+                        <a:latin typeface="Cambria Math" panose="02040503050406030204" pitchFamily="18" charset="0"/>
+                      </a:rPr>
+                      <m:t>𝑚</m:t>
+                    </m:r>
+                  </m:oMath>
+                </a14:m>
+                <a:r>
+                  <a:rPr lang="it-IT" dirty="0"/>
+                  <a:t>): esperimenti con condizioni iniziali linearmente indipendenti. In questo caso possiamo direttamente stimare la dinamica con il rapporto incrementale discretizzato e approssimando </a:t>
+                </a:r>
+                <a14:m>
+                  <m:oMath xmlns:m="http://schemas.openxmlformats.org/officeDocument/2006/math">
+                    <m:r>
+                      <a:rPr lang="it-IT" i="1" dirty="0" smtClean="0">
+                        <a:latin typeface="Cambria Math" panose="02040503050406030204" pitchFamily="18" charset="0"/>
+                      </a:rPr>
+                      <m:t>𝐿</m:t>
+                    </m:r>
+                    <m:r>
+                      <a:rPr lang="it-IT" i="1" dirty="0" smtClean="0">
+                        <a:latin typeface="Cambria Math" panose="02040503050406030204" pitchFamily="18" charset="0"/>
+                      </a:rPr>
+                      <m:t>≈−</m:t>
+                    </m:r>
+                    <m:acc>
+                      <m:accPr>
+                        <m:chr m:val="̇"/>
+                        <m:ctrlPr>
+                          <a:rPr lang="it-IT" i="1" dirty="0" smtClean="0">
+                            <a:latin typeface="Cambria Math" panose="02040503050406030204" pitchFamily="18" charset="0"/>
+                          </a:rPr>
+                        </m:ctrlPr>
+                      </m:accPr>
+                      <m:e>
+                        <m:r>
+                          <a:rPr lang="it-IT" b="0" i="1" dirty="0" smtClean="0">
+                            <a:latin typeface="Cambria Math" panose="02040503050406030204" pitchFamily="18" charset="0"/>
+                          </a:rPr>
+                          <m:t>𝑈</m:t>
+                        </m:r>
+                      </m:e>
+                    </m:acc>
+                    <m:sSup>
+                      <m:sSupPr>
+                        <m:ctrlPr>
+                          <a:rPr lang="it-IT" i="1" dirty="0" smtClean="0">
+                            <a:latin typeface="Cambria Math" panose="02040503050406030204" pitchFamily="18" charset="0"/>
+                          </a:rPr>
+                        </m:ctrlPr>
+                      </m:sSupPr>
+                      <m:e>
+                        <m:r>
+                          <a:rPr lang="it-IT" i="1" dirty="0" smtClean="0">
+                            <a:latin typeface="Cambria Math" panose="02040503050406030204" pitchFamily="18" charset="0"/>
+                          </a:rPr>
+                          <m:t>𝑈</m:t>
+                        </m:r>
+                      </m:e>
+                      <m:sup>
+                        <m:r>
+                          <a:rPr lang="it-IT" b="0" i="1" dirty="0" smtClean="0">
+                            <a:latin typeface="Cambria Math" panose="02040503050406030204" pitchFamily="18" charset="0"/>
+                          </a:rPr>
+                          <m:t>+</m:t>
+                        </m:r>
+                      </m:sup>
+                    </m:sSup>
+                  </m:oMath>
+                </a14:m>
+                <a:endParaRPr lang="it-IT" dirty="0"/>
+              </a:p>
+              <a:p>
+                <a:pPr marL="1028700" lvl="1" indent="-342900" fontAlgn="base">
+                  <a:buFont typeface="+mj-lt"/>
+                  <a:buAutoNum type="arabicParenR"/>
+                </a:pPr>
+                <a:r>
+                  <a:rPr lang="it-IT" dirty="0"/>
+                  <a:t>Dati lacunosi (caso </a:t>
+                </a:r>
+                <a14:m>
+                  <m:oMath xmlns:m="http://schemas.openxmlformats.org/officeDocument/2006/math">
+                    <m:r>
+                      <a:rPr lang="it-IT" i="1" dirty="0" smtClean="0">
+                        <a:latin typeface="Cambria Math" panose="02040503050406030204" pitchFamily="18" charset="0"/>
+                      </a:rPr>
+                      <m:t>𝑀</m:t>
+                    </m:r>
+                    <m:r>
+                      <a:rPr lang="it-IT" i="1" dirty="0" smtClean="0">
+                        <a:latin typeface="Cambria Math" panose="02040503050406030204" pitchFamily="18" charset="0"/>
+                      </a:rPr>
+                      <m:t>&lt;</m:t>
+                    </m:r>
+                    <m:r>
+                      <a:rPr lang="it-IT" i="1" dirty="0" smtClean="0">
+                        <a:latin typeface="Cambria Math" panose="02040503050406030204" pitchFamily="18" charset="0"/>
+                      </a:rPr>
+                      <m:t>𝑚</m:t>
+                    </m:r>
+                  </m:oMath>
+                </a14:m>
+                <a:r>
+                  <a:rPr lang="it-IT" i="1" dirty="0"/>
+                  <a:t>)</a:t>
+                </a:r>
+                <a:r>
+                  <a:rPr lang="it-IT" dirty="0"/>
+                  <a:t>, il caso in cui il problema è mal posto (sistema sottodeterminato). Possiamo sfruttare lo spazio di Krylov grazie al quale avendo anche solo una condizione iniziale </a:t>
+                </a:r>
+                <a14:m>
+                  <m:oMath xmlns:m="http://schemas.openxmlformats.org/officeDocument/2006/math">
+                    <m:sSub>
+                      <m:sSubPr>
+                        <m:ctrlPr>
+                          <a:rPr lang="it-IT" i="1" dirty="0" smtClean="0">
+                            <a:latin typeface="Cambria Math" panose="02040503050406030204" pitchFamily="18" charset="0"/>
+                          </a:rPr>
+                        </m:ctrlPr>
+                      </m:sSubPr>
+                      <m:e>
+                        <m:r>
+                          <a:rPr lang="it-IT" b="0" i="1" dirty="0" smtClean="0">
+                            <a:latin typeface="Cambria Math" panose="02040503050406030204" pitchFamily="18" charset="0"/>
+                          </a:rPr>
+                          <m:t>𝑢</m:t>
+                        </m:r>
+                      </m:e>
+                      <m:sub>
+                        <m:r>
+                          <a:rPr lang="it-IT" b="0" i="1" dirty="0">
+                            <a:latin typeface="Cambria Math" panose="02040503050406030204" pitchFamily="18" charset="0"/>
+                          </a:rPr>
+                          <m:t>0</m:t>
+                        </m:r>
+                      </m:sub>
+                    </m:sSub>
+                  </m:oMath>
+                </a14:m>
+                <a:r>
+                  <a:rPr lang="it-IT" dirty="0"/>
+                  <a:t>, permette di dedurre l’evoluzione esplorando il grafo: </a:t>
+                </a:r>
+                <a14:m>
+                  <m:oMath xmlns:m="http://schemas.openxmlformats.org/officeDocument/2006/math">
+                    <m:r>
+                      <a:rPr lang="it-IT" b="0" i="1" dirty="0" smtClean="0">
+                        <a:latin typeface="Cambria Math" panose="02040503050406030204" pitchFamily="18" charset="0"/>
+                      </a:rPr>
+                      <m:t>𝑢</m:t>
+                    </m:r>
+                    <m:d>
+                      <m:dPr>
+                        <m:ctrlPr>
+                          <a:rPr lang="it-IT" b="0" i="1" dirty="0">
+                            <a:latin typeface="Cambria Math" panose="02040503050406030204" pitchFamily="18" charset="0"/>
+                          </a:rPr>
+                        </m:ctrlPr>
+                      </m:dPr>
+                      <m:e>
+                        <m:r>
+                          <a:rPr lang="it-IT" b="0" i="1" dirty="0">
+                            <a:latin typeface="Cambria Math" panose="02040503050406030204" pitchFamily="18" charset="0"/>
+                          </a:rPr>
+                          <m:t>𝑡</m:t>
+                        </m:r>
+                        <m:r>
+                          <a:rPr lang="it-IT" b="0" i="1" dirty="0">
+                            <a:latin typeface="Cambria Math" panose="02040503050406030204" pitchFamily="18" charset="0"/>
+                          </a:rPr>
+                          <m:t>1</m:t>
+                        </m:r>
+                      </m:e>
+                    </m:d>
+                    <m:r>
+                      <a:rPr lang="it-IT" b="0" i="1" dirty="0">
+                        <a:latin typeface="Cambria Math" panose="02040503050406030204" pitchFamily="18" charset="0"/>
+                      </a:rPr>
+                      <m:t>=</m:t>
+                    </m:r>
+                    <m:sSup>
+                      <m:sSupPr>
+                        <m:ctrlPr>
+                          <a:rPr lang="it-IT" b="0" i="1" dirty="0">
+                            <a:latin typeface="Cambria Math" panose="02040503050406030204" pitchFamily="18" charset="0"/>
+                          </a:rPr>
+                        </m:ctrlPr>
+                      </m:sSupPr>
+                      <m:e>
+                        <m:r>
+                          <a:rPr lang="it-IT" b="0" i="1" dirty="0">
+                            <a:latin typeface="Cambria Math" panose="02040503050406030204" pitchFamily="18" charset="0"/>
+                          </a:rPr>
+                          <m:t>𝑒</m:t>
+                        </m:r>
+                      </m:e>
+                      <m:sup>
+                        <m:d>
+                          <m:dPr>
+                            <m:ctrlPr>
+                              <a:rPr lang="it-IT" b="0" i="1" dirty="0">
+                                <a:latin typeface="Cambria Math" panose="02040503050406030204" pitchFamily="18" charset="0"/>
+                              </a:rPr>
+                            </m:ctrlPr>
+                          </m:dPr>
+                          <m:e>
+                            <m:r>
+                              <a:rPr lang="it-IT" b="0" i="1" dirty="0">
+                                <a:latin typeface="Cambria Math" panose="02040503050406030204" pitchFamily="18" charset="0"/>
+                              </a:rPr>
+                              <m:t>−</m:t>
+                            </m:r>
+                            <m:r>
+                              <a:rPr lang="it-IT" b="0" i="1" dirty="0">
+                                <a:latin typeface="Cambria Math" panose="02040503050406030204" pitchFamily="18" charset="0"/>
+                              </a:rPr>
+                              <m:t>𝑡</m:t>
+                            </m:r>
+                            <m:r>
+                              <a:rPr lang="it-IT" b="0" i="1" dirty="0">
+                                <a:latin typeface="Cambria Math" panose="02040503050406030204" pitchFamily="18" charset="0"/>
+                              </a:rPr>
+                              <m:t>1</m:t>
+                            </m:r>
+                            <m:r>
+                              <a:rPr lang="it-IT" b="0" i="1" dirty="0">
+                                <a:latin typeface="Cambria Math" panose="02040503050406030204" pitchFamily="18" charset="0"/>
+                              </a:rPr>
+                              <m:t>𝐿</m:t>
+                            </m:r>
+                          </m:e>
+                        </m:d>
+                      </m:sup>
+                    </m:sSup>
+                    <m:r>
+                      <a:rPr lang="it-IT" b="0" i="1" dirty="0">
+                        <a:latin typeface="Cambria Math" panose="02040503050406030204" pitchFamily="18" charset="0"/>
+                      </a:rPr>
+                      <m:t>𝑢</m:t>
+                    </m:r>
+                    <m:r>
+                      <a:rPr lang="it-IT" b="0" i="1" dirty="0">
+                        <a:latin typeface="Cambria Math" panose="02040503050406030204" pitchFamily="18" charset="0"/>
+                      </a:rPr>
+                      <m:t>0,</m:t>
+                    </m:r>
+                    <m:r>
+                      <a:rPr lang="it-IT" b="0" i="1" dirty="0">
+                        <a:latin typeface="Cambria Math" panose="02040503050406030204" pitchFamily="18" charset="0"/>
+                      </a:rPr>
+                      <m:t>𝑢</m:t>
+                    </m:r>
+                    <m:d>
+                      <m:dPr>
+                        <m:ctrlPr>
+                          <a:rPr lang="it-IT" b="0" i="1" dirty="0">
+                            <a:latin typeface="Cambria Math" panose="02040503050406030204" pitchFamily="18" charset="0"/>
+                          </a:rPr>
+                        </m:ctrlPr>
+                      </m:dPr>
+                      <m:e>
+                        <m:r>
+                          <a:rPr lang="it-IT" b="0" i="1" dirty="0">
+                            <a:latin typeface="Cambria Math" panose="02040503050406030204" pitchFamily="18" charset="0"/>
+                          </a:rPr>
+                          <m:t>𝑡</m:t>
+                        </m:r>
+                        <m:r>
+                          <a:rPr lang="it-IT" b="0" i="1" dirty="0">
+                            <a:latin typeface="Cambria Math" panose="02040503050406030204" pitchFamily="18" charset="0"/>
+                          </a:rPr>
+                          <m:t>2</m:t>
+                        </m:r>
+                      </m:e>
+                    </m:d>
+                    <m:r>
+                      <a:rPr lang="it-IT" b="0" i="1" dirty="0">
+                        <a:latin typeface="Cambria Math" panose="02040503050406030204" pitchFamily="18" charset="0"/>
+                      </a:rPr>
+                      <m:t>=</m:t>
+                    </m:r>
+                    <m:sSup>
+                      <m:sSupPr>
+                        <m:ctrlPr>
+                          <a:rPr lang="it-IT" b="0" i="1" dirty="0">
+                            <a:latin typeface="Cambria Math" panose="02040503050406030204" pitchFamily="18" charset="0"/>
+                          </a:rPr>
+                        </m:ctrlPr>
+                      </m:sSupPr>
+                      <m:e>
+                        <m:r>
+                          <a:rPr lang="it-IT" b="0" i="1" dirty="0">
+                            <a:latin typeface="Cambria Math" panose="02040503050406030204" pitchFamily="18" charset="0"/>
+                          </a:rPr>
+                          <m:t>𝑒</m:t>
+                        </m:r>
+                      </m:e>
+                      <m:sup>
+                        <m:d>
+                          <m:dPr>
+                            <m:ctrlPr>
+                              <a:rPr lang="it-IT" b="0" i="1" dirty="0">
+                                <a:latin typeface="Cambria Math" panose="02040503050406030204" pitchFamily="18" charset="0"/>
+                              </a:rPr>
+                            </m:ctrlPr>
+                          </m:dPr>
+                          <m:e>
+                            <m:r>
+                              <a:rPr lang="it-IT" b="0" i="1" dirty="0">
+                                <a:latin typeface="Cambria Math" panose="02040503050406030204" pitchFamily="18" charset="0"/>
+                              </a:rPr>
+                              <m:t>−</m:t>
+                            </m:r>
+                            <m:r>
+                              <a:rPr lang="it-IT" b="0" i="1" dirty="0">
+                                <a:latin typeface="Cambria Math" panose="02040503050406030204" pitchFamily="18" charset="0"/>
+                              </a:rPr>
+                              <m:t>𝑡</m:t>
+                            </m:r>
+                            <m:r>
+                              <a:rPr lang="it-IT" b="0" i="1" dirty="0">
+                                <a:latin typeface="Cambria Math" panose="02040503050406030204" pitchFamily="18" charset="0"/>
+                              </a:rPr>
+                              <m:t>2</m:t>
+                            </m:r>
+                            <m:r>
+                              <a:rPr lang="it-IT" b="0" i="1" dirty="0">
+                                <a:latin typeface="Cambria Math" panose="02040503050406030204" pitchFamily="18" charset="0"/>
+                              </a:rPr>
+                              <m:t>𝐿</m:t>
+                            </m:r>
+                          </m:e>
+                        </m:d>
+                      </m:sup>
+                    </m:sSup>
+                    <m:r>
+                      <a:rPr lang="it-IT" b="0" i="1" dirty="0">
+                        <a:latin typeface="Cambria Math" panose="02040503050406030204" pitchFamily="18" charset="0"/>
+                      </a:rPr>
+                      <m:t>𝑢</m:t>
+                    </m:r>
+                    <m:r>
+                      <a:rPr lang="it-IT" b="0" i="1" dirty="0">
+                        <a:latin typeface="Cambria Math" panose="02040503050406030204" pitchFamily="18" charset="0"/>
+                      </a:rPr>
+                      <m:t>0,…</m:t>
+                    </m:r>
+                  </m:oMath>
+                </a14:m>
+                <a:endParaRPr lang="it-IT" dirty="0"/>
+              </a:p>
+              <a:p>
+                <a:pPr marL="285750" indent="-285750">
+                  <a:buFont typeface="Arial" panose="020B0604020202020204" pitchFamily="34" charset="0"/>
+                  <a:buChar char="•"/>
+                </a:pPr>
+                <a:r>
+                  <a:rPr lang="it-IT" dirty="0"/>
+                  <a:t>Se riusciamo a raccogliere abbastanza istanti temporali </a:t>
+                </a:r>
+                <a14:m>
+                  <m:oMath xmlns:m="http://schemas.openxmlformats.org/officeDocument/2006/math">
+                    <m:sSub>
+                      <m:sSubPr>
+                        <m:ctrlPr>
+                          <a:rPr lang="it-IT" i="1" dirty="0" smtClean="0">
+                            <a:latin typeface="Cambria Math" panose="02040503050406030204" pitchFamily="18" charset="0"/>
+                          </a:rPr>
+                        </m:ctrlPr>
+                      </m:sSubPr>
+                      <m:e>
+                        <m:r>
+                          <a:rPr lang="it-IT" i="1" dirty="0" smtClean="0">
+                            <a:latin typeface="Cambria Math" panose="02040503050406030204" pitchFamily="18" charset="0"/>
+                          </a:rPr>
+                          <m:t>𝑡</m:t>
+                        </m:r>
+                      </m:e>
+                      <m:sub>
+                        <m:r>
+                          <a:rPr lang="it-IT" i="1" dirty="0" smtClean="0">
+                            <a:latin typeface="Cambria Math" panose="02040503050406030204" pitchFamily="18" charset="0"/>
+                          </a:rPr>
+                          <m:t>𝑘</m:t>
+                        </m:r>
+                      </m:sub>
+                    </m:sSub>
+                  </m:oMath>
+                </a14:m>
+                <a:r>
+                  <a:rPr lang="it-IT" dirty="0"/>
+                  <a:t>, possiamo rendere i vettori </a:t>
+                </a:r>
+                <a14:m>
+                  <m:oMath xmlns:m="http://schemas.openxmlformats.org/officeDocument/2006/math">
+                    <m:r>
+                      <a:rPr lang="it-IT" i="1" dirty="0" smtClean="0">
+                        <a:latin typeface="Cambria Math" panose="02040503050406030204" pitchFamily="18" charset="0"/>
+                      </a:rPr>
+                      <m:t>𝑢</m:t>
+                    </m:r>
+                    <m:d>
+                      <m:dPr>
+                        <m:ctrlPr>
+                          <a:rPr lang="it-IT" i="1" dirty="0" smtClean="0">
+                            <a:latin typeface="Cambria Math" panose="02040503050406030204" pitchFamily="18" charset="0"/>
+                          </a:rPr>
+                        </m:ctrlPr>
+                      </m:dPr>
+                      <m:e>
+                        <m:sSub>
+                          <m:sSubPr>
+                            <m:ctrlPr>
+                              <a:rPr lang="it-IT" i="1" dirty="0" err="1" smtClean="0">
+                                <a:latin typeface="Cambria Math" panose="02040503050406030204" pitchFamily="18" charset="0"/>
+                              </a:rPr>
+                            </m:ctrlPr>
+                          </m:sSubPr>
+                          <m:e>
+                            <m:r>
+                              <a:rPr lang="it-IT" i="1" dirty="0" err="1" smtClean="0">
+                                <a:latin typeface="Cambria Math" panose="02040503050406030204" pitchFamily="18" charset="0"/>
+                              </a:rPr>
+                              <m:t>𝑡</m:t>
+                            </m:r>
+                          </m:e>
+                          <m:sub>
+                            <m:r>
+                              <a:rPr lang="it-IT" i="1" dirty="0" err="1" smtClean="0">
+                                <a:latin typeface="Cambria Math" panose="02040503050406030204" pitchFamily="18" charset="0"/>
+                              </a:rPr>
+                              <m:t>𝑘</m:t>
+                            </m:r>
+                          </m:sub>
+                        </m:sSub>
+                      </m:e>
+                    </m:d>
+                  </m:oMath>
+                </a14:m>
+                <a:r>
+                  <a:rPr lang="it-IT" dirty="0"/>
+                  <a:t> linearmente indipendenti costruendo una matrice delle osservazioni “estesa”</a:t>
+                </a:r>
+              </a:p>
+              <a:p>
+                <a:pPr marL="285750" indent="-285750">
+                  <a:buFont typeface="Arial" panose="020B0604020202020204" pitchFamily="34" charset="0"/>
+                  <a:buChar char="•"/>
+                </a:pPr>
+                <a:r>
+                  <a:rPr lang="it-IT" dirty="0"/>
+                  <a:t>Raggiungiamo il grado minimo del polinomio per </a:t>
+                </a:r>
+                <a14:m>
+                  <m:oMath xmlns:m="http://schemas.openxmlformats.org/officeDocument/2006/math">
+                    <m:r>
+                      <a:rPr lang="it-IT" i="1" dirty="0" smtClean="0">
+                        <a:latin typeface="Cambria Math" panose="02040503050406030204" pitchFamily="18" charset="0"/>
+                      </a:rPr>
+                      <m:t>𝐿</m:t>
+                    </m:r>
+                  </m:oMath>
+                </a14:m>
+                <a:r>
+                  <a:rPr lang="it-IT" dirty="0"/>
+                  <a:t> anche con pochi esperimenti, a patto che si campioni abbastanza a lungo nel tempo</a:t>
+                </a:r>
+              </a:p>
+            </p:txBody>
+          </p:sp>
+        </mc:Choice>
+        <mc:Fallback>
+          <p:sp>
+            <p:nvSpPr>
+              <p:cNvPr id="4" name="Segnaposto contenuto 3">
+                <a:extLst>
+                  <a:ext uri="{FF2B5EF4-FFF2-40B4-BE49-F238E27FC236}">
+                    <a16:creationId xmlns:a16="http://schemas.microsoft.com/office/drawing/2014/main" id="{E9FDD409-160E-088A-CF19-C8234E3C25C3}"/>
+                  </a:ext>
+                </a:extLst>
+              </p:cNvPr>
+              <p:cNvSpPr>
+                <a:spLocks noGrp="1" noRot="1" noChangeAspect="1" noMove="1" noResize="1" noEditPoints="1" noAdjustHandles="1" noChangeArrowheads="1" noChangeShapeType="1" noTextEdit="1"/>
+              </p:cNvSpPr>
+              <p:nvPr>
+                <p:ph sz="half" idx="1"/>
+              </p:nvPr>
+            </p:nvSpPr>
+            <p:spPr>
+              <a:xfrm>
+                <a:off x="550862" y="1336962"/>
+                <a:ext cx="9398001" cy="4744036"/>
+              </a:xfrm>
+              <a:blipFill>
+                <a:blip r:embed="rId3"/>
+                <a:stretch>
+                  <a:fillRect l="-1362" t="-513" r="-1362" b="-4878"/>
+                </a:stretch>
+              </a:blipFill>
+            </p:spPr>
+            <p:txBody>
+              <a:bodyPr/>
+              <a:lstStyle/>
+              <a:p>
+                <a:r>
+                  <a:rPr lang="it-IT">
+                    <a:noFill/>
+                  </a:rPr>
+                  <a:t> </a:t>
+                </a:r>
+              </a:p>
+            </p:txBody>
+          </p:sp>
+        </mc:Fallback>
+      </mc:AlternateContent>
       <p:pic>
         <p:nvPicPr>
           <p:cNvPr id="10" name="Immagine 9" descr="Immagine che contiene schizzo, arte, disegno, cerchio&#10;&#10;Il contenuto generato dall'IA potrebbe non essere corretto.">
             <a:extLst>
               <a:ext uri="{FF2B5EF4-FFF2-40B4-BE49-F238E27FC236}">
-                <a16:creationId xmlns:a16="http://schemas.microsoft.com/office/drawing/2014/main" id="{EBFF7E77-974F-1E39-7C27-7CF2EEC8DD00}"/>
+                <a16:creationId xmlns:a16="http://schemas.microsoft.com/office/drawing/2014/main" id="{7199988E-BD2D-8491-5EE0-AE3D7E9653C5}"/>
               </a:ext>
             </a:extLst>
           </p:cNvPr>
@@ -19887,7 +20894,7 @@
           <p:nvPr/>
         </p:nvPicPr>
         <p:blipFill>
-          <a:blip r:embed="rId3">
+          <a:blip r:embed="rId4">
             <a:alphaModFix amt="38000"/>
             <a:extLst>
               <a:ext uri="{28A0092B-C50C-407E-A947-70E740481C1C}">
@@ -19915,7 +20922,7 @@
           <p:cNvPr id="11" name="Segnaposto numero diapositiva 10">
             <a:extLst>
               <a:ext uri="{FF2B5EF4-FFF2-40B4-BE49-F238E27FC236}">
-                <a16:creationId xmlns:a16="http://schemas.microsoft.com/office/drawing/2014/main" id="{3BC72612-C699-7E27-2D06-64E43713FF51}"/>
+                <a16:creationId xmlns:a16="http://schemas.microsoft.com/office/drawing/2014/main" id="{26D6CC62-6567-2808-063F-94FB38F4DE0E}"/>
               </a:ext>
             </a:extLst>
           </p:cNvPr>
@@ -19934,18 +20941,676 @@
             <a:pPr rtl="0"/>
             <a:fld id="{CBD12358-51D2-46B3-9BDE-DF29528B9454}" type="slidenum">
               <a:rPr lang="it-IT" smtClean="0"/>
-              <a:t>9</a:t>
+              <a:t>8</a:t>
             </a:fld>
             <a:endParaRPr lang="it-IT" dirty="0"/>
           </a:p>
         </p:txBody>
       </p:sp>
+      <p:sp>
+        <p:nvSpPr>
+          <p:cNvPr id="3" name="CasellaDiTesto 2">
+            <a:extLst>
+              <a:ext uri="{FF2B5EF4-FFF2-40B4-BE49-F238E27FC236}">
+                <a16:creationId xmlns:a16="http://schemas.microsoft.com/office/drawing/2014/main" id="{F6216D92-517A-661C-4B5C-53A31D45B08E}"/>
+              </a:ext>
+            </a:extLst>
+          </p:cNvPr>
+          <p:cNvSpPr txBox="1"/>
+          <p:nvPr/>
+        </p:nvSpPr>
+        <p:spPr>
+          <a:xfrm>
+            <a:off x="683341" y="5431820"/>
+            <a:ext cx="65" cy="369332"/>
+          </a:xfrm>
+          <a:prstGeom prst="rect">
+            <a:avLst/>
+          </a:prstGeom>
+          <a:noFill/>
+        </p:spPr>
+        <p:txBody>
+          <a:bodyPr wrap="none" lIns="0" tIns="0" rIns="0" bIns="0" rtlCol="0">
+            <a:spAutoFit/>
+          </a:bodyPr>
+          <a:lstStyle/>
+          <a:p>
+            <a:endParaRPr lang="it-IT" sz="2400" i="1" dirty="0">
+              <a:latin typeface="Cambria" panose="02040503050406030204" pitchFamily="18" charset="0"/>
+              <a:ea typeface="Cambria" panose="02040503050406030204" pitchFamily="18" charset="0"/>
+            </a:endParaRPr>
+          </a:p>
+        </p:txBody>
+      </p:sp>
+    </p:spTree>
+    <p:extLst>
+      <p:ext uri="{BB962C8B-B14F-4D97-AF65-F5344CB8AC3E}">
+        <p14:creationId xmlns:p14="http://schemas.microsoft.com/office/powerpoint/2010/main" val="1076546552"/>
+      </p:ext>
+    </p:extLst>
+  </p:cSld>
+  <p:clrMapOvr>
+    <a:masterClrMapping/>
+  </p:clrMapOvr>
+</p:sld>
+</file>
+
+<file path=ppt/slides/slide9.xml><?xml version="1.0" encoding="utf-8"?>
+<p:sld xmlns:a="http://schemas.openxmlformats.org/drawingml/2006/main" xmlns:r="http://schemas.openxmlformats.org/officeDocument/2006/relationships" xmlns:p="http://schemas.openxmlformats.org/presentationml/2006/main">
+  <p:cSld>
+    <p:spTree>
+      <p:nvGrpSpPr>
+        <p:cNvPr id="1" name="">
+          <a:extLst>
+            <a:ext uri="{FF2B5EF4-FFF2-40B4-BE49-F238E27FC236}">
+              <a16:creationId xmlns:a16="http://schemas.microsoft.com/office/drawing/2014/main" id="{6A841CCC-8127-8538-53E0-E227C02DE2B6}"/>
+            </a:ext>
+          </a:extLst>
+        </p:cNvPr>
+        <p:cNvGrpSpPr/>
+        <p:nvPr/>
+      </p:nvGrpSpPr>
+      <p:grpSpPr>
+        <a:xfrm>
+          <a:off x="0" y="0"/>
+          <a:ext cx="0" cy="0"/>
+          <a:chOff x="0" y="0"/>
+          <a:chExt cx="0" cy="0"/>
+        </a:xfrm>
+      </p:grpSpPr>
+      <p:sp>
+        <p:nvSpPr>
+          <p:cNvPr id="2" name="Titolo 1">
+            <a:extLst>
+              <a:ext uri="{FF2B5EF4-FFF2-40B4-BE49-F238E27FC236}">
+                <a16:creationId xmlns:a16="http://schemas.microsoft.com/office/drawing/2014/main" id="{25EF62D5-CA24-5E0B-3945-CEDE88CBA381}"/>
+              </a:ext>
+            </a:extLst>
+          </p:cNvPr>
+          <p:cNvSpPr>
+            <a:spLocks noGrp="1"/>
+          </p:cNvSpPr>
+          <p:nvPr>
+            <p:ph type="title"/>
+          </p:nvPr>
+        </p:nvSpPr>
+        <p:spPr>
+          <a:xfrm>
+            <a:off x="550863" y="560961"/>
+            <a:ext cx="11090275" cy="1186560"/>
+          </a:xfrm>
+          <a:noFill/>
+        </p:spPr>
+        <p:txBody>
+          <a:bodyPr rtlCol="0" anchor="t"/>
+          <a:lstStyle>
+            <a:defPPr>
+              <a:defRPr lang="it-IT"/>
+            </a:defPPr>
+          </a:lstStyle>
+          <a:p>
+            <a:r>
+              <a:rPr lang="it-IT" dirty="0"/>
+              <a:t>Rapporto incrementale e soluzioni</a:t>
+            </a:r>
+          </a:p>
+        </p:txBody>
+      </p:sp>
+      <mc:AlternateContent xmlns:mc="http://schemas.openxmlformats.org/markup-compatibility/2006">
+        <mc:Choice xmlns:a14="http://schemas.microsoft.com/office/drawing/2010/main" Requires="a14">
+          <p:sp>
+            <p:nvSpPr>
+              <p:cNvPr id="4" name="Segnaposto contenuto 3">
+                <a:extLst>
+                  <a:ext uri="{FF2B5EF4-FFF2-40B4-BE49-F238E27FC236}">
+                    <a16:creationId xmlns:a16="http://schemas.microsoft.com/office/drawing/2014/main" id="{E2B51104-1DE7-FA83-5179-FB6BCEFE384D}"/>
+                  </a:ext>
+                </a:extLst>
+              </p:cNvPr>
+              <p:cNvSpPr>
+                <a:spLocks noGrp="1"/>
+              </p:cNvSpPr>
+              <p:nvPr>
+                <p:ph sz="half" idx="1"/>
+              </p:nvPr>
+            </p:nvSpPr>
+            <p:spPr>
+              <a:xfrm>
+                <a:off x="550862" y="1336962"/>
+                <a:ext cx="9398001" cy="4744036"/>
+              </a:xfrm>
+            </p:spPr>
+            <p:txBody>
+              <a:bodyPr>
+                <a:noAutofit/>
+              </a:bodyPr>
+              <a:lstStyle/>
+              <a:p>
+                <a:pPr marL="285750" indent="-285750">
+                  <a:buFont typeface="Arial" panose="020B0604020202020204" pitchFamily="34" charset="0"/>
+                  <a:buChar char="•"/>
+                </a:pPr>
+                <a:r>
+                  <a:rPr lang="it-IT" sz="2000" dirty="0"/>
+                  <a:t>La realizzazione del rapporto incrementale discreto è fondamentale per risolvere entrambi i problemi, dato che è regressione banale basata su due dati (</a:t>
+                </a:r>
+                <a14:m>
+                  <m:oMath xmlns:m="http://schemas.openxmlformats.org/officeDocument/2006/math">
+                    <m:sSub>
+                      <m:sSubPr>
+                        <m:ctrlPr>
+                          <a:rPr lang="it-IT" sz="2000" i="1" dirty="0" smtClean="0">
+                            <a:latin typeface="Cambria Math" panose="02040503050406030204" pitchFamily="18" charset="0"/>
+                          </a:rPr>
+                        </m:ctrlPr>
+                      </m:sSubPr>
+                      <m:e>
+                        <m:r>
+                          <a:rPr lang="it-IT" sz="2000" i="1" dirty="0" smtClean="0">
+                            <a:latin typeface="Cambria Math" panose="02040503050406030204" pitchFamily="18" charset="0"/>
+                          </a:rPr>
+                          <m:t>𝑡</m:t>
+                        </m:r>
+                      </m:e>
+                      <m:sub>
+                        <m:r>
+                          <a:rPr lang="it-IT" sz="2000" i="1" dirty="0" smtClean="0">
+                            <a:latin typeface="Cambria Math" panose="02040503050406030204" pitchFamily="18" charset="0"/>
+                          </a:rPr>
+                          <m:t>0</m:t>
+                        </m:r>
+                      </m:sub>
+                    </m:sSub>
+                  </m:oMath>
+                </a14:m>
+                <a:r>
+                  <a:rPr lang="it-IT" sz="2000" dirty="0"/>
+                  <a:t> e </a:t>
+                </a:r>
+                <a14:m>
+                  <m:oMath xmlns:m="http://schemas.openxmlformats.org/officeDocument/2006/math">
+                    <m:r>
+                      <a:rPr lang="it-IT" sz="2000" i="1" dirty="0" smtClean="0">
+                        <a:latin typeface="Cambria Math" panose="02040503050406030204" pitchFamily="18" charset="0"/>
+                        <a:ea typeface="Cambria Math" panose="02040503050406030204" pitchFamily="18" charset="0"/>
+                      </a:rPr>
+                      <m:t>∆</m:t>
+                    </m:r>
+                    <m:r>
+                      <a:rPr lang="it-IT" sz="2000" i="1" dirty="0" smtClean="0">
+                        <a:latin typeface="Cambria Math" panose="02040503050406030204" pitchFamily="18" charset="0"/>
+                      </a:rPr>
+                      <m:t>𝑡</m:t>
+                    </m:r>
+                  </m:oMath>
+                </a14:m>
+                <a:r>
+                  <a:rPr lang="it-IT" sz="2000" dirty="0"/>
+                  <a:t>), l’approssimazione dell’operatore avviene come </a:t>
+                </a:r>
+                <a14:m>
+                  <m:oMath xmlns:m="http://schemas.openxmlformats.org/officeDocument/2006/math">
+                    <m:r>
+                      <a:rPr lang="it-IT" sz="2000" i="1" dirty="0">
+                        <a:latin typeface="Cambria Math" panose="02040503050406030204" pitchFamily="18" charset="0"/>
+                      </a:rPr>
+                      <m:t>𝐿</m:t>
+                    </m:r>
+                    <m:r>
+                      <a:rPr lang="it-IT" sz="2000" i="1" dirty="0">
+                        <a:latin typeface="Cambria Math" panose="02040503050406030204" pitchFamily="18" charset="0"/>
+                      </a:rPr>
+                      <m:t>≈−</m:t>
+                    </m:r>
+                    <m:acc>
+                      <m:accPr>
+                        <m:chr m:val="̇"/>
+                        <m:ctrlPr>
+                          <a:rPr lang="it-IT" sz="2000" i="1" dirty="0">
+                            <a:latin typeface="Cambria Math" panose="02040503050406030204" pitchFamily="18" charset="0"/>
+                          </a:rPr>
+                        </m:ctrlPr>
+                      </m:accPr>
+                      <m:e>
+                        <m:r>
+                          <a:rPr lang="it-IT" sz="2000" i="1" dirty="0">
+                            <a:latin typeface="Cambria Math" panose="02040503050406030204" pitchFamily="18" charset="0"/>
+                          </a:rPr>
+                          <m:t>𝑈</m:t>
+                        </m:r>
+                      </m:e>
+                    </m:acc>
+                    <m:sSup>
+                      <m:sSupPr>
+                        <m:ctrlPr>
+                          <a:rPr lang="it-IT" sz="2000" i="1" dirty="0">
+                            <a:latin typeface="Cambria Math" panose="02040503050406030204" pitchFamily="18" charset="0"/>
+                          </a:rPr>
+                        </m:ctrlPr>
+                      </m:sSupPr>
+                      <m:e>
+                        <m:r>
+                          <a:rPr lang="it-IT" sz="2000" i="1" dirty="0">
+                            <a:latin typeface="Cambria Math" panose="02040503050406030204" pitchFamily="18" charset="0"/>
+                          </a:rPr>
+                          <m:t>𝑈</m:t>
+                        </m:r>
+                      </m:e>
+                      <m:sup>
+                        <m:r>
+                          <a:rPr lang="it-IT" sz="2000" i="1" dirty="0">
+                            <a:latin typeface="Cambria Math" panose="02040503050406030204" pitchFamily="18" charset="0"/>
+                          </a:rPr>
+                          <m:t>+</m:t>
+                        </m:r>
+                      </m:sup>
+                    </m:sSup>
+                  </m:oMath>
+                </a14:m>
+                <a:r>
+                  <a:rPr lang="it-IT" sz="2000" dirty="0"/>
+                  <a:t>, </a:t>
+                </a:r>
+              </a:p>
+              <a:p>
+                <a:pPr marL="285750" indent="-285750">
+                  <a:buFont typeface="Arial" panose="020B0604020202020204" pitchFamily="34" charset="0"/>
+                  <a:buChar char="•"/>
+                </a:pPr>
+                <a:r>
+                  <a:rPr lang="it-IT" sz="2000" dirty="0"/>
+                  <a:t>Ovvero, in pratica, come </a:t>
+                </a:r>
+                <a14:m>
+                  <m:oMath xmlns:m="http://schemas.openxmlformats.org/officeDocument/2006/math">
+                    <m:r>
+                      <a:rPr lang="it-IT" sz="2000" i="1" dirty="0" smtClean="0">
+                        <a:latin typeface="Cambria Math" panose="02040503050406030204" pitchFamily="18" charset="0"/>
+                      </a:rPr>
+                      <m:t>𝐿</m:t>
+                    </m:r>
+                    <m:r>
+                      <a:rPr lang="it-IT" sz="2000" b="0" i="1" dirty="0" smtClean="0">
+                        <a:latin typeface="Cambria Math" panose="02040503050406030204" pitchFamily="18" charset="0"/>
+                      </a:rPr>
+                      <m:t>≈</m:t>
+                    </m:r>
+                    <m:r>
+                      <a:rPr lang="it-IT" sz="2000" i="1" dirty="0">
+                        <a:latin typeface="Cambria Math" panose="02040503050406030204" pitchFamily="18" charset="0"/>
+                      </a:rPr>
+                      <m:t>−</m:t>
+                    </m:r>
+                    <m:d>
+                      <m:dPr>
+                        <m:ctrlPr>
+                          <a:rPr lang="it-IT" sz="2000" b="0" i="1" dirty="0">
+                            <a:latin typeface="Cambria Math" panose="02040503050406030204" pitchFamily="18" charset="0"/>
+                          </a:rPr>
+                        </m:ctrlPr>
+                      </m:dPr>
+                      <m:e>
+                        <m:r>
+                          <a:rPr lang="it-IT" sz="2000" i="1" dirty="0">
+                            <a:latin typeface="Cambria Math" panose="02040503050406030204" pitchFamily="18" charset="0"/>
+                          </a:rPr>
+                          <m:t>𝑈</m:t>
+                        </m:r>
+                        <m:r>
+                          <a:rPr lang="it-IT" sz="2000" b="0" i="1" dirty="0" smtClean="0">
+                            <a:latin typeface="Cambria Math" panose="02040503050406030204" pitchFamily="18" charset="0"/>
+                          </a:rPr>
+                          <m:t>{</m:t>
+                        </m:r>
+                        <m:r>
+                          <a:rPr lang="it-IT" sz="2000" i="1" dirty="0">
+                            <a:latin typeface="Cambria Math" panose="02040503050406030204" pitchFamily="18" charset="0"/>
+                          </a:rPr>
+                          <m:t>2</m:t>
+                        </m:r>
+                        <m:r>
+                          <a:rPr lang="it-IT" sz="2000" b="0" i="1" dirty="0" smtClean="0">
+                            <a:latin typeface="Cambria Math" panose="02040503050406030204" pitchFamily="18" charset="0"/>
+                          </a:rPr>
+                          <m:t>}</m:t>
+                        </m:r>
+                        <m:r>
+                          <a:rPr lang="it-IT" sz="2000" i="1" dirty="0">
+                            <a:latin typeface="Cambria Math" panose="02040503050406030204" pitchFamily="18" charset="0"/>
+                          </a:rPr>
+                          <m:t>∗</m:t>
+                        </m:r>
+                        <m:r>
+                          <a:rPr lang="it-IT" sz="2000" i="1" dirty="0">
+                            <a:latin typeface="Cambria Math" panose="02040503050406030204" pitchFamily="18" charset="0"/>
+                          </a:rPr>
+                          <m:t>𝑐</m:t>
+                        </m:r>
+                        <m:r>
+                          <a:rPr lang="it-IT" sz="2000" i="1" dirty="0">
+                            <a:latin typeface="Cambria Math" panose="02040503050406030204" pitchFamily="18" charset="0"/>
+                          </a:rPr>
+                          <m:t>−</m:t>
+                        </m:r>
+                        <m:r>
+                          <a:rPr lang="it-IT" sz="2000" i="1" dirty="0">
+                            <a:latin typeface="Cambria Math" panose="02040503050406030204" pitchFamily="18" charset="0"/>
+                          </a:rPr>
+                          <m:t>𝐼</m:t>
+                        </m:r>
+                      </m:e>
+                    </m:d>
+                    <m:r>
+                      <m:rPr>
+                        <m:lit/>
+                      </m:rPr>
+                      <a:rPr lang="it-IT" sz="2000" i="1" dirty="0">
+                        <a:latin typeface="Cambria Math" panose="02040503050406030204" pitchFamily="18" charset="0"/>
+                      </a:rPr>
+                      <m:t>/</m:t>
+                    </m:r>
+                    <m:r>
+                      <a:rPr lang="it-IT" sz="2000" i="1" dirty="0" err="1">
+                        <a:latin typeface="Cambria Math" panose="02040503050406030204" pitchFamily="18" charset="0"/>
+                      </a:rPr>
+                      <m:t>𝑑𝑡</m:t>
+                    </m:r>
+                  </m:oMath>
+                </a14:m>
+                <a:r>
+                  <a:rPr lang="it-IT" sz="2000" dirty="0"/>
+                  <a:t>,</a:t>
+                </a:r>
+              </a:p>
+              <a:p>
+                <a:pPr marL="285750" indent="-285750">
+                  <a:buFont typeface="Arial" panose="020B0604020202020204" pitchFamily="34" charset="0"/>
+                  <a:buChar char="•"/>
+                </a:pPr>
+                <a14:m>
+                  <m:oMath xmlns:m="http://schemas.openxmlformats.org/officeDocument/2006/math">
+                    <m:r>
+                      <a:rPr lang="it-IT" sz="2000" i="1" dirty="0" smtClean="0">
+                        <a:latin typeface="Cambria Math" panose="02040503050406030204" pitchFamily="18" charset="0"/>
+                      </a:rPr>
+                      <m:t>𝑑𝑡</m:t>
+                    </m:r>
+                    <m:r>
+                      <a:rPr lang="it-IT" sz="2000" i="1" dirty="0">
+                        <a:latin typeface="Cambria Math" panose="02040503050406030204" pitchFamily="18" charset="0"/>
+                      </a:rPr>
+                      <m:t>=</m:t>
+                    </m:r>
+                    <m:sSub>
+                      <m:sSubPr>
+                        <m:ctrlPr>
+                          <a:rPr lang="it-IT" sz="2000" b="0" i="1" dirty="0" smtClean="0">
+                            <a:latin typeface="Cambria Math" panose="02040503050406030204" pitchFamily="18" charset="0"/>
+                          </a:rPr>
+                        </m:ctrlPr>
+                      </m:sSubPr>
+                      <m:e>
+                        <m:r>
+                          <a:rPr lang="it-IT" sz="2000" i="1" dirty="0">
+                            <a:latin typeface="Cambria Math" panose="02040503050406030204" pitchFamily="18" charset="0"/>
+                          </a:rPr>
+                          <m:t>𝑡</m:t>
+                        </m:r>
+                      </m:e>
+                      <m:sub>
+                        <m:r>
+                          <a:rPr lang="it-IT" sz="2000" b="0" i="1" dirty="0" smtClean="0">
+                            <a:latin typeface="Cambria Math" panose="02040503050406030204" pitchFamily="18" charset="0"/>
+                          </a:rPr>
+                          <m:t>1</m:t>
+                        </m:r>
+                      </m:sub>
+                    </m:sSub>
+                    <m:r>
+                      <a:rPr lang="it-IT" sz="2000" i="1" dirty="0">
+                        <a:latin typeface="Cambria Math" panose="02040503050406030204" pitchFamily="18" charset="0"/>
+                      </a:rPr>
+                      <m:t>−</m:t>
+                    </m:r>
+                    <m:sSub>
+                      <m:sSubPr>
+                        <m:ctrlPr>
+                          <a:rPr lang="it-IT" sz="2000" b="0" i="1" dirty="0" smtClean="0">
+                            <a:latin typeface="Cambria Math" panose="02040503050406030204" pitchFamily="18" charset="0"/>
+                          </a:rPr>
+                        </m:ctrlPr>
+                      </m:sSubPr>
+                      <m:e>
+                        <m:r>
+                          <a:rPr lang="it-IT" sz="2000" i="1" dirty="0">
+                            <a:latin typeface="Cambria Math" panose="02040503050406030204" pitchFamily="18" charset="0"/>
+                          </a:rPr>
+                          <m:t>𝑡</m:t>
+                        </m:r>
+                      </m:e>
+                      <m:sub>
+                        <m:r>
+                          <a:rPr lang="it-IT" sz="2000" b="0" i="1" dirty="0" smtClean="0">
+                            <a:latin typeface="Cambria Math" panose="02040503050406030204" pitchFamily="18" charset="0"/>
+                          </a:rPr>
+                          <m:t>0</m:t>
+                        </m:r>
+                      </m:sub>
+                    </m:sSub>
+                  </m:oMath>
+                </a14:m>
+                <a:r>
+                  <a:rPr lang="it-IT" sz="2000" dirty="0"/>
+                  <a:t> e </a:t>
+                </a:r>
+                <a14:m>
+                  <m:oMath xmlns:m="http://schemas.openxmlformats.org/officeDocument/2006/math">
+                    <m:r>
+                      <a:rPr lang="it-IT" sz="2000" i="1" dirty="0" smtClean="0">
+                        <a:latin typeface="Cambria Math" panose="02040503050406030204" pitchFamily="18" charset="0"/>
+                      </a:rPr>
+                      <m:t>𝑐</m:t>
+                    </m:r>
+                    <m:r>
+                      <a:rPr lang="it-IT" sz="2000" i="1" dirty="0" smtClean="0">
+                        <a:latin typeface="Cambria Math" panose="02040503050406030204" pitchFamily="18" charset="0"/>
+                      </a:rPr>
+                      <m:t>=</m:t>
+                    </m:r>
+                    <m:r>
+                      <a:rPr lang="it-IT" sz="2000" i="1" dirty="0" smtClean="0">
+                        <a:latin typeface="Cambria Math" panose="02040503050406030204" pitchFamily="18" charset="0"/>
+                      </a:rPr>
+                      <m:t>𝑈</m:t>
+                    </m:r>
+                    <m:sSup>
+                      <m:sSupPr>
+                        <m:ctrlPr>
+                          <a:rPr lang="it-IT" sz="2000" i="1" dirty="0" smtClean="0">
+                            <a:latin typeface="Cambria Math" panose="02040503050406030204" pitchFamily="18" charset="0"/>
+                          </a:rPr>
+                        </m:ctrlPr>
+                      </m:sSupPr>
+                      <m:e>
+                        <m:d>
+                          <m:dPr>
+                            <m:ctrlPr>
+                              <a:rPr lang="it-IT" sz="2000" i="1" dirty="0" smtClean="0">
+                                <a:latin typeface="Cambria Math" panose="02040503050406030204" pitchFamily="18" charset="0"/>
+                              </a:rPr>
+                            </m:ctrlPr>
+                          </m:dPr>
+                          <m:e>
+                            <m:r>
+                              <a:rPr lang="it-IT" sz="2000" i="1" dirty="0" smtClean="0">
+                                <a:latin typeface="Cambria Math" panose="02040503050406030204" pitchFamily="18" charset="0"/>
+                              </a:rPr>
+                              <m:t>0</m:t>
+                            </m:r>
+                          </m:e>
+                        </m:d>
+                      </m:e>
+                      <m:sup>
+                        <m:r>
+                          <a:rPr lang="it-IT" sz="2000" i="1" dirty="0" smtClean="0">
+                            <a:latin typeface="Cambria Math" panose="02040503050406030204" pitchFamily="18" charset="0"/>
+                            <a:ea typeface="Cambria Math" panose="02040503050406030204" pitchFamily="18" charset="0"/>
+                          </a:rPr>
+                          <m:t>−</m:t>
+                        </m:r>
+                        <m:r>
+                          <a:rPr lang="it-IT" sz="2000" b="0" i="1" dirty="0" smtClean="0">
+                            <a:latin typeface="Cambria Math" panose="02040503050406030204" pitchFamily="18" charset="0"/>
+                          </a:rPr>
+                          <m:t>1</m:t>
+                        </m:r>
+                      </m:sup>
+                    </m:sSup>
+                  </m:oMath>
+                </a14:m>
+                <a:r>
+                  <a:rPr lang="it-IT" sz="2000" dirty="0"/>
+                  <a:t> se </a:t>
+                </a:r>
+                <a14:m>
+                  <m:oMath xmlns:m="http://schemas.openxmlformats.org/officeDocument/2006/math">
+                    <m:r>
+                      <a:rPr lang="it-IT" sz="2000" i="1" dirty="0" smtClean="0">
+                        <a:latin typeface="Cambria Math" panose="02040503050406030204" pitchFamily="18" charset="0"/>
+                      </a:rPr>
+                      <m:t>𝑀</m:t>
+                    </m:r>
+                    <m:r>
+                      <a:rPr lang="it-IT" sz="2000" i="1" dirty="0" smtClean="0">
+                        <a:latin typeface="Cambria Math" panose="02040503050406030204" pitchFamily="18" charset="0"/>
+                      </a:rPr>
+                      <m:t>=</m:t>
+                    </m:r>
+                    <m:r>
+                      <a:rPr lang="it-IT" sz="2000" i="1" dirty="0" smtClean="0">
+                        <a:latin typeface="Cambria Math" panose="02040503050406030204" pitchFamily="18" charset="0"/>
+                      </a:rPr>
+                      <m:t>𝑚</m:t>
+                    </m:r>
+                  </m:oMath>
+                </a14:m>
+                <a:r>
+                  <a:rPr lang="it-IT" sz="2000" dirty="0"/>
+                  <a:t>, altrimenti sfruttiamo la pseudo-inversa di Moore-Penrose </a:t>
+                </a:r>
+                <a14:m>
+                  <m:oMath xmlns:m="http://schemas.openxmlformats.org/officeDocument/2006/math">
+                    <m:sSup>
+                      <m:sSupPr>
+                        <m:ctrlPr>
+                          <a:rPr lang="it-IT" sz="2000" i="1" dirty="0" smtClean="0">
+                            <a:latin typeface="Cambria Math" panose="02040503050406030204" pitchFamily="18" charset="0"/>
+                          </a:rPr>
+                        </m:ctrlPr>
+                      </m:sSupPr>
+                      <m:e>
+                        <m:r>
+                          <a:rPr lang="it-IT" sz="2000" i="1" dirty="0" smtClean="0">
+                            <a:latin typeface="Cambria Math" panose="02040503050406030204" pitchFamily="18" charset="0"/>
+                          </a:rPr>
+                          <m:t>𝑈</m:t>
+                        </m:r>
+                      </m:e>
+                      <m:sup>
+                        <m:r>
+                          <a:rPr lang="it-IT" sz="2000" b="0" i="1" dirty="0" smtClean="0">
+                            <a:latin typeface="Cambria Math" panose="02040503050406030204" pitchFamily="18" charset="0"/>
+                          </a:rPr>
+                          <m:t>+</m:t>
+                        </m:r>
+                      </m:sup>
+                    </m:sSup>
+                  </m:oMath>
+                </a14:m>
+                <a:r>
+                  <a:rPr lang="it-IT" sz="2000" dirty="0"/>
+                  <a:t> (dato che </a:t>
+                </a:r>
+                <a14:m>
+                  <m:oMath xmlns:m="http://schemas.openxmlformats.org/officeDocument/2006/math">
+                    <m:r>
+                      <a:rPr lang="it-IT" sz="2000" i="1" dirty="0" smtClean="0">
+                        <a:latin typeface="Cambria Math" panose="02040503050406030204" pitchFamily="18" charset="0"/>
+                      </a:rPr>
+                      <m:t>𝑀</m:t>
+                    </m:r>
+                    <m:r>
+                      <a:rPr lang="it-IT" sz="2000" i="1" dirty="0" smtClean="0">
+                        <a:latin typeface="Cambria Math" panose="02040503050406030204" pitchFamily="18" charset="0"/>
+                      </a:rPr>
+                      <m:t>&gt;=</m:t>
+                    </m:r>
+                    <m:r>
+                      <a:rPr lang="it-IT" sz="2000" i="1" dirty="0" smtClean="0">
+                        <a:latin typeface="Cambria Math" panose="02040503050406030204" pitchFamily="18" charset="0"/>
+                      </a:rPr>
+                      <m:t>𝑚</m:t>
+                    </m:r>
+                  </m:oMath>
+                </a14:m>
+                <a:r>
+                  <a:rPr lang="it-IT" sz="2000" dirty="0"/>
+                  <a:t>).</a:t>
+                </a:r>
+              </a:p>
+            </p:txBody>
+          </p:sp>
+        </mc:Choice>
+        <mc:Fallback>
+          <p:sp>
+            <p:nvSpPr>
+              <p:cNvPr id="4" name="Segnaposto contenuto 3">
+                <a:extLst>
+                  <a:ext uri="{FF2B5EF4-FFF2-40B4-BE49-F238E27FC236}">
+                    <a16:creationId xmlns:a16="http://schemas.microsoft.com/office/drawing/2014/main" id="{E2B51104-1DE7-FA83-5179-FB6BCEFE384D}"/>
+                  </a:ext>
+                </a:extLst>
+              </p:cNvPr>
+              <p:cNvSpPr>
+                <a:spLocks noGrp="1" noRot="1" noChangeAspect="1" noMove="1" noResize="1" noEditPoints="1" noAdjustHandles="1" noChangeArrowheads="1" noChangeShapeType="1" noTextEdit="1"/>
+              </p:cNvSpPr>
+              <p:nvPr>
+                <p:ph sz="half" idx="1"/>
+              </p:nvPr>
+            </p:nvSpPr>
+            <p:spPr>
+              <a:xfrm>
+                <a:off x="550862" y="1336962"/>
+                <a:ext cx="9398001" cy="4744036"/>
+              </a:xfrm>
+              <a:blipFill>
+                <a:blip r:embed="rId3"/>
+                <a:stretch>
+                  <a:fillRect l="-1556" t="-1540" r="-1686"/>
+                </a:stretch>
+              </a:blipFill>
+            </p:spPr>
+            <p:txBody>
+              <a:bodyPr/>
+              <a:lstStyle/>
+              <a:p>
+                <a:r>
+                  <a:rPr lang="it-IT">
+                    <a:noFill/>
+                  </a:rPr>
+                  <a:t> </a:t>
+                </a:r>
+              </a:p>
+            </p:txBody>
+          </p:sp>
+        </mc:Fallback>
+      </mc:AlternateContent>
       <p:pic>
         <p:nvPicPr>
-          <p:cNvPr id="5" name="Immagine 4" descr="Immagine che contiene linea, Diagramma, schermata, testo&#10;&#10;Il contenuto generato dall'IA potrebbe non essere corretto.">
+          <p:cNvPr id="10" name="Immagine 9" descr="Immagine che contiene schizzo, arte, disegno, cerchio&#10;&#10;Il contenuto generato dall'IA potrebbe non essere corretto.">
             <a:extLst>
               <a:ext uri="{FF2B5EF4-FFF2-40B4-BE49-F238E27FC236}">
-                <a16:creationId xmlns:a16="http://schemas.microsoft.com/office/drawing/2014/main" id="{6CBD258D-3801-D92C-806C-BF204AA9A926}"/>
+                <a16:creationId xmlns:a16="http://schemas.microsoft.com/office/drawing/2014/main" id="{41DDE291-9E07-5634-6DBA-0B587BAE42E4}"/>
               </a:ext>
             </a:extLst>
           </p:cNvPr>
@@ -19955,25 +21620,98 @@
           <p:nvPr/>
         </p:nvPicPr>
         <p:blipFill>
-          <a:blip r:embed="rId4"/>
+          <a:blip r:embed="rId4">
+            <a:alphaModFix amt="38000"/>
+            <a:extLst>
+              <a:ext uri="{28A0092B-C50C-407E-A947-70E740481C1C}">
+                <a14:useLocalDpi xmlns:a14="http://schemas.microsoft.com/office/drawing/2010/main" val="0"/>
+              </a:ext>
+            </a:extLst>
+          </a:blip>
+          <a:srcRect r="44078" b="64193"/>
           <a:stretch>
             <a:fillRect/>
           </a:stretch>
         </p:blipFill>
         <p:spPr>
           <a:xfrm>
-            <a:off x="8376694" y="1154241"/>
-            <a:ext cx="3747297" cy="2899285"/>
+            <a:off x="9105931" y="4402319"/>
+            <a:ext cx="3086069" cy="2455682"/>
           </a:xfrm>
           <a:prstGeom prst="rect">
             <a:avLst/>
           </a:prstGeom>
         </p:spPr>
       </p:pic>
+      <p:sp>
+        <p:nvSpPr>
+          <p:cNvPr id="11" name="Segnaposto numero diapositiva 10">
+            <a:extLst>
+              <a:ext uri="{FF2B5EF4-FFF2-40B4-BE49-F238E27FC236}">
+                <a16:creationId xmlns:a16="http://schemas.microsoft.com/office/drawing/2014/main" id="{2CF0A597-1A39-0534-7398-DC1C56196A94}"/>
+              </a:ext>
+            </a:extLst>
+          </p:cNvPr>
+          <p:cNvSpPr>
+            <a:spLocks noGrp="1"/>
+          </p:cNvSpPr>
+          <p:nvPr>
+            <p:ph type="sldNum" sz="quarter" idx="12"/>
+          </p:nvPr>
+        </p:nvSpPr>
+        <p:spPr/>
+        <p:txBody>
+          <a:bodyPr/>
+          <a:lstStyle/>
+          <a:p>
+            <a:pPr rtl="0"/>
+            <a:fld id="{CBD12358-51D2-46B3-9BDE-DF29528B9454}" type="slidenum">
+              <a:rPr lang="it-IT" smtClean="0"/>
+              <a:t>9</a:t>
+            </a:fld>
+            <a:endParaRPr lang="it-IT" dirty="0"/>
+          </a:p>
+        </p:txBody>
+      </p:sp>
+      <p:sp>
+        <p:nvSpPr>
+          <p:cNvPr id="3" name="CasellaDiTesto 2">
+            <a:extLst>
+              <a:ext uri="{FF2B5EF4-FFF2-40B4-BE49-F238E27FC236}">
+                <a16:creationId xmlns:a16="http://schemas.microsoft.com/office/drawing/2014/main" id="{27855A39-787D-E177-D975-A3DA5D7F3EBB}"/>
+              </a:ext>
+            </a:extLst>
+          </p:cNvPr>
+          <p:cNvSpPr txBox="1"/>
+          <p:nvPr/>
+        </p:nvSpPr>
+        <p:spPr>
+          <a:xfrm>
+            <a:off x="683341" y="5431820"/>
+            <a:ext cx="65" cy="369332"/>
+          </a:xfrm>
+          <a:prstGeom prst="rect">
+            <a:avLst/>
+          </a:prstGeom>
+          <a:noFill/>
+        </p:spPr>
+        <p:txBody>
+          <a:bodyPr wrap="none" lIns="0" tIns="0" rIns="0" bIns="0" rtlCol="0">
+            <a:spAutoFit/>
+          </a:bodyPr>
+          <a:lstStyle/>
+          <a:p>
+            <a:endParaRPr lang="it-IT" sz="2400" i="1" dirty="0">
+              <a:latin typeface="Cambria" panose="02040503050406030204" pitchFamily="18" charset="0"/>
+              <a:ea typeface="Cambria" panose="02040503050406030204" pitchFamily="18" charset="0"/>
+            </a:endParaRPr>
+          </a:p>
+        </p:txBody>
+      </p:sp>
     </p:spTree>
     <p:extLst>
       <p:ext uri="{BB962C8B-B14F-4D97-AF65-F5344CB8AC3E}">
-        <p14:creationId xmlns:p14="http://schemas.microsoft.com/office/powerpoint/2010/main" val="4073578586"/>
+        <p14:creationId xmlns:p14="http://schemas.microsoft.com/office/powerpoint/2010/main" val="3338806814"/>
       </p:ext>
     </p:extLst>
   </p:cSld>
@@ -21087,6 +22825,15 @@
 </file>
 
 <file path=customXml/item2.xml><?xml version="1.0" encoding="utf-8"?>
+<?mso-contentType ?>
+<FormTemplates xmlns="http://schemas.microsoft.com/sharepoint/v3/contenttype/forms">
+  <Display>DocumentLibraryForm</Display>
+  <Edit>DocumentLibraryForm</Edit>
+  <New>DocumentLibraryForm</New>
+</FormTemplates>
+</file>
+
+<file path=customXml/item3.xml><?xml version="1.0" encoding="utf-8"?>
 <p:properties xmlns:p="http://schemas.microsoft.com/office/2006/metadata/properties" xmlns:xsi="http://www.w3.org/2001/XMLSchema-instance" xmlns:pc="http://schemas.microsoft.com/office/infopath/2007/PartnerControls">
   <documentManagement>
     <_ip_UnifiedCompliancePolicyUIAction xmlns="http://schemas.microsoft.com/sharepoint/v3" xsi:nil="true"/>
@@ -21104,15 +22851,6 @@
     <MediaServiceKeyPoints xmlns="71af3243-3dd4-4a8d-8c0d-dd76da1f02a5" xsi:nil="true"/>
   </documentManagement>
 </p:properties>
-</file>
-
-<file path=customXml/item3.xml><?xml version="1.0" encoding="utf-8"?>
-<?mso-contentType ?>
-<FormTemplates xmlns="http://schemas.microsoft.com/sharepoint/v3/contenttype/forms">
-  <Display>DocumentLibraryForm</Display>
-  <Edit>DocumentLibraryForm</Edit>
-  <New>DocumentLibraryForm</New>
-</FormTemplates>
 </file>
 
 <file path=customXml/itemProps1.xml><?xml version="1.0" encoding="utf-8"?>
@@ -21137,6 +22875,14 @@
 </file>
 
 <file path=customXml/itemProps2.xml><?xml version="1.0" encoding="utf-8"?>
+<ds:datastoreItem xmlns:ds="http://schemas.openxmlformats.org/officeDocument/2006/customXml" ds:itemID="{2F49CD38-5B57-4682-9FCE-B9174068D0AE}">
+  <ds:schemaRefs>
+    <ds:schemaRef ds:uri="http://schemas.microsoft.com/sharepoint/v3/contenttype/forms"/>
+  </ds:schemaRefs>
+</ds:datastoreItem>
+</file>
+
+<file path=customXml/itemProps3.xml><?xml version="1.0" encoding="utf-8"?>
 <ds:datastoreItem xmlns:ds="http://schemas.openxmlformats.org/officeDocument/2006/customXml" ds:itemID="{1F342EE1-43E5-4AFB-895D-B61B9656DC14}">
   <ds:schemaRefs>
     <ds:schemaRef ds:uri="http://purl.org/dc/elements/1.1/"/>
@@ -21155,14 +22901,6 @@
 </ds:datastoreItem>
 </file>
 
-<file path=customXml/itemProps3.xml><?xml version="1.0" encoding="utf-8"?>
-<ds:datastoreItem xmlns:ds="http://schemas.openxmlformats.org/officeDocument/2006/customXml" ds:itemID="{2F49CD38-5B57-4682-9FCE-B9174068D0AE}">
-  <ds:schemaRefs>
-    <ds:schemaRef ds:uri="http://schemas.microsoft.com/sharepoint/v3/contenttype/forms"/>
-  </ds:schemaRefs>
-</ds:datastoreItem>
-</file>
-
 <file path=docMetadata/LabelInfo.xml><?xml version="1.0" encoding="utf-8"?>
 <clbl:labelList xmlns:clbl="http://schemas.microsoft.com/office/2020/mipLabelMetadata"/>
 </file>